--- a/Q2_Project_Status_Update_Advanced_AI_Dialogue_Summarization_Framework.pptx
+++ b/Q2_Project_Status_Update_Advanced_AI_Dialogue_Summarization_Framework.pptx
@@ -4,22 +4,25 @@
   <p:sldMasterIdLst>
     <p:sldMasterId id="2147483648" r:id="rId1"/>
   </p:sldMasterIdLst>
+  <p:notesMasterIdLst>
+    <p:notesMasterId r:id="rId15"/>
+  </p:notesMasterIdLst>
   <p:sldIdLst>
     <p:sldId id="256" r:id="rId2"/>
     <p:sldId id="257" r:id="rId3"/>
     <p:sldId id="258" r:id="rId4"/>
-    <p:sldId id="259" r:id="rId5"/>
-    <p:sldId id="260" r:id="rId6"/>
-    <p:sldId id="261" r:id="rId7"/>
-    <p:sldId id="262" r:id="rId8"/>
-    <p:sldId id="263" r:id="rId9"/>
-    <p:sldId id="264" r:id="rId10"/>
-    <p:sldId id="265" r:id="rId11"/>
+    <p:sldId id="266" r:id="rId5"/>
+    <p:sldId id="267" r:id="rId6"/>
+    <p:sldId id="268" r:id="rId7"/>
+    <p:sldId id="259" r:id="rId8"/>
+    <p:sldId id="260" r:id="rId9"/>
+    <p:sldId id="262" r:id="rId10"/>
+    <p:sldId id="269" r:id="rId11"/>
+    <p:sldId id="264" r:id="rId12"/>
+    <p:sldId id="265" r:id="rId13"/>
+    <p:sldId id="270" r:id="rId14"/>
   </p:sldIdLst>
-  <p:notesMasterIdLst>
-    <p:notesMasterId r:id="rId12"/>
-  </p:notesMasterIdLst>
-  <p:sldSz cx="9144000" cy="5143500"/>
+  <p:sldSz cx="9144000" cy="5143500" type="screen16x9"/>
   <p:notesSz cx="5143500" cy="9144000"/>
   <p:defaultTextStyle>
     <a:lvl1pPr marL="0" algn="l" defTabSz="914400" rtl="0" eaLnBrk="1" latinLnBrk="0" hangingPunct="1">
@@ -113,6 +116,11 @@
       </a:defRPr>
     </a:lvl9pPr>
   </p:defaultTextStyle>
+  <p:extLst>
+    <p:ext uri="{EFAFB233-063F-42B5-8137-9DF3F51BA10A}">
+      <p15:sldGuideLst xmlns:p15="http://schemas.microsoft.com/office/powerpoint/2012/main"/>
+    </p:ext>
+  </p:extLst>
 </p:presentation>
 </file>
 
@@ -138,234 +146,10 @@
           <a:chExt cx="0" cy="0"/>
         </a:xfrm>
       </p:grpSpPr>
-      <p:sp>
-        <p:nvSpPr>
-          <p:cNvPr id="2" name="Header Placeholder 1"/>
-          <p:cNvSpPr>
-            <a:spLocks noGrp="1"/>
-          </p:cNvSpPr>
-          <p:nvPr>
-            <p:ph type="hdr" sz="quarter"/>
-          </p:nvPr>
-        </p:nvSpPr>
-        <p:spPr>
-          <a:xfrm>
-            <a:off x="0" y="0"/>
-            <a:ext cx="2971800" cy="458788"/>
-          </a:xfrm>
-          <a:prstGeom prst="rect">
-            <a:avLst/>
-          </a:prstGeom>
-        </p:spPr>
-        <p:txBody>
-          <a:bodyPr vert="horz" lIns="91440" tIns="45720" rIns="91440" bIns="45720" rtlCol="0"/>
-          <a:lstStyle>
-            <a:lvl1pPr algn="l">
-              <a:defRPr sz="1200"/>
-            </a:lvl1pPr>
-          </a:lstStyle>
-          <a:p>
-            <a:endParaRPr lang="en-US"/>
-          </a:p>
-        </p:txBody>
-      </p:sp>
-      <p:sp>
-        <p:nvSpPr>
-          <p:cNvPr id="3" name="Date Placeholder 2"/>
-          <p:cNvSpPr>
-            <a:spLocks noGrp="1"/>
-          </p:cNvSpPr>
-          <p:nvPr>
-            <p:ph type="dt" idx="1"/>
-          </p:nvPr>
-        </p:nvSpPr>
-        <p:spPr>
-          <a:xfrm>
-            <a:off x="3884613" y="0"/>
-            <a:ext cx="2971800" cy="458788"/>
-          </a:xfrm>
-          <a:prstGeom prst="rect">
-            <a:avLst/>
-          </a:prstGeom>
-        </p:spPr>
-        <p:txBody>
-          <a:bodyPr vert="horz" lIns="91440" tIns="45720" rIns="91440" bIns="45720" rtlCol="0"/>
-          <a:lstStyle>
-            <a:lvl1pPr algn="r">
-              <a:defRPr sz="1200"/>
-            </a:lvl1pPr>
-          </a:lstStyle>
-          <a:p>
-            <a:fld id="{5282F153-3F37-0F45-9E97-73ACFA13230C}" type="datetimeFigureOut">
-              <a:rPr lang="en-US"/>
-              <a:t>7/23/19</a:t>
-            </a:fld>
-            <a:endParaRPr lang="en-US"/>
-          </a:p>
-        </p:txBody>
-      </p:sp>
-      <p:sp>
-        <p:nvSpPr>
-          <p:cNvPr id="4" name="Slide Image Placeholder 3"/>
-          <p:cNvSpPr>
-            <a:spLocks noGrp="1" noRot="1" noChangeAspect="1"/>
-          </p:cNvSpPr>
-          <p:nvPr>
-            <p:ph type="sldImg" idx="2"/>
-          </p:nvPr>
-        </p:nvSpPr>
-        <p:spPr>
-          <a:xfrm>
-            <a:off x="685800" y="1143000"/>
-            <a:ext cx="5486400" cy="3086100"/>
-          </a:xfrm>
-          <a:prstGeom prst="rect">
-            <a:avLst/>
-          </a:prstGeom>
-          <a:noFill/>
-          <a:ln w="12700">
-            <a:solidFill>
-              <a:prstClr val="black"/>
-            </a:solidFill>
-          </a:ln>
-        </p:spPr>
-        <p:txBody>
-          <a:bodyPr vert="horz" lIns="91440" tIns="45720" rIns="91440" bIns="45720" rtlCol="0" anchor="ctr"/>
-          <a:lstStyle/>
-          <a:p>
-            <a:endParaRPr lang="en-US"/>
-          </a:p>
-        </p:txBody>
-      </p:sp>
-      <p:sp>
-        <p:nvSpPr>
-          <p:cNvPr id="5" name="Notes Placeholder 4"/>
-          <p:cNvSpPr>
-            <a:spLocks noGrp="1"/>
-          </p:cNvSpPr>
-          <p:nvPr>
-            <p:ph type="body" sz="quarter" idx="3"/>
-          </p:nvPr>
-        </p:nvSpPr>
-        <p:spPr>
-          <a:xfrm>
-            <a:off x="685800" y="4400550"/>
-            <a:ext cx="5486400" cy="3600450"/>
-          </a:xfrm>
-          <a:prstGeom prst="rect">
-            <a:avLst/>
-          </a:prstGeom>
-        </p:spPr>
-        <p:txBody>
-          <a:bodyPr vert="horz" lIns="91440" tIns="45720" rIns="91440" bIns="45720" rtlCol="0"/>
-          <a:lstStyle/>
-          <a:p>
-            <a:pPr lvl="0"/>
-            <a:r>
-              <a:rPr lang="en-US"/>
-              <a:t>Click to edit Master text styles</a:t>
-            </a:r>
-          </a:p>
-          <a:p>
-            <a:pPr lvl="1"/>
-            <a:r>
-              <a:rPr lang="en-US"/>
-              <a:t>Second level</a:t>
-            </a:r>
-          </a:p>
-          <a:p>
-            <a:pPr lvl="2"/>
-            <a:r>
-              <a:rPr lang="en-US"/>
-              <a:t>Third level</a:t>
-            </a:r>
-          </a:p>
-          <a:p>
-            <a:pPr lvl="3"/>
-            <a:r>
-              <a:rPr lang="en-US"/>
-              <a:t>Fourth level</a:t>
-            </a:r>
-          </a:p>
-          <a:p>
-            <a:pPr lvl="4"/>
-            <a:r>
-              <a:rPr lang="en-US"/>
-              <a:t>Fifth level</a:t>
-            </a:r>
-          </a:p>
-        </p:txBody>
-      </p:sp>
-      <p:sp>
-        <p:nvSpPr>
-          <p:cNvPr id="6" name="Footer Placeholder 5"/>
-          <p:cNvSpPr>
-            <a:spLocks noGrp="1"/>
-          </p:cNvSpPr>
-          <p:nvPr>
-            <p:ph type="ftr" sz="quarter" idx="4"/>
-          </p:nvPr>
-        </p:nvSpPr>
-        <p:spPr>
-          <a:xfrm>
-            <a:off x="0" y="8685213"/>
-            <a:ext cx="2971800" cy="458787"/>
-          </a:xfrm>
-          <a:prstGeom prst="rect">
-            <a:avLst/>
-          </a:prstGeom>
-        </p:spPr>
-        <p:txBody>
-          <a:bodyPr vert="horz" lIns="91440" tIns="45720" rIns="91440" bIns="45720" rtlCol="0" anchor="b"/>
-          <a:lstStyle>
-            <a:lvl1pPr algn="l">
-              <a:defRPr sz="1200"/>
-            </a:lvl1pPr>
-          </a:lstStyle>
-          <a:p>
-            <a:endParaRPr lang="en-US"/>
-          </a:p>
-        </p:txBody>
-      </p:sp>
-      <p:sp>
-        <p:nvSpPr>
-          <p:cNvPr id="7" name="Slide Number Placeholder 6"/>
-          <p:cNvSpPr>
-            <a:spLocks noGrp="1"/>
-          </p:cNvSpPr>
-          <p:nvPr>
-            <p:ph type="sldNum" sz="quarter" idx="5"/>
-          </p:nvPr>
-        </p:nvSpPr>
-        <p:spPr>
-          <a:xfrm>
-            <a:off x="3884613" y="8685213"/>
-            <a:ext cx="2971800" cy="458787"/>
-          </a:xfrm>
-          <a:prstGeom prst="rect">
-            <a:avLst/>
-          </a:prstGeom>
-        </p:spPr>
-        <p:txBody>
-          <a:bodyPr vert="horz" lIns="91440" tIns="45720" rIns="91440" bIns="45720" rtlCol="0" anchor="b"/>
-          <a:lstStyle>
-            <a:lvl1pPr algn="r">
-              <a:defRPr sz="1200"/>
-            </a:lvl1pPr>
-          </a:lstStyle>
-          <a:p>
-            <a:fld id="{CE5E9CC1-C706-0F49-92D6-E571CC5EEA8F}" type="slidenum">
-              <a:rPr lang="en-US"/>
-              <a:t>‹#›</a:t>
-            </a:fld>
-            <a:endParaRPr lang="en-US"/>
-          </a:p>
-        </p:txBody>
-      </p:sp>
     </p:spTree>
     <p:extLst>
       <p:ext uri="{BB962C8B-B14F-4D97-AF65-F5344CB8AC3E}">
-        <p14:creationId xmlns:p14="http://schemas.microsoft.com/office/powerpoint/2010/main" val="1024086991"/>
+        <p14:creationId xmlns:p14="http://schemas.microsoft.com/office/powerpoint/2010/main" val="460777169"/>
       </p:ext>
     </p:extLst>
   </p:cSld>
@@ -513,7 +297,6 @@
               <a:rPr lang="en-US" dirty="0"/>
               <a:t>Good morning, everyone. We're here today for the Q2 project status update on our Advanced AI Dialogue Summarization Framework. This project is all about building a unified, knowledge-grounded generative AI framework. It's designed for adaptive dialogue summarization and intelligent information retrieval. Let's dive into what we've accomplished this quarter.</a:t>
             </a:r>
-            <a:endParaRPr lang="en-US" dirty="0"/>
           </a:p>
         </p:txBody>
       </p:sp>
@@ -558,6 +341,177 @@
   <p:cSld>
     <p:spTree>
       <p:nvGrpSpPr>
+        <p:cNvPr id="1" name="">
+          <a:extLst>
+            <a:ext uri="{FF2B5EF4-FFF2-40B4-BE49-F238E27FC236}">
+              <a16:creationId xmlns:a16="http://schemas.microsoft.com/office/drawing/2014/main" id="{F7ED4A06-DE16-8CDF-7E7E-982FB251C769}"/>
+            </a:ext>
+          </a:extLst>
+        </p:cNvPr>
+        <p:cNvGrpSpPr/>
+        <p:nvPr/>
+      </p:nvGrpSpPr>
+      <p:grpSpPr>
+        <a:xfrm>
+          <a:off x="0" y="0"/>
+          <a:ext cx="0" cy="0"/>
+          <a:chOff x="0" y="0"/>
+          <a:chExt cx="0" cy="0"/>
+        </a:xfrm>
+      </p:grpSpPr>
+      <p:sp>
+        <p:nvSpPr>
+          <p:cNvPr id="2" name="Slide Image Placeholder 1">
+            <a:extLst>
+              <a:ext uri="{FF2B5EF4-FFF2-40B4-BE49-F238E27FC236}">
+                <a16:creationId xmlns:a16="http://schemas.microsoft.com/office/drawing/2014/main" id="{58BA3803-DD2C-F21B-28AB-1B34E76381D6}"/>
+              </a:ext>
+            </a:extLst>
+          </p:cNvPr>
+          <p:cNvSpPr>
+            <a:spLocks noGrp="1" noRot="1" noChangeAspect="1"/>
+          </p:cNvSpPr>
+          <p:nvPr>
+            <p:ph type="sldImg"/>
+          </p:nvPr>
+        </p:nvSpPr>
+        <p:spPr/>
+      </p:sp>
+      <p:sp>
+        <p:nvSpPr>
+          <p:cNvPr id="3" name="Notes Placeholder 2">
+            <a:extLst>
+              <a:ext uri="{FF2B5EF4-FFF2-40B4-BE49-F238E27FC236}">
+                <a16:creationId xmlns:a16="http://schemas.microsoft.com/office/drawing/2014/main" id="{582F8CD8-8EBA-46E3-28C4-161E9F92C4D1}"/>
+              </a:ext>
+            </a:extLst>
+          </p:cNvPr>
+          <p:cNvSpPr>
+            <a:spLocks noGrp="1"/>
+          </p:cNvSpPr>
+          <p:nvPr>
+            <p:ph type="body" idx="1"/>
+          </p:nvPr>
+        </p:nvSpPr>
+        <p:spPr/>
+        <p:txBody>
+          <a:bodyPr/>
+          <a:lstStyle/>
+          <a:p>
+            <a:r>
+              <a:rPr lang="en-US" dirty="0"/>
+              <a:t>Let's briefly revisit why this project is so critical. Dialogues are inherently messy, full of slang, interruptions, and multiple speakers. Traditional large language models often suffer from semantic drift in long conversations and can generate 'plausible lies.' Our core goal is to ensure every dialogue summary is concise and 100% factually grounded. To achieve this, we're developing a RAG-based pipeline for real-time semantic searches, implementing a filtering layer for noise reduction, and enabling adaptive retrieval to know precisely when to fetch external data. This directly addresses the challenges we just discussed.</a:t>
+            </a:r>
+          </a:p>
+        </p:txBody>
+      </p:sp>
+      <p:sp>
+        <p:nvSpPr>
+          <p:cNvPr id="4" name="Slide Number Placeholder 3">
+            <a:extLst>
+              <a:ext uri="{FF2B5EF4-FFF2-40B4-BE49-F238E27FC236}">
+                <a16:creationId xmlns:a16="http://schemas.microsoft.com/office/drawing/2014/main" id="{D513866C-2033-AD12-53D7-1A653B421667}"/>
+              </a:ext>
+            </a:extLst>
+          </p:cNvPr>
+          <p:cNvSpPr>
+            <a:spLocks noGrp="1"/>
+          </p:cNvSpPr>
+          <p:nvPr>
+            <p:ph type="sldNum" sz="quarter" idx="10"/>
+          </p:nvPr>
+        </p:nvSpPr>
+        <p:spPr/>
+        <p:txBody>
+          <a:bodyPr/>
+          <a:lstStyle/>
+          <a:p>
+            <a:pPr marL="0" marR="0" lvl="0" indent="0" algn="l" defTabSz="914400" rtl="0" eaLnBrk="1" fontAlgn="auto" latinLnBrk="0" hangingPunct="1">
+              <a:lnSpc>
+                <a:spcPct val="100000"/>
+              </a:lnSpc>
+              <a:spcBef>
+                <a:spcPts val="0"/>
+              </a:spcBef>
+              <a:spcAft>
+                <a:spcPts val="0"/>
+              </a:spcAft>
+              <a:buClrTx/>
+              <a:buSzTx/>
+              <a:buFontTx/>
+              <a:buNone/>
+              <a:tabLst/>
+              <a:defRPr/>
+            </a:pPr>
+            <a:fld id="{F7021451-1387-4CA6-816F-3879F97B5CBC}" type="slidenum">
+              <a:rPr kumimoji="0" lang="en-US" sz="1800" b="0" i="0" u="none" strike="noStrike" kern="1200" cap="none" spc="0" normalizeH="0" baseline="0" noProof="0">
+                <a:ln>
+                  <a:noFill/>
+                </a:ln>
+                <a:solidFill>
+                  <a:prstClr val="black"/>
+                </a:solidFill>
+                <a:effectLst/>
+                <a:uLnTx/>
+                <a:uFillTx/>
+                <a:latin typeface="Aptos" panose="02110004020202020204"/>
+                <a:ea typeface="+mn-ea"/>
+                <a:cs typeface="+mn-cs"/>
+              </a:rPr>
+              <a:pPr marL="0" marR="0" lvl="0" indent="0" algn="l" defTabSz="914400" rtl="0" eaLnBrk="1" fontAlgn="auto" latinLnBrk="0" hangingPunct="1">
+                <a:lnSpc>
+                  <a:spcPct val="100000"/>
+                </a:lnSpc>
+                <a:spcBef>
+                  <a:spcPts val="0"/>
+                </a:spcBef>
+                <a:spcAft>
+                  <a:spcPts val="0"/>
+                </a:spcAft>
+                <a:buClrTx/>
+                <a:buSzTx/>
+                <a:buFontTx/>
+                <a:buNone/>
+                <a:tabLst/>
+                <a:defRPr/>
+              </a:pPr>
+              <a:t>10</a:t>
+            </a:fld>
+            <a:endParaRPr kumimoji="0" lang="en-US" sz="1800" b="0" i="0" u="none" strike="noStrike" kern="1200" cap="none" spc="0" normalizeH="0" baseline="0" noProof="0">
+              <a:ln>
+                <a:noFill/>
+              </a:ln>
+              <a:solidFill>
+                <a:prstClr val="black"/>
+              </a:solidFill>
+              <a:effectLst/>
+              <a:uLnTx/>
+              <a:uFillTx/>
+              <a:latin typeface="Aptos" panose="02110004020202020204"/>
+              <a:ea typeface="+mn-ea"/>
+              <a:cs typeface="+mn-cs"/>
+            </a:endParaRPr>
+          </a:p>
+        </p:txBody>
+      </p:sp>
+    </p:spTree>
+    <p:extLst>
+      <p:ext uri="{BB962C8B-B14F-4D97-AF65-F5344CB8AC3E}">
+        <p14:creationId xmlns:p14="http://schemas.microsoft.com/office/powerpoint/2010/main" val="2772597717"/>
+      </p:ext>
+    </p:extLst>
+  </p:cSld>
+  <p:clrMapOvr>
+    <a:masterClrMapping/>
+  </p:clrMapOvr>
+</p:notes>
+</file>
+
+<file path=ppt/notesSlides/notesSlide11.xml><?xml version="1.0" encoding="utf-8"?>
+<p:notes xmlns:a="http://schemas.openxmlformats.org/drawingml/2006/main" xmlns:r="http://schemas.openxmlformats.org/officeDocument/2006/relationships" xmlns:p="http://schemas.openxmlformats.org/presentationml/2006/main">
+  <p:cSld>
+    <p:spTree>
+      <p:nvGrpSpPr>
         <p:cNvPr id="1" name=""/>
         <p:cNvGrpSpPr/>
         <p:nvPr/>
@@ -599,9 +553,8 @@
           <a:p>
             <a:r>
               <a:rPr lang="en-US" dirty="0"/>
-              <a:t>Thank you all for your time and attention today. I'd now like to open the floor to any questions you might have regarding our Q2 progress, the methodology, or our upcoming implementation phases. We appreciate your continued support.</a:t>
-            </a:r>
-            <a:endParaRPr lang="en-US" dirty="0"/>
+              <a:t>In conclusion, our framework is on track to deliver a scalable solution for accurate, real-time dialogue intelligence. We're significantly mitigating the risk of AI hallucinations in multi-turn conversations. Our immediate next steps involve initiating domain-specific fine-tuning using LoRA and beginning preliminary performance testing on the DialogSum dataset. We'll also refine our filtering layer for even better noise reduction. Looking ahead, we're already exploring exciting future scopes like multimodal retrieval for video calls and optimizing for edge devices. This ensures our solution remains cutting-edge and adaptable. Now, I'd like to open the floor for your questions.</a:t>
+            </a:r>
           </a:p>
         </p:txBody>
       </p:sp>
@@ -622,7 +575,7 @@
           <a:p>
             <a:fld id="{F7021451-1387-4CA6-816F-3879F97B5CBC}" type="slidenum">
               <a:rPr lang="en-US"/>
-              <a:t>10</a:t>
+              <a:t>11</a:t>
             </a:fld>
             <a:endParaRPr lang="en-US"/>
           </a:p>
@@ -632,6 +585,204 @@
     <p:extLst>
       <p:ext uri="{BB962C8B-B14F-4D97-AF65-F5344CB8AC3E}">
         <p14:creationId xmlns:p14="http://schemas.microsoft.com/office/powerpoint/2010/main" val="1024086991"/>
+      </p:ext>
+    </p:extLst>
+  </p:cSld>
+  <p:clrMapOvr>
+    <a:masterClrMapping/>
+  </p:clrMapOvr>
+</p:notes>
+</file>
+
+<file path=ppt/notesSlides/notesSlide12.xml><?xml version="1.0" encoding="utf-8"?>
+<p:notes xmlns:a="http://schemas.openxmlformats.org/drawingml/2006/main" xmlns:r="http://schemas.openxmlformats.org/officeDocument/2006/relationships" xmlns:p="http://schemas.openxmlformats.org/presentationml/2006/main">
+  <p:cSld>
+    <p:spTree>
+      <p:nvGrpSpPr>
+        <p:cNvPr id="1" name=""/>
+        <p:cNvGrpSpPr/>
+        <p:nvPr/>
+      </p:nvGrpSpPr>
+      <p:grpSpPr>
+        <a:xfrm>
+          <a:off x="0" y="0"/>
+          <a:ext cx="0" cy="0"/>
+          <a:chOff x="0" y="0"/>
+          <a:chExt cx="0" cy="0"/>
+        </a:xfrm>
+      </p:grpSpPr>
+      <p:sp>
+        <p:nvSpPr>
+          <p:cNvPr id="2" name="Slide Image Placeholder 1"/>
+          <p:cNvSpPr>
+            <a:spLocks noGrp="1" noRot="1" noChangeAspect="1"/>
+          </p:cNvSpPr>
+          <p:nvPr>
+            <p:ph type="sldImg"/>
+          </p:nvPr>
+        </p:nvSpPr>
+        <p:spPr/>
+      </p:sp>
+      <p:sp>
+        <p:nvSpPr>
+          <p:cNvPr id="3" name="Notes Placeholder 2"/>
+          <p:cNvSpPr>
+            <a:spLocks noGrp="1"/>
+          </p:cNvSpPr>
+          <p:nvPr>
+            <p:ph type="body" idx="1"/>
+          </p:nvPr>
+        </p:nvSpPr>
+        <p:spPr/>
+        <p:txBody>
+          <a:bodyPr/>
+          <a:lstStyle/>
+          <a:p>
+            <a:r>
+              <a:rPr lang="en-US" dirty="0"/>
+              <a:t>Thank you all for your time and attention today. I'd now like to open the floor to any questions you might have regarding our Q2 progress, the methodology, or our upcoming implementation phases. We appreciate your continued support.</a:t>
+            </a:r>
+          </a:p>
+        </p:txBody>
+      </p:sp>
+      <p:sp>
+        <p:nvSpPr>
+          <p:cNvPr id="4" name="Slide Number Placeholder 3"/>
+          <p:cNvSpPr>
+            <a:spLocks noGrp="1"/>
+          </p:cNvSpPr>
+          <p:nvPr>
+            <p:ph type="sldNum" sz="quarter" idx="10"/>
+          </p:nvPr>
+        </p:nvSpPr>
+        <p:spPr/>
+        <p:txBody>
+          <a:bodyPr/>
+          <a:lstStyle/>
+          <a:p>
+            <a:fld id="{F7021451-1387-4CA6-816F-3879F97B5CBC}" type="slidenum">
+              <a:rPr lang="en-US"/>
+              <a:t>12</a:t>
+            </a:fld>
+            <a:endParaRPr lang="en-US"/>
+          </a:p>
+        </p:txBody>
+      </p:sp>
+    </p:spTree>
+    <p:extLst>
+      <p:ext uri="{BB962C8B-B14F-4D97-AF65-F5344CB8AC3E}">
+        <p14:creationId xmlns:p14="http://schemas.microsoft.com/office/powerpoint/2010/main" val="1024086991"/>
+      </p:ext>
+    </p:extLst>
+  </p:cSld>
+  <p:clrMapOvr>
+    <a:masterClrMapping/>
+  </p:clrMapOvr>
+</p:notes>
+</file>
+
+<file path=ppt/notesSlides/notesSlide13.xml><?xml version="1.0" encoding="utf-8"?>
+<p:notes xmlns:a="http://schemas.openxmlformats.org/drawingml/2006/main" xmlns:r="http://schemas.openxmlformats.org/officeDocument/2006/relationships" xmlns:p="http://schemas.openxmlformats.org/presentationml/2006/main">
+  <p:cSld>
+    <p:spTree>
+      <p:nvGrpSpPr>
+        <p:cNvPr id="1" name="">
+          <a:extLst>
+            <a:ext uri="{FF2B5EF4-FFF2-40B4-BE49-F238E27FC236}">
+              <a16:creationId xmlns:a16="http://schemas.microsoft.com/office/drawing/2014/main" id="{F5625350-BB36-A7A9-9891-441B1EC3BE01}"/>
+            </a:ext>
+          </a:extLst>
+        </p:cNvPr>
+        <p:cNvGrpSpPr/>
+        <p:nvPr/>
+      </p:nvGrpSpPr>
+      <p:grpSpPr>
+        <a:xfrm>
+          <a:off x="0" y="0"/>
+          <a:ext cx="0" cy="0"/>
+          <a:chOff x="0" y="0"/>
+          <a:chExt cx="0" cy="0"/>
+        </a:xfrm>
+      </p:grpSpPr>
+      <p:sp>
+        <p:nvSpPr>
+          <p:cNvPr id="2" name="Slide Image Placeholder 1">
+            <a:extLst>
+              <a:ext uri="{FF2B5EF4-FFF2-40B4-BE49-F238E27FC236}">
+                <a16:creationId xmlns:a16="http://schemas.microsoft.com/office/drawing/2014/main" id="{BAA7DFBA-910D-C1F8-617C-10C4E9C15FB9}"/>
+              </a:ext>
+            </a:extLst>
+          </p:cNvPr>
+          <p:cNvSpPr>
+            <a:spLocks noGrp="1" noRot="1" noChangeAspect="1"/>
+          </p:cNvSpPr>
+          <p:nvPr>
+            <p:ph type="sldImg"/>
+          </p:nvPr>
+        </p:nvSpPr>
+        <p:spPr/>
+      </p:sp>
+      <p:sp>
+        <p:nvSpPr>
+          <p:cNvPr id="3" name="Notes Placeholder 2">
+            <a:extLst>
+              <a:ext uri="{FF2B5EF4-FFF2-40B4-BE49-F238E27FC236}">
+                <a16:creationId xmlns:a16="http://schemas.microsoft.com/office/drawing/2014/main" id="{61DF1505-376F-1ED2-FCD1-668E6A1D15C2}"/>
+              </a:ext>
+            </a:extLst>
+          </p:cNvPr>
+          <p:cNvSpPr>
+            <a:spLocks noGrp="1"/>
+          </p:cNvSpPr>
+          <p:nvPr>
+            <p:ph type="body" idx="1"/>
+          </p:nvPr>
+        </p:nvSpPr>
+        <p:spPr/>
+        <p:txBody>
+          <a:bodyPr/>
+          <a:lstStyle/>
+          <a:p>
+            <a:r>
+              <a:rPr lang="en-US" dirty="0"/>
+              <a:t>Thank you all for your time and attention today. I'd now like to open the floor to any questions you might have regarding our Q2 progress, the methodology, or our upcoming implementation phases. We appreciate your continued support.</a:t>
+            </a:r>
+          </a:p>
+        </p:txBody>
+      </p:sp>
+      <p:sp>
+        <p:nvSpPr>
+          <p:cNvPr id="4" name="Slide Number Placeholder 3">
+            <a:extLst>
+              <a:ext uri="{FF2B5EF4-FFF2-40B4-BE49-F238E27FC236}">
+                <a16:creationId xmlns:a16="http://schemas.microsoft.com/office/drawing/2014/main" id="{F50C709C-B31E-BC60-2AF0-AED03A090536}"/>
+              </a:ext>
+            </a:extLst>
+          </p:cNvPr>
+          <p:cNvSpPr>
+            <a:spLocks noGrp="1"/>
+          </p:cNvSpPr>
+          <p:nvPr>
+            <p:ph type="sldNum" sz="quarter" idx="10"/>
+          </p:nvPr>
+        </p:nvSpPr>
+        <p:spPr/>
+        <p:txBody>
+          <a:bodyPr/>
+          <a:lstStyle/>
+          <a:p>
+            <a:fld id="{F7021451-1387-4CA6-816F-3879F97B5CBC}" type="slidenum">
+              <a:rPr lang="en-US"/>
+              <a:t>13</a:t>
+            </a:fld>
+            <a:endParaRPr lang="en-US"/>
+          </a:p>
+        </p:txBody>
+      </p:sp>
+    </p:spTree>
+    <p:extLst>
+      <p:ext uri="{BB962C8B-B14F-4D97-AF65-F5344CB8AC3E}">
+        <p14:creationId xmlns:p14="http://schemas.microsoft.com/office/powerpoint/2010/main" val="2696413116"/>
       </p:ext>
     </p:extLst>
   </p:cSld>
@@ -689,7 +840,6 @@
               <a:rPr lang="en-US" dirty="0"/>
               <a:t>To kick things off, our vision is to bridge the gap between fluent text generation and factual accuracy in AI. We're moving beyond models that just guess; instead, we dynamically query external knowledge bases to verify facts. Our key innovation combines Retrieval-Augmented Generation with context-aware dialogue modeling to eliminate the 'hallucination' problem. I'm pleased to report that in Q2, we successfully completed our environment setup, data indexing, and initial vector store creation. This sets a strong foundation for our next steps.</a:t>
             </a:r>
-            <a:endParaRPr lang="en-US" dirty="0"/>
           </a:p>
         </p:txBody>
       </p:sp>
@@ -777,7 +927,6 @@
               <a:rPr lang="en-US" dirty="0"/>
               <a:t>Let's briefly revisit why this project is so critical. Dialogues are inherently messy, full of slang, interruptions, and multiple speakers. Traditional large language models often suffer from semantic drift in long conversations and can generate 'plausible lies.' Our core goal is to ensure every dialogue summary is concise and 100% factually grounded. To achieve this, we're developing a RAG-based pipeline for real-time semantic searches, implementing a filtering layer for noise reduction, and enabling adaptive retrieval to know precisely when to fetch external data. This directly addresses the challenges we just discussed.</a:t>
             </a:r>
-            <a:endParaRPr lang="en-US" dirty="0"/>
           </a:p>
         </p:txBody>
       </p:sp>
@@ -822,7 +971,13 @@
   <p:cSld>
     <p:spTree>
       <p:nvGrpSpPr>
-        <p:cNvPr id="1" name=""/>
+        <p:cNvPr id="1" name="">
+          <a:extLst>
+            <a:ext uri="{FF2B5EF4-FFF2-40B4-BE49-F238E27FC236}">
+              <a16:creationId xmlns:a16="http://schemas.microsoft.com/office/drawing/2014/main" id="{D67B88CD-31A9-583F-8A19-F1ACD3BE1736}"/>
+            </a:ext>
+          </a:extLst>
+        </p:cNvPr>
         <p:cNvGrpSpPr/>
         <p:nvPr/>
       </p:nvGrpSpPr>
@@ -836,7 +991,13 @@
       </p:grpSpPr>
       <p:sp>
         <p:nvSpPr>
-          <p:cNvPr id="2" name="Slide Image Placeholder 1"/>
+          <p:cNvPr id="2" name="Slide Image Placeholder 1">
+            <a:extLst>
+              <a:ext uri="{FF2B5EF4-FFF2-40B4-BE49-F238E27FC236}">
+                <a16:creationId xmlns:a16="http://schemas.microsoft.com/office/drawing/2014/main" id="{AB54EA52-7A17-E9A1-4E6D-B7E51F3C25E9}"/>
+              </a:ext>
+            </a:extLst>
+          </p:cNvPr>
           <p:cNvSpPr>
             <a:spLocks noGrp="1" noRot="1" noChangeAspect="1"/>
           </p:cNvSpPr>
@@ -848,7 +1009,13 @@
       </p:sp>
       <p:sp>
         <p:nvSpPr>
-          <p:cNvPr id="3" name="Notes Placeholder 2"/>
+          <p:cNvPr id="3" name="Notes Placeholder 2">
+            <a:extLst>
+              <a:ext uri="{FF2B5EF4-FFF2-40B4-BE49-F238E27FC236}">
+                <a16:creationId xmlns:a16="http://schemas.microsoft.com/office/drawing/2014/main" id="{309BB679-A424-FAD9-95BF-F01A95934B20}"/>
+              </a:ext>
+            </a:extLst>
+          </p:cNvPr>
           <p:cNvSpPr>
             <a:spLocks noGrp="1"/>
           </p:cNvSpPr>
@@ -863,15 +1030,20 @@
           <a:p>
             <a:r>
               <a:rPr lang="en-US" dirty="0"/>
-              <a:t>In Q2, we made significant technical strides in implementing our methodology. We established robust input processing pipelines, handling tokenization for multi-turn dialogues and automating speaker identification. Our retrieval engine is now fully functional; we can formulate queries from dialogue snippets and efficiently search our ChromaDB and FAISS vector databases using Dense Passage Retrieval, achieving sub-second latency. We also successfully developed the augmentation strategy to inject retrieved 'Knowledge Triples' directly into our LLM prompts, optimizing them for factual grounding. This progress directly supports our core objectives.</a:t>
-            </a:r>
-            <a:endParaRPr lang="en-US" dirty="0"/>
-          </a:p>
-        </p:txBody>
-      </p:sp>
-      <p:sp>
-        <p:nvSpPr>
-          <p:cNvPr id="4" name="Slide Number Placeholder 3"/>
+              <a:t>Let's briefly revisit why this project is so critical. Dialogues are inherently messy, full of slang, interruptions, and multiple speakers. Traditional large language models often suffer from semantic drift in long conversations and can generate 'plausible lies.' Our core goal is to ensure every dialogue summary is concise and 100% factually grounded. To achieve this, we're developing a RAG-based pipeline for real-time semantic searches, implementing a filtering layer for noise reduction, and enabling adaptive retrieval to know precisely when to fetch external data. This directly addresses the challenges we just discussed.</a:t>
+            </a:r>
+          </a:p>
+        </p:txBody>
+      </p:sp>
+      <p:sp>
+        <p:nvSpPr>
+          <p:cNvPr id="4" name="Slide Number Placeholder 3">
+            <a:extLst>
+              <a:ext uri="{FF2B5EF4-FFF2-40B4-BE49-F238E27FC236}">
+                <a16:creationId xmlns:a16="http://schemas.microsoft.com/office/drawing/2014/main" id="{D964E1C0-FCBE-59B8-8502-C8ECDDEB4B1D}"/>
+              </a:ext>
+            </a:extLst>
+          </p:cNvPr>
           <p:cNvSpPr>
             <a:spLocks noGrp="1"/>
           </p:cNvSpPr>
@@ -895,7 +1067,7 @@
     </p:spTree>
     <p:extLst>
       <p:ext uri="{BB962C8B-B14F-4D97-AF65-F5344CB8AC3E}">
-        <p14:creationId xmlns:p14="http://schemas.microsoft.com/office/powerpoint/2010/main" val="1024086991"/>
+        <p14:creationId xmlns:p14="http://schemas.microsoft.com/office/powerpoint/2010/main" val="1598414005"/>
       </p:ext>
     </p:extLst>
   </p:cSld>
@@ -910,7 +1082,13 @@
   <p:cSld>
     <p:spTree>
       <p:nvGrpSpPr>
-        <p:cNvPr id="1" name=""/>
+        <p:cNvPr id="1" name="">
+          <a:extLst>
+            <a:ext uri="{FF2B5EF4-FFF2-40B4-BE49-F238E27FC236}">
+              <a16:creationId xmlns:a16="http://schemas.microsoft.com/office/drawing/2014/main" id="{D33C0DE5-C8E6-86D7-4204-61F9F5C4DCCF}"/>
+            </a:ext>
+          </a:extLst>
+        </p:cNvPr>
         <p:cNvGrpSpPr/>
         <p:nvPr/>
       </p:nvGrpSpPr>
@@ -924,7 +1102,13 @@
       </p:grpSpPr>
       <p:sp>
         <p:nvSpPr>
-          <p:cNvPr id="2" name="Slide Image Placeholder 1"/>
+          <p:cNvPr id="2" name="Slide Image Placeholder 1">
+            <a:extLst>
+              <a:ext uri="{FF2B5EF4-FFF2-40B4-BE49-F238E27FC236}">
+                <a16:creationId xmlns:a16="http://schemas.microsoft.com/office/drawing/2014/main" id="{1C679238-D694-C47D-94AD-BB02833E3847}"/>
+              </a:ext>
+            </a:extLst>
+          </p:cNvPr>
           <p:cNvSpPr>
             <a:spLocks noGrp="1" noRot="1" noChangeAspect="1"/>
           </p:cNvSpPr>
@@ -936,7 +1120,13 @@
       </p:sp>
       <p:sp>
         <p:nvSpPr>
-          <p:cNvPr id="3" name="Notes Placeholder 2"/>
+          <p:cNvPr id="3" name="Notes Placeholder 2">
+            <a:extLst>
+              <a:ext uri="{FF2B5EF4-FFF2-40B4-BE49-F238E27FC236}">
+                <a16:creationId xmlns:a16="http://schemas.microsoft.com/office/drawing/2014/main" id="{E3B3046D-D7E0-A4F4-ACC9-2082BB3AE2EB}"/>
+              </a:ext>
+            </a:extLst>
+          </p:cNvPr>
           <p:cNvSpPr>
             <a:spLocks noGrp="1"/>
           </p:cNvSpPr>
@@ -951,15 +1141,20 @@
           <a:p>
             <a:r>
               <a:rPr lang="en-US" dirty="0"/>
-              <a:t>This slide outlines our system architecture, which is now fully mapped out and partially implemented. The process begins with multi-turn user dialogue, which passes through a Transformer-based Bi-Encoder. This is then checked against our integrated external Knowledge Base. The critical component we focused on this quarter is the Fusion Layer, which intelligently combines the dialogue context with the retrieved context. This combined information then goes to the Decoder to generate the final grounded summary, and finally, a Verifier performs a secondary check for factual consistency. This architecture ensures factual accuracy at every step.</a:t>
-            </a:r>
-            <a:endParaRPr lang="en-US" dirty="0"/>
-          </a:p>
-        </p:txBody>
-      </p:sp>
-      <p:sp>
-        <p:nvSpPr>
-          <p:cNvPr id="4" name="Slide Number Placeholder 3"/>
+              <a:t>Let's briefly revisit why this project is so critical. Dialogues are inherently messy, full of slang, interruptions, and multiple speakers. Traditional large language models often suffer from semantic drift in long conversations and can generate 'plausible lies.' Our core goal is to ensure every dialogue summary is concise and 100% factually grounded. To achieve this, we're developing a RAG-based pipeline for real-time semantic searches, implementing a filtering layer for noise reduction, and enabling adaptive retrieval to know precisely when to fetch external data. This directly addresses the challenges we just discussed.</a:t>
+            </a:r>
+          </a:p>
+        </p:txBody>
+      </p:sp>
+      <p:sp>
+        <p:nvSpPr>
+          <p:cNvPr id="4" name="Slide Number Placeholder 3">
+            <a:extLst>
+              <a:ext uri="{FF2B5EF4-FFF2-40B4-BE49-F238E27FC236}">
+                <a16:creationId xmlns:a16="http://schemas.microsoft.com/office/drawing/2014/main" id="{11D2F08B-3B52-79EF-909E-23BE4486A8A2}"/>
+              </a:ext>
+            </a:extLst>
+          </p:cNvPr>
           <p:cNvSpPr>
             <a:spLocks noGrp="1"/>
           </p:cNvSpPr>
@@ -983,7 +1178,7 @@
     </p:spTree>
     <p:extLst>
       <p:ext uri="{BB962C8B-B14F-4D97-AF65-F5344CB8AC3E}">
-        <p14:creationId xmlns:p14="http://schemas.microsoft.com/office/powerpoint/2010/main" val="1024086991"/>
+        <p14:creationId xmlns:p14="http://schemas.microsoft.com/office/powerpoint/2010/main" val="2832708548"/>
       </p:ext>
     </p:extLst>
   </p:cSld>
@@ -998,7 +1193,13 @@
   <p:cSld>
     <p:spTree>
       <p:nvGrpSpPr>
-        <p:cNvPr id="1" name=""/>
+        <p:cNvPr id="1" name="">
+          <a:extLst>
+            <a:ext uri="{FF2B5EF4-FFF2-40B4-BE49-F238E27FC236}">
+              <a16:creationId xmlns:a16="http://schemas.microsoft.com/office/drawing/2014/main" id="{56CE7A06-4224-6097-5F74-42501F2F2CEC}"/>
+            </a:ext>
+          </a:extLst>
+        </p:cNvPr>
         <p:cNvGrpSpPr/>
         <p:nvPr/>
       </p:nvGrpSpPr>
@@ -1012,7 +1213,13 @@
       </p:grpSpPr>
       <p:sp>
         <p:nvSpPr>
-          <p:cNvPr id="2" name="Slide Image Placeholder 1"/>
+          <p:cNvPr id="2" name="Slide Image Placeholder 1">
+            <a:extLst>
+              <a:ext uri="{FF2B5EF4-FFF2-40B4-BE49-F238E27FC236}">
+                <a16:creationId xmlns:a16="http://schemas.microsoft.com/office/drawing/2014/main" id="{8DC5B356-44DA-2647-7ADE-2CB44114868E}"/>
+              </a:ext>
+            </a:extLst>
+          </p:cNvPr>
           <p:cNvSpPr>
             <a:spLocks noGrp="1" noRot="1" noChangeAspect="1"/>
           </p:cNvSpPr>
@@ -1024,7 +1231,13 @@
       </p:sp>
       <p:sp>
         <p:nvSpPr>
-          <p:cNvPr id="3" name="Notes Placeholder 2"/>
+          <p:cNvPr id="3" name="Notes Placeholder 2">
+            <a:extLst>
+              <a:ext uri="{FF2B5EF4-FFF2-40B4-BE49-F238E27FC236}">
+                <a16:creationId xmlns:a16="http://schemas.microsoft.com/office/drawing/2014/main" id="{7A750E02-2C17-2F77-68EA-511B9FBD09F3}"/>
+              </a:ext>
+            </a:extLst>
+          </p:cNvPr>
           <p:cNvSpPr>
             <a:spLocks noGrp="1"/>
           </p:cNvSpPr>
@@ -1039,15 +1252,20 @@
           <a:p>
             <a:r>
               <a:rPr lang="en-US" dirty="0"/>
-              <a:t>Moving from the system overview, let's dive into the technical backbone. Our algorithmic foundation ensures both fluency and factual accuracy by penalizing inconsistencies. We're not just generating text; we're generating truthful text. Our retrieval logic is powered by cosine similarity, efficiently matching dialogue context with external knowledge. This quarter, we fully provisioned our infrastructure with NVIDIA A100 GPUs and a robust software stack including PyTorch, HuggingFace, LangChain, and Pinecone. This setup provides the computational power and tools needed to drive our advanced RAG pipeline. Next, we'll discuss the data and evaluation methods that validate our approach.</a:t>
-            </a:r>
-            <a:endParaRPr lang="en-US" dirty="0"/>
-          </a:p>
-        </p:txBody>
-      </p:sp>
-      <p:sp>
-        <p:nvSpPr>
-          <p:cNvPr id="4" name="Slide Number Placeholder 3"/>
+              <a:t>Let's briefly revisit why this project is so critical. Dialogues are inherently messy, full of slang, interruptions, and multiple speakers. Traditional large language models often suffer from semantic drift in long conversations and can generate 'plausible lies.' Our core goal is to ensure every dialogue summary is concise and 100% factually grounded. To achieve this, we're developing a RAG-based pipeline for real-time semantic searches, implementing a filtering layer for noise reduction, and enabling adaptive retrieval to know precisely when to fetch external data. This directly addresses the challenges we just discussed.</a:t>
+            </a:r>
+          </a:p>
+        </p:txBody>
+      </p:sp>
+      <p:sp>
+        <p:nvSpPr>
+          <p:cNvPr id="4" name="Slide Number Placeholder 3">
+            <a:extLst>
+              <a:ext uri="{FF2B5EF4-FFF2-40B4-BE49-F238E27FC236}">
+                <a16:creationId xmlns:a16="http://schemas.microsoft.com/office/drawing/2014/main" id="{28096BD8-EFA7-4FE3-7254-098B35A93222}"/>
+              </a:ext>
+            </a:extLst>
+          </p:cNvPr>
           <p:cNvSpPr>
             <a:spLocks noGrp="1"/>
           </p:cNvSpPr>
@@ -1060,18 +1278,78 @@
           <a:bodyPr/>
           <a:lstStyle/>
           <a:p>
+            <a:pPr marL="0" marR="0" lvl="0" indent="0" algn="l" defTabSz="914400" rtl="0" eaLnBrk="1" fontAlgn="auto" latinLnBrk="0" hangingPunct="1">
+              <a:lnSpc>
+                <a:spcPct val="100000"/>
+              </a:lnSpc>
+              <a:spcBef>
+                <a:spcPts val="0"/>
+              </a:spcBef>
+              <a:spcAft>
+                <a:spcPts val="0"/>
+              </a:spcAft>
+              <a:buClrTx/>
+              <a:buSzTx/>
+              <a:buFontTx/>
+              <a:buNone/>
+              <a:tabLst/>
+              <a:defRPr/>
+            </a:pPr>
             <a:fld id="{F7021451-1387-4CA6-816F-3879F97B5CBC}" type="slidenum">
-              <a:rPr lang="en-US"/>
+              <a:rPr kumimoji="0" lang="en-US" sz="1800" b="0" i="0" u="none" strike="noStrike" kern="1200" cap="none" spc="0" normalizeH="0" baseline="0" noProof="0">
+                <a:ln>
+                  <a:noFill/>
+                </a:ln>
+                <a:solidFill>
+                  <a:prstClr val="black"/>
+                </a:solidFill>
+                <a:effectLst/>
+                <a:uLnTx/>
+                <a:uFillTx/>
+                <a:latin typeface="Aptos" panose="02110004020202020204"/>
+                <a:ea typeface="+mn-ea"/>
+                <a:cs typeface="+mn-cs"/>
+              </a:rPr>
+              <a:pPr marL="0" marR="0" lvl="0" indent="0" algn="l" defTabSz="914400" rtl="0" eaLnBrk="1" fontAlgn="auto" latinLnBrk="0" hangingPunct="1">
+                <a:lnSpc>
+                  <a:spcPct val="100000"/>
+                </a:lnSpc>
+                <a:spcBef>
+                  <a:spcPts val="0"/>
+                </a:spcBef>
+                <a:spcAft>
+                  <a:spcPts val="0"/>
+                </a:spcAft>
+                <a:buClrTx/>
+                <a:buSzTx/>
+                <a:buFontTx/>
+                <a:buNone/>
+                <a:tabLst/>
+                <a:defRPr/>
+              </a:pPr>
               <a:t>6</a:t>
             </a:fld>
-            <a:endParaRPr lang="en-US"/>
+            <a:endParaRPr kumimoji="0" lang="en-US" sz="1800" b="0" i="0" u="none" strike="noStrike" kern="1200" cap="none" spc="0" normalizeH="0" baseline="0" noProof="0">
+              <a:ln>
+                <a:noFill/>
+              </a:ln>
+              <a:solidFill>
+                <a:prstClr val="black"/>
+              </a:solidFill>
+              <a:effectLst/>
+              <a:uLnTx/>
+              <a:uFillTx/>
+              <a:latin typeface="Aptos" panose="02110004020202020204"/>
+              <a:ea typeface="+mn-ea"/>
+              <a:cs typeface="+mn-cs"/>
+            </a:endParaRPr>
           </a:p>
         </p:txBody>
       </p:sp>
     </p:spTree>
     <p:extLst>
       <p:ext uri="{BB962C8B-B14F-4D97-AF65-F5344CB8AC3E}">
-        <p14:creationId xmlns:p14="http://schemas.microsoft.com/office/powerpoint/2010/main" val="1024086991"/>
+        <p14:creationId xmlns:p14="http://schemas.microsoft.com/office/powerpoint/2010/main" val="2555055262"/>
       </p:ext>
     </p:extLst>
   </p:cSld>
@@ -1127,9 +1405,8 @@
           <a:p>
             <a:r>
               <a:rPr lang="en-US" dirty="0"/>
-              <a:t>Data preparation was a critical focus this quarter, and we've made significant progress. We've successfully integrated DialogSum for general conversations and MediaSum for fact-dense dialogues, alongside our custom knowledge base built from Wikipedia and specialized documents. Our evaluation framework goes beyond standard metrics. We're using ROUGE for fluency, but more importantly, Entity Precision and FactCC to rigorously measure factual consistency. This will be further validated by expert human evaluation. This comprehensive approach ensures our summaries are not only well-written but also factually sound. Now, let's look at how this fits into our overall project timeline.</a:t>
-            </a:r>
-            <a:endParaRPr lang="en-US" dirty="0"/>
+              <a:t>In Q2, we made significant technical strides in implementing our methodology. We established robust input processing pipelines, handling tokenization for multi-turn dialogues and automating speaker identification. Our retrieval engine is now fully functional; we can formulate queries from dialogue snippets and efficiently search our ChromaDB and FAISS vector databases using Dense Passage Retrieval, achieving sub-second latency. We also successfully developed the augmentation strategy to inject retrieved 'Knowledge Triples' directly into our LLM prompts, optimizing them for factual grounding. This progress directly supports our core objectives.</a:t>
+            </a:r>
           </a:p>
         </p:txBody>
       </p:sp>
@@ -1215,9 +1492,8 @@
           <a:p>
             <a:r>
               <a:rPr lang="en-US" dirty="0"/>
-              <a:t>Our project timeline shows we're right on schedule, having completed the foundational phases in Q1 and Q2. This includes all environment setup, data indexing, and vector store creation. As we enter Q3, our primary focus shifts to model training. We'll be fine-tuning our LLMs using Low-Rank Adaptation, or LoRA, integrated directly with our RAG pipeline. This phase is crucial for optimizing performance and ensuring adaptive retrieval. Q4 will then be dedicated to rigorous evaluation and testing. This structured approach keeps us on track for successful delivery. Let's summarize our progress and outline the immediate next steps.</a:t>
-            </a:r>
-            <a:endParaRPr lang="en-US" dirty="0"/>
+              <a:t>This slide outlines our system architecture, which is now fully mapped out and partially implemented. The process begins with multi-turn user dialogue, which passes through a Transformer-based Bi-Encoder. This is then checked against our integrated external Knowledge Base. The critical component we focused on this quarter is the Fusion Layer, which intelligently combines the dialogue context with the retrieved context. This combined information then goes to the Decoder to generate the final grounded summary, and finally, a Verifier performs a secondary check for factual consistency. This architecture ensures factual accuracy at every step.</a:t>
+            </a:r>
           </a:p>
         </p:txBody>
       </p:sp>
@@ -1303,9 +1579,8 @@
           <a:p>
             <a:r>
               <a:rPr lang="en-US" dirty="0"/>
-              <a:t>In conclusion, our framework is on track to deliver a scalable solution for accurate, real-time dialogue intelligence. We're significantly mitigating the risk of AI hallucinations in multi-turn conversations. Our immediate next steps involve initiating domain-specific fine-tuning using LoRA and beginning preliminary performance testing on the DialogSum dataset. We'll also refine our filtering layer for even better noise reduction. Looking ahead, we're already exploring exciting future scopes like multimodal retrieval for video calls and optimizing for edge devices. This ensures our solution remains cutting-edge and adaptable. Now, I'd like to open the floor for your questions.</a:t>
-            </a:r>
-            <a:endParaRPr lang="en-US" dirty="0"/>
+              <a:t>Data preparation was a critical focus this quarter, and we've made significant progress. We've successfully integrated DialogSum for general conversations and MediaSum for fact-dense dialogues, alongside our custom knowledge base built from Wikipedia and specialized documents. Our evaluation framework goes beyond standard metrics. We're using ROUGE for fluency, but more importantly, Entity Precision and FactCC to rigorously measure factual consistency. This will be further validated by expert human evaluation. This comprehensive approach ensures our summaries are not only well-written but also factually sound. Now, let's look at how this fits into our overall project timeline.</a:t>
+            </a:r>
           </a:p>
         </p:txBody>
       </p:sp>
@@ -1378,6 +1653,11 @@
 <file path=ppt/slideMasters/slideMaster1.xml><?xml version="1.0" encoding="utf-8"?>
 <p:sldMaster xmlns:a="http://schemas.openxmlformats.org/drawingml/2006/main" xmlns:r="http://schemas.openxmlformats.org/officeDocument/2006/relationships" xmlns:p="http://schemas.openxmlformats.org/presentationml/2006/main">
   <p:cSld>
+    <p:bg>
+      <p:bgRef idx="1001">
+        <a:schemeClr val="bg1"/>
+      </p:bgRef>
+    </p:bg>
     <p:spTree>
       <p:nvGrpSpPr>
         <p:cNvPr id="1" name=""/>
@@ -1671,14 +1951,14 @@
       </p:grpSpPr>
       <p:pic>
         <p:nvPicPr>
-          <p:cNvPr id="3" name="Image 0" descr="preencoded.png">    </p:cNvPr>
+          <p:cNvPr id="3" name="Image 0" descr="preencoded.png"/>
           <p:cNvPicPr>
             <a:picLocks noChangeAspect="1"/>
           </p:cNvPicPr>
           <p:nvPr/>
         </p:nvPicPr>
         <p:blipFill>
-          <a:blip r:embed="rId1"/>
+          <a:blip r:embed="rId3"/>
           <a:stretch>
             <a:fillRect/>
           </a:stretch>
@@ -1702,7 +1982,7 @@
         <p:spPr>
           <a:xfrm>
             <a:off x="642938" y="1383767"/>
-            <a:ext cx="7858125" cy="1097235"/>
+            <a:ext cx="7858125" cy="1063753"/>
           </a:xfrm>
           <a:prstGeom prst="rect">
             <a:avLst/>
@@ -1716,14 +1996,14 @@
           </a:bodyPr>
           <a:lstStyle/>
           <a:p>
-            <a:pPr algn="l" indent="0" marL="0">
+            <a:pPr marL="0" indent="0" algn="l">
               <a:lnSpc>
                 <a:spcPct val="96000"/>
               </a:lnSpc>
               <a:buNone/>
             </a:pPr>
             <a:r>
-              <a:rPr lang="en-US" sz="3300" b="1" dirty="0">
+              <a:rPr lang="en-US" sz="2400" b="1" dirty="0">
                 <a:solidFill>
                   <a:srgbClr val="0F2537"/>
                 </a:solidFill>
@@ -1731,9 +2011,9 @@
                 <a:ea typeface="Playfair Display Bold" pitchFamily="34" charset="-122"/>
                 <a:cs typeface="Playfair Display Bold" pitchFamily="34" charset="-120"/>
               </a:rPr>
-              <a:t>Q2 Project Status Update: Advanced AI Dialogue Summarization Framework</a:t>
-            </a:r>
-            <a:endParaRPr lang="en-US" sz="3300" dirty="0"/>
+              <a:t>A Unified Knowledge-Grounded Generative AI Framework for Adaptive Dialogue Summarization and Intelligent Information Retrieval</a:t>
+            </a:r>
+            <a:endParaRPr lang="en-US" sz="2400" dirty="0"/>
           </a:p>
         </p:txBody>
       </p:sp>
@@ -1746,7 +2026,7 @@
         <p:spPr>
           <a:xfrm>
             <a:off x="642938" y="2623877"/>
-            <a:ext cx="7858125" cy="342900"/>
+            <a:ext cx="5495094" cy="292259"/>
           </a:xfrm>
           <a:prstGeom prst="rect">
             <a:avLst/>
@@ -1760,7 +2040,7 @@
           </a:bodyPr>
           <a:lstStyle/>
           <a:p>
-            <a:pPr algn="l" indent="0" marL="0">
+            <a:pPr marL="0" indent="0" algn="l">
               <a:lnSpc>
                 <a:spcPct val="120000"/>
               </a:lnSpc>
@@ -1775,7 +2055,7 @@
                 <a:ea typeface="Work Sans" pitchFamily="34" charset="-122"/>
                 <a:cs typeface="Work Sans" pitchFamily="34" charset="-120"/>
               </a:rPr>
-              <a:t>A Unified Knowledge-Grounded Generative AI Framework</a:t>
+              <a:t>Natural Language Processing (NLP) / Deep Learning</a:t>
             </a:r>
             <a:endParaRPr lang="en-US" sz="1700" dirty="0"/>
           </a:p>
@@ -1790,7 +2070,7 @@
         <p:spPr>
           <a:xfrm>
             <a:off x="642938" y="3331108"/>
-            <a:ext cx="7858125" cy="214313"/>
+            <a:ext cx="6184385" cy="566694"/>
           </a:xfrm>
           <a:prstGeom prst="rect">
             <a:avLst/>
@@ -1804,7 +2084,7 @@
           </a:bodyPr>
           <a:lstStyle/>
           <a:p>
-            <a:pPr algn="l" indent="0" marL="0">
+            <a:pPr marL="0" indent="0" algn="l">
               <a:lnSpc>
                 <a:spcPct val="120000"/>
               </a:lnSpc>
@@ -1819,36 +2099,11 @@
                 <a:ea typeface="Work Sans" pitchFamily="34" charset="-122"/>
                 <a:cs typeface="Work Sans" pitchFamily="34" charset="-120"/>
               </a:rPr>
-              <a:t>Presenter: Souparna Paul</a:t>
-            </a:r>
-            <a:endParaRPr lang="en-US" sz="1050" dirty="0"/>
-          </a:p>
-        </p:txBody>
-      </p:sp>
-      <p:sp>
-        <p:nvSpPr>
-          <p:cNvPr id="7" name="Text 3"/>
-          <p:cNvSpPr/>
-          <p:nvPr/>
-        </p:nvSpPr>
-        <p:spPr>
-          <a:xfrm>
-            <a:off x="642938" y="3545421"/>
-            <a:ext cx="7858125" cy="214313"/>
-          </a:xfrm>
-          <a:prstGeom prst="rect">
-            <a:avLst/>
-          </a:prstGeom>
-          <a:noFill/>
-          <a:ln/>
-        </p:spPr>
-        <p:txBody>
-          <a:bodyPr wrap="none" lIns="0" tIns="0" rIns="0" bIns="0" rtlCol="0" anchor="t">
-            <a:spAutoFit/>
-          </a:bodyPr>
-          <a:lstStyle/>
-          <a:p>
-            <a:pPr algn="l" indent="0" marL="0">
+              <a:t>Presenter: Souparna Paul (Roll No: 127256200014)</a:t>
+            </a:r>
+          </a:p>
+          <a:p>
+            <a:pPr marL="0" indent="0" algn="l">
               <a:lnSpc>
                 <a:spcPct val="120000"/>
               </a:lnSpc>
@@ -1863,9 +2118,27 @@
                 <a:ea typeface="Work Sans" pitchFamily="34" charset="-122"/>
                 <a:cs typeface="Work Sans" pitchFamily="34" charset="-120"/>
               </a:rPr>
-              <a:t>Date: Q2 2026</a:t>
-            </a:r>
-            <a:endParaRPr lang="en-US" sz="1050" dirty="0"/>
+              <a:t>Supervisor: Dr. Soma Chatterjee</a:t>
+            </a:r>
+          </a:p>
+          <a:p>
+            <a:pPr marL="0" indent="0" algn="l">
+              <a:lnSpc>
+                <a:spcPct val="120000"/>
+              </a:lnSpc>
+              <a:buNone/>
+            </a:pPr>
+            <a:r>
+              <a:rPr lang="en-US" sz="1050" dirty="0">
+                <a:solidFill>
+                  <a:srgbClr val="2C3E50"/>
+                </a:solidFill>
+                <a:latin typeface="Work Sans" pitchFamily="34" charset="0"/>
+                <a:ea typeface="Work Sans" pitchFamily="34" charset="-122"/>
+                <a:cs typeface="Work Sans" pitchFamily="34" charset="-120"/>
+              </a:rPr>
+              <a:t>Institution: Department of Computer Science and Engineering, Narula Institute of Technology</a:t>
+            </a:r>
           </a:p>
         </p:txBody>
       </p:sp>
@@ -1878,6 +2151,1116 @@
 </file>
 
 <file path=ppt/slides/slide10.xml><?xml version="1.0" encoding="utf-8"?>
+<p:sld xmlns:a="http://schemas.openxmlformats.org/drawingml/2006/main" xmlns:r="http://schemas.openxmlformats.org/officeDocument/2006/relationships" xmlns:p="http://schemas.openxmlformats.org/presentationml/2006/main">
+  <p:cSld>
+    <p:spTree>
+      <p:nvGrpSpPr>
+        <p:cNvPr id="1" name="">
+          <a:extLst>
+            <a:ext uri="{FF2B5EF4-FFF2-40B4-BE49-F238E27FC236}">
+              <a16:creationId xmlns:a16="http://schemas.microsoft.com/office/drawing/2014/main" id="{8AD8AD18-5D0F-982A-6123-A73884F36B85}"/>
+            </a:ext>
+          </a:extLst>
+        </p:cNvPr>
+        <p:cNvGrpSpPr/>
+        <p:nvPr/>
+      </p:nvGrpSpPr>
+      <p:grpSpPr>
+        <a:xfrm>
+          <a:off x="0" y="0"/>
+          <a:ext cx="0" cy="0"/>
+          <a:chOff x="0" y="0"/>
+          <a:chExt cx="0" cy="0"/>
+        </a:xfrm>
+      </p:grpSpPr>
+      <p:sp>
+        <p:nvSpPr>
+          <p:cNvPr id="4" name="Text 0">
+            <a:extLst>
+              <a:ext uri="{FF2B5EF4-FFF2-40B4-BE49-F238E27FC236}">
+                <a16:creationId xmlns:a16="http://schemas.microsoft.com/office/drawing/2014/main" id="{3B23616B-8688-7213-AD7A-313F5FDBE0DE}"/>
+              </a:ext>
+            </a:extLst>
+          </p:cNvPr>
+          <p:cNvSpPr/>
+          <p:nvPr/>
+        </p:nvSpPr>
+        <p:spPr>
+          <a:xfrm>
+            <a:off x="642938" y="895648"/>
+            <a:ext cx="7858125" cy="246221"/>
+          </a:xfrm>
+          <a:prstGeom prst="rect">
+            <a:avLst/>
+          </a:prstGeom>
+          <a:noFill/>
+          <a:ln/>
+        </p:spPr>
+        <p:txBody>
+          <a:bodyPr wrap="square" lIns="0" tIns="0" rIns="0" bIns="0" rtlCol="0" anchor="t">
+            <a:spAutoFit/>
+          </a:bodyPr>
+          <a:lstStyle/>
+          <a:p>
+            <a:pPr marL="0" marR="0" lvl="0" indent="0" algn="l" defTabSz="914400" rtl="0" eaLnBrk="1" fontAlgn="auto" latinLnBrk="0" hangingPunct="1">
+              <a:lnSpc>
+                <a:spcPct val="100000"/>
+              </a:lnSpc>
+              <a:spcBef>
+                <a:spcPts val="0"/>
+              </a:spcBef>
+              <a:spcAft>
+                <a:spcPts val="0"/>
+              </a:spcAft>
+              <a:buClrTx/>
+              <a:buSzTx/>
+              <a:buFontTx/>
+              <a:buNone/>
+              <a:tabLst/>
+              <a:defRPr/>
+            </a:pPr>
+            <a:r>
+              <a:rPr kumimoji="0" lang="en-US" sz="1600" b="1" i="0" u="none" strike="noStrike" kern="1200" cap="none" spc="0" normalizeH="0" baseline="0" noProof="0" dirty="0">
+                <a:ln>
+                  <a:noFill/>
+                </a:ln>
+                <a:solidFill>
+                  <a:srgbClr val="0F2537"/>
+                </a:solidFill>
+                <a:effectLst/>
+                <a:uLnTx/>
+                <a:uFillTx/>
+                <a:latin typeface="Playfair Display Bold" pitchFamily="34" charset="0"/>
+                <a:ea typeface="Playfair Display Bold" pitchFamily="34" charset="-122"/>
+                <a:cs typeface="Playfair Display Bold" pitchFamily="34" charset="-120"/>
+              </a:rPr>
+              <a:t>Anticipated Novelty &amp; Contribution</a:t>
+            </a:r>
+            <a:endParaRPr kumimoji="0" lang="en-US" sz="1600" b="0" i="0" u="none" strike="noStrike" kern="1200" cap="none" spc="0" normalizeH="0" baseline="0" noProof="0" dirty="0">
+              <a:ln>
+                <a:noFill/>
+              </a:ln>
+              <a:solidFill>
+                <a:prstClr val="black"/>
+              </a:solidFill>
+              <a:effectLst/>
+              <a:uLnTx/>
+              <a:uFillTx/>
+              <a:latin typeface="Calibri" panose="020F0502020204030204"/>
+              <a:ea typeface="+mn-ea"/>
+              <a:cs typeface="+mn-cs"/>
+            </a:endParaRPr>
+          </a:p>
+        </p:txBody>
+      </p:sp>
+      <p:sp>
+        <p:nvSpPr>
+          <p:cNvPr id="5" name="Text 1">
+            <a:extLst>
+              <a:ext uri="{FF2B5EF4-FFF2-40B4-BE49-F238E27FC236}">
+                <a16:creationId xmlns:a16="http://schemas.microsoft.com/office/drawing/2014/main" id="{56274760-1ADE-D89F-D16E-0A1332C59442}"/>
+              </a:ext>
+            </a:extLst>
+          </p:cNvPr>
+          <p:cNvSpPr/>
+          <p:nvPr/>
+        </p:nvSpPr>
+        <p:spPr>
+          <a:xfrm>
+            <a:off x="642938" y="1515368"/>
+            <a:ext cx="7858125" cy="184666"/>
+          </a:xfrm>
+          <a:prstGeom prst="rect">
+            <a:avLst/>
+          </a:prstGeom>
+          <a:noFill/>
+          <a:ln/>
+        </p:spPr>
+        <p:txBody>
+          <a:bodyPr wrap="square" lIns="0" tIns="0" rIns="0" bIns="0" rtlCol="0" anchor="t">
+            <a:spAutoFit/>
+          </a:bodyPr>
+          <a:lstStyle/>
+          <a:p>
+            <a:pPr marL="0" marR="0" lvl="0" indent="0" algn="l" defTabSz="914400" rtl="0" eaLnBrk="1" fontAlgn="auto" latinLnBrk="0" hangingPunct="1">
+              <a:lnSpc>
+                <a:spcPct val="100000"/>
+              </a:lnSpc>
+              <a:spcBef>
+                <a:spcPts val="0"/>
+              </a:spcBef>
+              <a:spcAft>
+                <a:spcPts val="0"/>
+              </a:spcAft>
+              <a:buClrTx/>
+              <a:buSzTx/>
+              <a:buFontTx/>
+              <a:buNone/>
+              <a:tabLst/>
+              <a:defRPr/>
+            </a:pPr>
+            <a:r>
+              <a:rPr kumimoji="0" lang="en-US" sz="1200" b="0" i="0" u="none" strike="noStrike" kern="1200" cap="none" spc="0" normalizeH="0" baseline="0" noProof="0" dirty="0">
+                <a:ln>
+                  <a:noFill/>
+                </a:ln>
+                <a:solidFill>
+                  <a:srgbClr val="0F2537"/>
+                </a:solidFill>
+                <a:effectLst/>
+                <a:uLnTx/>
+                <a:uFillTx/>
+                <a:latin typeface="Work Sans SemiBold" pitchFamily="34" charset="0"/>
+                <a:ea typeface="Work Sans SemiBold" pitchFamily="34" charset="-122"/>
+                <a:cs typeface="Work Sans SemiBold" pitchFamily="34" charset="-120"/>
+              </a:rPr>
+              <a:t>Dynamic Contextualization:</a:t>
+            </a:r>
+            <a:endParaRPr kumimoji="0" lang="en-US" sz="1200" b="0" i="0" u="none" strike="noStrike" kern="1200" cap="none" spc="0" normalizeH="0" baseline="0" noProof="0" dirty="0">
+              <a:ln>
+                <a:noFill/>
+              </a:ln>
+              <a:solidFill>
+                <a:prstClr val="black"/>
+              </a:solidFill>
+              <a:effectLst/>
+              <a:uLnTx/>
+              <a:uFillTx/>
+              <a:latin typeface="Calibri" panose="020F0502020204030204"/>
+              <a:ea typeface="+mn-ea"/>
+              <a:cs typeface="+mn-cs"/>
+            </a:endParaRPr>
+          </a:p>
+        </p:txBody>
+      </p:sp>
+      <p:sp>
+        <p:nvSpPr>
+          <p:cNvPr id="6" name="Text 2">
+            <a:extLst>
+              <a:ext uri="{FF2B5EF4-FFF2-40B4-BE49-F238E27FC236}">
+                <a16:creationId xmlns:a16="http://schemas.microsoft.com/office/drawing/2014/main" id="{A066C446-78A3-18B8-F637-4E91A4E879DC}"/>
+              </a:ext>
+            </a:extLst>
+          </p:cNvPr>
+          <p:cNvSpPr/>
+          <p:nvPr/>
+        </p:nvSpPr>
+        <p:spPr>
+          <a:xfrm>
+            <a:off x="857250" y="1783259"/>
+            <a:ext cx="7643813" cy="180499"/>
+          </a:xfrm>
+          <a:prstGeom prst="rect">
+            <a:avLst/>
+          </a:prstGeom>
+          <a:noFill/>
+          <a:ln/>
+        </p:spPr>
+        <p:txBody>
+          <a:bodyPr wrap="square" lIns="0" tIns="0" rIns="0" bIns="0" rtlCol="0" anchor="t">
+            <a:spAutoFit/>
+          </a:bodyPr>
+          <a:lstStyle/>
+          <a:p>
+            <a:pPr marL="0" marR="0" lvl="0" indent="0" algn="l" defTabSz="914400" rtl="0" eaLnBrk="1" fontAlgn="auto" latinLnBrk="0" hangingPunct="1">
+              <a:lnSpc>
+                <a:spcPct val="120000"/>
+              </a:lnSpc>
+              <a:spcBef>
+                <a:spcPts val="0"/>
+              </a:spcBef>
+              <a:spcAft>
+                <a:spcPts val="0"/>
+              </a:spcAft>
+              <a:buClrTx/>
+              <a:buSzTx/>
+              <a:buFontTx/>
+              <a:buNone/>
+              <a:tabLst/>
+              <a:defRPr/>
+            </a:pPr>
+            <a:r>
+              <a:rPr kumimoji="0" lang="en-US" sz="1050" b="0" i="0" u="none" strike="noStrike" kern="1200" cap="none" spc="0" normalizeH="0" baseline="0" noProof="0" dirty="0">
+                <a:ln>
+                  <a:noFill/>
+                </a:ln>
+                <a:solidFill>
+                  <a:srgbClr val="2C3E50"/>
+                </a:solidFill>
+                <a:effectLst/>
+                <a:uLnTx/>
+                <a:uFillTx/>
+                <a:latin typeface="Work Sans" pitchFamily="34" charset="0"/>
+                <a:ea typeface="Work Sans" pitchFamily="34" charset="-122"/>
+                <a:cs typeface="Work Sans" pitchFamily="34" charset="-120"/>
+              </a:rPr>
+              <a:t>Unlike static summarizers, this framework adapts to the "outside world."</a:t>
+            </a:r>
+            <a:endParaRPr kumimoji="0" lang="en-US" sz="1050" b="0" i="0" u="none" strike="noStrike" kern="1200" cap="none" spc="0" normalizeH="0" baseline="0" noProof="0" dirty="0">
+              <a:ln>
+                <a:noFill/>
+              </a:ln>
+              <a:solidFill>
+                <a:prstClr val="black"/>
+              </a:solidFill>
+              <a:effectLst/>
+              <a:uLnTx/>
+              <a:uFillTx/>
+              <a:latin typeface="Calibri" panose="020F0502020204030204"/>
+              <a:ea typeface="+mn-ea"/>
+              <a:cs typeface="+mn-cs"/>
+            </a:endParaRPr>
+          </a:p>
+        </p:txBody>
+      </p:sp>
+      <p:sp>
+        <p:nvSpPr>
+          <p:cNvPr id="7" name="Text 3">
+            <a:extLst>
+              <a:ext uri="{FF2B5EF4-FFF2-40B4-BE49-F238E27FC236}">
+                <a16:creationId xmlns:a16="http://schemas.microsoft.com/office/drawing/2014/main" id="{20DEFBDB-6764-1E4E-4621-67B18EC166FC}"/>
+              </a:ext>
+            </a:extLst>
+          </p:cNvPr>
+          <p:cNvSpPr/>
+          <p:nvPr/>
+        </p:nvSpPr>
+        <p:spPr>
+          <a:xfrm>
+            <a:off x="642937" y="2226707"/>
+            <a:ext cx="7858125" cy="184666"/>
+          </a:xfrm>
+          <a:prstGeom prst="rect">
+            <a:avLst/>
+          </a:prstGeom>
+          <a:noFill/>
+          <a:ln/>
+        </p:spPr>
+        <p:txBody>
+          <a:bodyPr wrap="square" lIns="0" tIns="0" rIns="0" bIns="0" rtlCol="0" anchor="t">
+            <a:spAutoFit/>
+          </a:bodyPr>
+          <a:lstStyle/>
+          <a:p>
+            <a:pPr marL="0" marR="0" lvl="0" indent="0" algn="l" defTabSz="914400" rtl="0" eaLnBrk="1" fontAlgn="auto" latinLnBrk="0" hangingPunct="1">
+              <a:lnSpc>
+                <a:spcPct val="100000"/>
+              </a:lnSpc>
+              <a:spcBef>
+                <a:spcPts val="0"/>
+              </a:spcBef>
+              <a:spcAft>
+                <a:spcPts val="0"/>
+              </a:spcAft>
+              <a:buClrTx/>
+              <a:buSzTx/>
+              <a:buFontTx/>
+              <a:buNone/>
+              <a:tabLst/>
+              <a:defRPr/>
+            </a:pPr>
+            <a:r>
+              <a:rPr kumimoji="0" lang="en-US" sz="1200" b="0" i="0" u="none" strike="noStrike" kern="1200" cap="none" spc="0" normalizeH="0" baseline="0" noProof="0" dirty="0">
+                <a:ln>
+                  <a:noFill/>
+                </a:ln>
+                <a:solidFill>
+                  <a:srgbClr val="0F2537"/>
+                </a:solidFill>
+                <a:effectLst/>
+                <a:uLnTx/>
+                <a:uFillTx/>
+                <a:latin typeface="Work Sans SemiBold" pitchFamily="34" charset="0"/>
+                <a:ea typeface="Work Sans SemiBold" pitchFamily="34" charset="-122"/>
+                <a:cs typeface="Work Sans SemiBold" pitchFamily="34" charset="-120"/>
+              </a:rPr>
+              <a:t>Unified Pipeline:</a:t>
+            </a:r>
+            <a:endParaRPr kumimoji="0" lang="en-US" sz="1200" b="0" i="0" u="none" strike="noStrike" kern="1200" cap="none" spc="0" normalizeH="0" baseline="0" noProof="0" dirty="0">
+              <a:ln>
+                <a:noFill/>
+              </a:ln>
+              <a:solidFill>
+                <a:prstClr val="black"/>
+              </a:solidFill>
+              <a:effectLst/>
+              <a:uLnTx/>
+              <a:uFillTx/>
+              <a:latin typeface="Calibri" panose="020F0502020204030204"/>
+              <a:ea typeface="+mn-ea"/>
+              <a:cs typeface="+mn-cs"/>
+            </a:endParaRPr>
+          </a:p>
+        </p:txBody>
+      </p:sp>
+      <p:sp>
+        <p:nvSpPr>
+          <p:cNvPr id="8" name="Text 4">
+            <a:extLst>
+              <a:ext uri="{FF2B5EF4-FFF2-40B4-BE49-F238E27FC236}">
+                <a16:creationId xmlns:a16="http://schemas.microsoft.com/office/drawing/2014/main" id="{E311DC2F-2254-949F-77E4-D7708AADDB7E}"/>
+              </a:ext>
+            </a:extLst>
+          </p:cNvPr>
+          <p:cNvSpPr/>
+          <p:nvPr/>
+        </p:nvSpPr>
+        <p:spPr>
+          <a:xfrm>
+            <a:off x="857250" y="2587687"/>
+            <a:ext cx="7484421" cy="180499"/>
+          </a:xfrm>
+          <a:prstGeom prst="rect">
+            <a:avLst/>
+          </a:prstGeom>
+          <a:noFill/>
+          <a:ln/>
+        </p:spPr>
+        <p:txBody>
+          <a:bodyPr wrap="none" lIns="0" tIns="0" rIns="0" bIns="0" rtlCol="0" anchor="t">
+            <a:spAutoFit/>
+          </a:bodyPr>
+          <a:lstStyle/>
+          <a:p>
+            <a:pPr marL="0" marR="0" lvl="0" indent="0" algn="l" defTabSz="914400" rtl="0" eaLnBrk="1" fontAlgn="auto" latinLnBrk="0" hangingPunct="1">
+              <a:lnSpc>
+                <a:spcPct val="120000"/>
+              </a:lnSpc>
+              <a:spcBef>
+                <a:spcPts val="0"/>
+              </a:spcBef>
+              <a:spcAft>
+                <a:spcPts val="0"/>
+              </a:spcAft>
+              <a:buClrTx/>
+              <a:buSzTx/>
+              <a:buFontTx/>
+              <a:buNone/>
+              <a:tabLst/>
+              <a:defRPr/>
+            </a:pPr>
+            <a:r>
+              <a:rPr kumimoji="0" lang="en-US" sz="1050" b="0" i="0" u="none" strike="noStrike" kern="1200" cap="none" spc="0" normalizeH="0" baseline="0" noProof="0" dirty="0">
+                <a:ln>
+                  <a:noFill/>
+                </a:ln>
+                <a:solidFill>
+                  <a:srgbClr val="2C3E50"/>
+                </a:solidFill>
+                <a:effectLst/>
+                <a:uLnTx/>
+                <a:uFillTx/>
+                <a:latin typeface="Work Sans" pitchFamily="34" charset="0"/>
+                <a:ea typeface="Work Sans" pitchFamily="34" charset="-122"/>
+                <a:cs typeface="Work Sans" pitchFamily="34" charset="-120"/>
+              </a:rPr>
+              <a:t>Merging Information Retrieval (IR) and Generative AI (GenAI) into a single, cohesive </a:t>
+            </a:r>
+            <a:r>
+              <a:rPr kumimoji="0" lang="en-US" sz="1050" b="0" i="0" u="none" strike="noStrike" kern="1200" cap="none" spc="0" normalizeH="0" baseline="0" noProof="0" dirty="0" err="1">
+                <a:ln>
+                  <a:noFill/>
+                </a:ln>
+                <a:solidFill>
+                  <a:srgbClr val="2C3E50"/>
+                </a:solidFill>
+                <a:effectLst/>
+                <a:uLnTx/>
+                <a:uFillTx/>
+                <a:latin typeface="Work Sans" pitchFamily="34" charset="0"/>
+                <a:ea typeface="Work Sans" pitchFamily="34" charset="-122"/>
+                <a:cs typeface="Work Sans" pitchFamily="34" charset="-120"/>
+              </a:rPr>
+              <a:t>M.Tech</a:t>
+            </a:r>
+            <a:r>
+              <a:rPr kumimoji="0" lang="en-US" sz="1050" b="0" i="0" u="none" strike="noStrike" kern="1200" cap="none" spc="0" normalizeH="0" baseline="0" noProof="0" dirty="0">
+                <a:ln>
+                  <a:noFill/>
+                </a:ln>
+                <a:solidFill>
+                  <a:srgbClr val="2C3E50"/>
+                </a:solidFill>
+                <a:effectLst/>
+                <a:uLnTx/>
+                <a:uFillTx/>
+                <a:latin typeface="Work Sans" pitchFamily="34" charset="0"/>
+                <a:ea typeface="Work Sans" pitchFamily="34" charset="-122"/>
+                <a:cs typeface="Work Sans" pitchFamily="34" charset="-120"/>
+              </a:rPr>
+              <a:t>-level implementation.</a:t>
+            </a:r>
+            <a:endParaRPr kumimoji="0" lang="en-US" sz="1050" b="0" i="0" u="none" strike="noStrike" kern="1200" cap="none" spc="0" normalizeH="0" baseline="0" noProof="0" dirty="0">
+              <a:ln>
+                <a:noFill/>
+              </a:ln>
+              <a:solidFill>
+                <a:prstClr val="black"/>
+              </a:solidFill>
+              <a:effectLst/>
+              <a:uLnTx/>
+              <a:uFillTx/>
+              <a:latin typeface="Calibri" panose="020F0502020204030204"/>
+              <a:ea typeface="+mn-ea"/>
+              <a:cs typeface="+mn-cs"/>
+            </a:endParaRPr>
+          </a:p>
+        </p:txBody>
+      </p:sp>
+      <p:sp>
+        <p:nvSpPr>
+          <p:cNvPr id="9" name="Text 5">
+            <a:extLst>
+              <a:ext uri="{FF2B5EF4-FFF2-40B4-BE49-F238E27FC236}">
+                <a16:creationId xmlns:a16="http://schemas.microsoft.com/office/drawing/2014/main" id="{5873D2FF-8CCB-C0F5-8165-C48C01BEDEF3}"/>
+              </a:ext>
+            </a:extLst>
+          </p:cNvPr>
+          <p:cNvSpPr/>
+          <p:nvPr/>
+        </p:nvSpPr>
+        <p:spPr>
+          <a:xfrm>
+            <a:off x="642936" y="3007537"/>
+            <a:ext cx="7858125" cy="184666"/>
+          </a:xfrm>
+          <a:prstGeom prst="rect">
+            <a:avLst/>
+          </a:prstGeom>
+          <a:noFill/>
+          <a:ln/>
+        </p:spPr>
+        <p:txBody>
+          <a:bodyPr wrap="square" lIns="0" tIns="0" rIns="0" bIns="0" rtlCol="0" anchor="t">
+            <a:spAutoFit/>
+          </a:bodyPr>
+          <a:lstStyle/>
+          <a:p>
+            <a:pPr marL="0" marR="0" lvl="0" indent="0" algn="l" defTabSz="914400" rtl="0" eaLnBrk="1" fontAlgn="auto" latinLnBrk="0" hangingPunct="1">
+              <a:lnSpc>
+                <a:spcPct val="100000"/>
+              </a:lnSpc>
+              <a:spcBef>
+                <a:spcPts val="0"/>
+              </a:spcBef>
+              <a:spcAft>
+                <a:spcPts val="0"/>
+              </a:spcAft>
+              <a:buClrTx/>
+              <a:buSzTx/>
+              <a:buFontTx/>
+              <a:buNone/>
+              <a:tabLst/>
+              <a:defRPr/>
+            </a:pPr>
+            <a:r>
+              <a:rPr kumimoji="0" lang="en-US" sz="1200" b="0" i="0" u="none" strike="noStrike" kern="1200" cap="none" spc="0" normalizeH="0" baseline="0" noProof="0" dirty="0">
+                <a:ln>
+                  <a:noFill/>
+                </a:ln>
+                <a:solidFill>
+                  <a:srgbClr val="0F2537"/>
+                </a:solidFill>
+                <a:effectLst/>
+                <a:uLnTx/>
+                <a:uFillTx/>
+                <a:latin typeface="Work Sans SemiBold" pitchFamily="34" charset="0"/>
+                <a:ea typeface="Work Sans SemiBold" pitchFamily="34" charset="-122"/>
+                <a:cs typeface="Work Sans SemiBold" pitchFamily="34" charset="-120"/>
+              </a:rPr>
+              <a:t>Reduced Hallucination:</a:t>
+            </a:r>
+            <a:endParaRPr kumimoji="0" lang="en-US" sz="1200" b="0" i="0" u="none" strike="noStrike" kern="1200" cap="none" spc="0" normalizeH="0" baseline="0" noProof="0" dirty="0">
+              <a:ln>
+                <a:noFill/>
+              </a:ln>
+              <a:solidFill>
+                <a:prstClr val="black"/>
+              </a:solidFill>
+              <a:effectLst/>
+              <a:uLnTx/>
+              <a:uFillTx/>
+              <a:latin typeface="Calibri" panose="020F0502020204030204"/>
+              <a:ea typeface="+mn-ea"/>
+              <a:cs typeface="+mn-cs"/>
+            </a:endParaRPr>
+          </a:p>
+        </p:txBody>
+      </p:sp>
+      <p:sp>
+        <p:nvSpPr>
+          <p:cNvPr id="10" name="Text 6">
+            <a:extLst>
+              <a:ext uri="{FF2B5EF4-FFF2-40B4-BE49-F238E27FC236}">
+                <a16:creationId xmlns:a16="http://schemas.microsoft.com/office/drawing/2014/main" id="{8B34C210-8F99-75F2-72D1-B619945FEDFC}"/>
+              </a:ext>
+            </a:extLst>
+          </p:cNvPr>
+          <p:cNvSpPr/>
+          <p:nvPr/>
+        </p:nvSpPr>
+        <p:spPr>
+          <a:xfrm>
+            <a:off x="857248" y="3275427"/>
+            <a:ext cx="5142433" cy="180499"/>
+          </a:xfrm>
+          <a:prstGeom prst="rect">
+            <a:avLst/>
+          </a:prstGeom>
+          <a:noFill/>
+          <a:ln/>
+        </p:spPr>
+        <p:txBody>
+          <a:bodyPr wrap="none" lIns="0" tIns="0" rIns="0" bIns="0" rtlCol="0" anchor="t">
+            <a:spAutoFit/>
+          </a:bodyPr>
+          <a:lstStyle/>
+          <a:p>
+            <a:pPr marL="0" marR="0" lvl="0" indent="0" algn="l" defTabSz="914400" rtl="0" eaLnBrk="1" fontAlgn="auto" latinLnBrk="0" hangingPunct="1">
+              <a:lnSpc>
+                <a:spcPct val="120000"/>
+              </a:lnSpc>
+              <a:spcBef>
+                <a:spcPts val="0"/>
+              </a:spcBef>
+              <a:spcAft>
+                <a:spcPts val="0"/>
+              </a:spcAft>
+              <a:buClrTx/>
+              <a:buSzTx/>
+              <a:buFontTx/>
+              <a:buNone/>
+              <a:tabLst/>
+              <a:defRPr/>
+            </a:pPr>
+            <a:r>
+              <a:rPr kumimoji="0" lang="en-US" sz="1050" b="0" i="0" u="none" strike="noStrike" kern="1200" cap="none" spc="0" normalizeH="0" baseline="0" noProof="0" dirty="0">
+                <a:ln>
+                  <a:noFill/>
+                </a:ln>
+                <a:solidFill>
+                  <a:srgbClr val="2C3E50"/>
+                </a:solidFill>
+                <a:effectLst/>
+                <a:uLnTx/>
+                <a:uFillTx/>
+                <a:latin typeface="Work Sans" pitchFamily="34" charset="0"/>
+                <a:ea typeface="Work Sans" pitchFamily="34" charset="-122"/>
+                <a:cs typeface="Work Sans" pitchFamily="34" charset="-120"/>
+              </a:rPr>
+              <a:t>A significant step toward trustworthy AI in sensitive domains (Finance/Legal).</a:t>
+            </a:r>
+            <a:endParaRPr kumimoji="0" lang="en-US" sz="1050" b="0" i="0" u="none" strike="noStrike" kern="1200" cap="none" spc="0" normalizeH="0" baseline="0" noProof="0" dirty="0">
+              <a:ln>
+                <a:noFill/>
+              </a:ln>
+              <a:solidFill>
+                <a:prstClr val="black"/>
+              </a:solidFill>
+              <a:effectLst/>
+              <a:uLnTx/>
+              <a:uFillTx/>
+              <a:latin typeface="Calibri" panose="020F0502020204030204"/>
+              <a:ea typeface="+mn-ea"/>
+              <a:cs typeface="+mn-cs"/>
+            </a:endParaRPr>
+          </a:p>
+        </p:txBody>
+      </p:sp>
+    </p:spTree>
+    <p:extLst>
+      <p:ext uri="{BB962C8B-B14F-4D97-AF65-F5344CB8AC3E}">
+        <p14:creationId xmlns:p14="http://schemas.microsoft.com/office/powerpoint/2010/main" val="2472844201"/>
+      </p:ext>
+    </p:extLst>
+  </p:cSld>
+  <p:clrMapOvr>
+    <a:masterClrMapping/>
+  </p:clrMapOvr>
+</p:sld>
+</file>
+
+<file path=ppt/slides/slide11.xml><?xml version="1.0" encoding="utf-8"?>
+<p:sld xmlns:a="http://schemas.openxmlformats.org/drawingml/2006/main" xmlns:r="http://schemas.openxmlformats.org/officeDocument/2006/relationships" xmlns:p="http://schemas.openxmlformats.org/presentationml/2006/main">
+  <p:cSld name="Slide 9">
+    <p:spTree>
+      <p:nvGrpSpPr>
+        <p:cNvPr id="1" name=""/>
+        <p:cNvGrpSpPr/>
+        <p:nvPr/>
+      </p:nvGrpSpPr>
+      <p:grpSpPr>
+        <a:xfrm>
+          <a:off x="0" y="0"/>
+          <a:ext cx="0" cy="0"/>
+          <a:chOff x="0" y="0"/>
+          <a:chExt cx="0" cy="0"/>
+        </a:xfrm>
+      </p:grpSpPr>
+      <p:pic>
+        <p:nvPicPr>
+          <p:cNvPr id="3" name="Image 0" descr="preencoded.png"/>
+          <p:cNvPicPr>
+            <a:picLocks noChangeAspect="1"/>
+          </p:cNvPicPr>
+          <p:nvPr/>
+        </p:nvPicPr>
+        <p:blipFill>
+          <a:blip r:embed="rId3"/>
+          <a:stretch>
+            <a:fillRect/>
+          </a:stretch>
+        </p:blipFill>
+        <p:spPr>
+          <a:xfrm>
+            <a:off x="0" y="0"/>
+            <a:ext cx="9144000" cy="5143500"/>
+          </a:xfrm>
+          <a:prstGeom prst="rect">
+            <a:avLst/>
+          </a:prstGeom>
+        </p:spPr>
+      </p:pic>
+      <p:sp>
+        <p:nvSpPr>
+          <p:cNvPr id="4" name="Text 0"/>
+          <p:cNvSpPr/>
+          <p:nvPr/>
+        </p:nvSpPr>
+        <p:spPr>
+          <a:xfrm>
+            <a:off x="428625" y="785506"/>
+            <a:ext cx="8286750" cy="262533"/>
+          </a:xfrm>
+          <a:prstGeom prst="rect">
+            <a:avLst/>
+          </a:prstGeom>
+          <a:noFill/>
+          <a:ln/>
+        </p:spPr>
+        <p:txBody>
+          <a:bodyPr wrap="square" lIns="0" tIns="0" rIns="0" bIns="0" rtlCol="0" anchor="t">
+            <a:spAutoFit/>
+          </a:bodyPr>
+          <a:lstStyle/>
+          <a:p>
+            <a:pPr marL="0" indent="0" algn="l">
+              <a:buNone/>
+            </a:pPr>
+            <a:r>
+              <a:rPr lang="en-US" sz="1600" b="1" dirty="0">
+                <a:solidFill>
+                  <a:srgbClr val="0F2537"/>
+                </a:solidFill>
+                <a:latin typeface="Playfair Display Bold" pitchFamily="34" charset="0"/>
+                <a:ea typeface="Playfair Display Bold" pitchFamily="34" charset="-122"/>
+                <a:cs typeface="Playfair Display Bold" pitchFamily="34" charset="-120"/>
+              </a:rPr>
+              <a:t>Conclusion &amp; Next Steps</a:t>
+            </a:r>
+            <a:endParaRPr lang="en-US" sz="1600" dirty="0"/>
+          </a:p>
+        </p:txBody>
+      </p:sp>
+      <p:sp>
+        <p:nvSpPr>
+          <p:cNvPr id="5" name="Text 1"/>
+          <p:cNvSpPr/>
+          <p:nvPr/>
+        </p:nvSpPr>
+        <p:spPr>
+          <a:xfrm>
+            <a:off x="428625" y="1333788"/>
+            <a:ext cx="6429375" cy="754363"/>
+          </a:xfrm>
+          <a:prstGeom prst="rect">
+            <a:avLst/>
+          </a:prstGeom>
+          <a:noFill/>
+          <a:ln/>
+        </p:spPr>
+        <p:txBody>
+          <a:bodyPr wrap="square" lIns="0" tIns="0" rIns="0" bIns="0" rtlCol="0" anchor="t">
+            <a:spAutoFit/>
+          </a:bodyPr>
+          <a:lstStyle/>
+          <a:p>
+            <a:pPr marL="0" indent="0" algn="l">
+              <a:lnSpc>
+                <a:spcPct val="128000"/>
+              </a:lnSpc>
+              <a:buNone/>
+            </a:pPr>
+            <a:r>
+              <a:rPr lang="en-US" sz="1150" i="1" dirty="0">
+                <a:solidFill>
+                  <a:srgbClr val="2C3E50"/>
+                </a:solidFill>
+                <a:latin typeface="Work Sans" pitchFamily="34" charset="0"/>
+                <a:ea typeface="Work Sans" pitchFamily="34" charset="-122"/>
+                <a:cs typeface="Work Sans" pitchFamily="34" charset="-120"/>
+              </a:rPr>
+              <a:t>The framework is currently on track to deliver a scalable solution for accurate, real-time dialogue intelligence, significantly mitigating the risk of AI hallucinations in multi-turn conversations.</a:t>
+            </a:r>
+            <a:endParaRPr lang="en-US" sz="1150" dirty="0"/>
+          </a:p>
+        </p:txBody>
+      </p:sp>
+      <p:sp>
+        <p:nvSpPr>
+          <p:cNvPr id="6" name="Text 2"/>
+          <p:cNvSpPr/>
+          <p:nvPr/>
+        </p:nvSpPr>
+        <p:spPr>
+          <a:xfrm>
+            <a:off x="428625" y="2666795"/>
+            <a:ext cx="3643313" cy="198239"/>
+          </a:xfrm>
+          <a:prstGeom prst="rect">
+            <a:avLst/>
+          </a:prstGeom>
+          <a:noFill/>
+          <a:ln/>
+        </p:spPr>
+        <p:txBody>
+          <a:bodyPr wrap="square" lIns="0" tIns="0" rIns="0" bIns="0" rtlCol="0" anchor="t">
+            <a:spAutoFit/>
+          </a:bodyPr>
+          <a:lstStyle/>
+          <a:p>
+            <a:pPr marL="0" indent="0" algn="l">
+              <a:buNone/>
+            </a:pPr>
+            <a:r>
+              <a:rPr lang="en-US" sz="1200" b="1" dirty="0">
+                <a:solidFill>
+                  <a:srgbClr val="0F2537"/>
+                </a:solidFill>
+                <a:latin typeface="Playfair Display Bold" pitchFamily="34" charset="0"/>
+                <a:ea typeface="Playfair Display Bold" pitchFamily="34" charset="-122"/>
+                <a:cs typeface="Playfair Display Bold" pitchFamily="34" charset="-120"/>
+              </a:rPr>
+              <a:t>Immediate Next Steps</a:t>
+            </a:r>
+            <a:endParaRPr lang="en-US" sz="1200" dirty="0"/>
+          </a:p>
+        </p:txBody>
+      </p:sp>
+      <p:sp>
+        <p:nvSpPr>
+          <p:cNvPr id="7" name="Text 3"/>
+          <p:cNvSpPr/>
+          <p:nvPr/>
+        </p:nvSpPr>
+        <p:spPr>
+          <a:xfrm>
+            <a:off x="642938" y="3007909"/>
+            <a:ext cx="3429000" cy="411435"/>
+          </a:xfrm>
+          <a:prstGeom prst="rect">
+            <a:avLst/>
+          </a:prstGeom>
+          <a:noFill/>
+          <a:ln/>
+        </p:spPr>
+        <p:txBody>
+          <a:bodyPr wrap="square" lIns="0" tIns="0" rIns="0" bIns="0" rtlCol="0" anchor="t">
+            <a:spAutoFit/>
+          </a:bodyPr>
+          <a:lstStyle/>
+          <a:p>
+            <a:pPr marL="0" indent="0" algn="l">
+              <a:lnSpc>
+                <a:spcPct val="128000"/>
+              </a:lnSpc>
+              <a:buNone/>
+            </a:pPr>
+            <a:r>
+              <a:rPr lang="en-US" sz="950" dirty="0">
+                <a:solidFill>
+                  <a:srgbClr val="2C3E50"/>
+                </a:solidFill>
+                <a:latin typeface="Work Sans" pitchFamily="34" charset="0"/>
+                <a:ea typeface="Work Sans" pitchFamily="34" charset="-122"/>
+                <a:cs typeface="Work Sans" pitchFamily="34" charset="-120"/>
+              </a:rPr>
+              <a:t>Initiate domain-specific fine-tuning using Low-Rank Adaptation (LoRA).</a:t>
+            </a:r>
+            <a:endParaRPr lang="en-US" sz="950" dirty="0"/>
+          </a:p>
+        </p:txBody>
+      </p:sp>
+      <p:sp>
+        <p:nvSpPr>
+          <p:cNvPr id="8" name="Text 4"/>
+          <p:cNvSpPr/>
+          <p:nvPr/>
+        </p:nvSpPr>
+        <p:spPr>
+          <a:xfrm>
+            <a:off x="642938" y="3526501"/>
+            <a:ext cx="3429000" cy="411435"/>
+          </a:xfrm>
+          <a:prstGeom prst="rect">
+            <a:avLst/>
+          </a:prstGeom>
+          <a:noFill/>
+          <a:ln/>
+        </p:spPr>
+        <p:txBody>
+          <a:bodyPr wrap="square" lIns="0" tIns="0" rIns="0" bIns="0" rtlCol="0" anchor="t">
+            <a:spAutoFit/>
+          </a:bodyPr>
+          <a:lstStyle/>
+          <a:p>
+            <a:pPr marL="0" indent="0" algn="l">
+              <a:lnSpc>
+                <a:spcPct val="128000"/>
+              </a:lnSpc>
+              <a:buNone/>
+            </a:pPr>
+            <a:r>
+              <a:rPr lang="en-US" sz="950" dirty="0">
+                <a:solidFill>
+                  <a:srgbClr val="2C3E50"/>
+                </a:solidFill>
+                <a:latin typeface="Work Sans" pitchFamily="34" charset="0"/>
+                <a:ea typeface="Work Sans" pitchFamily="34" charset="-122"/>
+                <a:cs typeface="Work Sans" pitchFamily="34" charset="-120"/>
+              </a:rPr>
+              <a:t>Begin preliminary performance testing on the DialogSum dataset.</a:t>
+            </a:r>
+            <a:endParaRPr lang="en-US" sz="950" dirty="0"/>
+          </a:p>
+        </p:txBody>
+      </p:sp>
+      <p:sp>
+        <p:nvSpPr>
+          <p:cNvPr id="9" name="Text 5"/>
+          <p:cNvSpPr/>
+          <p:nvPr/>
+        </p:nvSpPr>
+        <p:spPr>
+          <a:xfrm>
+            <a:off x="642938" y="4045093"/>
+            <a:ext cx="3257885" cy="205718"/>
+          </a:xfrm>
+          <a:prstGeom prst="rect">
+            <a:avLst/>
+          </a:prstGeom>
+          <a:noFill/>
+          <a:ln/>
+        </p:spPr>
+        <p:txBody>
+          <a:bodyPr wrap="none" lIns="0" tIns="0" rIns="0" bIns="0" rtlCol="0" anchor="t">
+            <a:spAutoFit/>
+          </a:bodyPr>
+          <a:lstStyle/>
+          <a:p>
+            <a:pPr marL="0" indent="0" algn="l">
+              <a:lnSpc>
+                <a:spcPct val="128000"/>
+              </a:lnSpc>
+              <a:buNone/>
+            </a:pPr>
+            <a:r>
+              <a:rPr lang="en-US" sz="950" dirty="0">
+                <a:solidFill>
+                  <a:srgbClr val="2C3E50"/>
+                </a:solidFill>
+                <a:latin typeface="Work Sans" pitchFamily="34" charset="0"/>
+                <a:ea typeface="Work Sans" pitchFamily="34" charset="-122"/>
+                <a:cs typeface="Work Sans" pitchFamily="34" charset="-120"/>
+              </a:rPr>
+              <a:t>Refine the "Filtering Layer" for enhanced noise reduction.</a:t>
+            </a:r>
+            <a:endParaRPr lang="en-US" sz="950" dirty="0"/>
+          </a:p>
+        </p:txBody>
+      </p:sp>
+      <p:sp>
+        <p:nvSpPr>
+          <p:cNvPr id="10" name="Text 6"/>
+          <p:cNvSpPr/>
+          <p:nvPr/>
+        </p:nvSpPr>
+        <p:spPr>
+          <a:xfrm>
+            <a:off x="4643438" y="2666795"/>
+            <a:ext cx="3643313" cy="198239"/>
+          </a:xfrm>
+          <a:prstGeom prst="rect">
+            <a:avLst/>
+          </a:prstGeom>
+          <a:noFill/>
+          <a:ln/>
+        </p:spPr>
+        <p:txBody>
+          <a:bodyPr wrap="square" lIns="0" tIns="0" rIns="0" bIns="0" rtlCol="0" anchor="t">
+            <a:spAutoFit/>
+          </a:bodyPr>
+          <a:lstStyle/>
+          <a:p>
+            <a:pPr marL="0" indent="0" algn="l">
+              <a:buNone/>
+            </a:pPr>
+            <a:r>
+              <a:rPr lang="en-US" sz="1200" b="1" dirty="0">
+                <a:solidFill>
+                  <a:srgbClr val="0F2537"/>
+                </a:solidFill>
+                <a:latin typeface="Playfair Display Bold" pitchFamily="34" charset="0"/>
+                <a:ea typeface="Playfair Display Bold" pitchFamily="34" charset="-122"/>
+                <a:cs typeface="Playfair Display Bold" pitchFamily="34" charset="-120"/>
+              </a:rPr>
+              <a:t>Future Scope</a:t>
+            </a:r>
+            <a:endParaRPr lang="en-US" sz="1200" dirty="0"/>
+          </a:p>
+        </p:txBody>
+      </p:sp>
+      <p:sp>
+        <p:nvSpPr>
+          <p:cNvPr id="11" name="Text 7"/>
+          <p:cNvSpPr/>
+          <p:nvPr/>
+        </p:nvSpPr>
+        <p:spPr>
+          <a:xfrm>
+            <a:off x="4857750" y="3007909"/>
+            <a:ext cx="3429000" cy="411435"/>
+          </a:xfrm>
+          <a:prstGeom prst="rect">
+            <a:avLst/>
+          </a:prstGeom>
+          <a:noFill/>
+          <a:ln/>
+        </p:spPr>
+        <p:txBody>
+          <a:bodyPr wrap="square" lIns="0" tIns="0" rIns="0" bIns="0" rtlCol="0" anchor="t">
+            <a:spAutoFit/>
+          </a:bodyPr>
+          <a:lstStyle/>
+          <a:p>
+            <a:pPr marL="0" indent="0" algn="l">
+              <a:lnSpc>
+                <a:spcPct val="128000"/>
+              </a:lnSpc>
+              <a:buNone/>
+            </a:pPr>
+            <a:r>
+              <a:rPr lang="en-US" sz="950" dirty="0">
+                <a:solidFill>
+                  <a:srgbClr val="2C3E50"/>
+                </a:solidFill>
+                <a:latin typeface="Work Sans" pitchFamily="34" charset="0"/>
+                <a:ea typeface="Work Sans" pitchFamily="34" charset="-122"/>
+                <a:cs typeface="Work Sans" pitchFamily="34" charset="-120"/>
+              </a:rPr>
+              <a:t>Extending the framework to Multimodal Retrieval for video call summarization.</a:t>
+            </a:r>
+            <a:endParaRPr lang="en-US" sz="950" dirty="0"/>
+          </a:p>
+        </p:txBody>
+      </p:sp>
+      <p:sp>
+        <p:nvSpPr>
+          <p:cNvPr id="12" name="Text 8"/>
+          <p:cNvSpPr/>
+          <p:nvPr/>
+        </p:nvSpPr>
+        <p:spPr>
+          <a:xfrm>
+            <a:off x="4857750" y="3526501"/>
+            <a:ext cx="3429000" cy="411435"/>
+          </a:xfrm>
+          <a:prstGeom prst="rect">
+            <a:avLst/>
+          </a:prstGeom>
+          <a:noFill/>
+          <a:ln/>
+        </p:spPr>
+        <p:txBody>
+          <a:bodyPr wrap="square" lIns="0" tIns="0" rIns="0" bIns="0" rtlCol="0" anchor="t">
+            <a:spAutoFit/>
+          </a:bodyPr>
+          <a:lstStyle/>
+          <a:p>
+            <a:pPr marL="0" indent="0" algn="l">
+              <a:lnSpc>
+                <a:spcPct val="128000"/>
+              </a:lnSpc>
+              <a:buNone/>
+            </a:pPr>
+            <a:r>
+              <a:rPr lang="en-US" sz="950" dirty="0">
+                <a:solidFill>
+                  <a:srgbClr val="2C3E50"/>
+                </a:solidFill>
+                <a:latin typeface="Work Sans" pitchFamily="34" charset="0"/>
+                <a:ea typeface="Work Sans" pitchFamily="34" charset="-122"/>
+                <a:cs typeface="Work Sans" pitchFamily="34" charset="-120"/>
+              </a:rPr>
+              <a:t>Optimizing model performance for Edge Devices using Quantization (GGUF/AWQ).</a:t>
+            </a:r>
+            <a:endParaRPr lang="en-US" sz="950" dirty="0"/>
+          </a:p>
+        </p:txBody>
+      </p:sp>
+      <p:sp>
+        <p:nvSpPr>
+          <p:cNvPr id="13" name="Text 9"/>
+          <p:cNvSpPr/>
+          <p:nvPr/>
+        </p:nvSpPr>
+        <p:spPr>
+          <a:xfrm>
+            <a:off x="4857750" y="4045093"/>
+            <a:ext cx="2830181" cy="205718"/>
+          </a:xfrm>
+          <a:prstGeom prst="rect">
+            <a:avLst/>
+          </a:prstGeom>
+          <a:noFill/>
+          <a:ln/>
+        </p:spPr>
+        <p:txBody>
+          <a:bodyPr wrap="none" lIns="0" tIns="0" rIns="0" bIns="0" rtlCol="0" anchor="t">
+            <a:spAutoFit/>
+          </a:bodyPr>
+          <a:lstStyle/>
+          <a:p>
+            <a:pPr marL="0" indent="0" algn="l">
+              <a:lnSpc>
+                <a:spcPct val="128000"/>
+              </a:lnSpc>
+              <a:buNone/>
+            </a:pPr>
+            <a:r>
+              <a:rPr lang="en-US" sz="950" dirty="0">
+                <a:solidFill>
+                  <a:srgbClr val="2C3E50"/>
+                </a:solidFill>
+                <a:latin typeface="Work Sans" pitchFamily="34" charset="0"/>
+                <a:ea typeface="Work Sans" pitchFamily="34" charset="-122"/>
+                <a:cs typeface="Work Sans" pitchFamily="34" charset="-120"/>
+              </a:rPr>
+              <a:t>Integration with real-time enterprise data streams.</a:t>
+            </a:r>
+            <a:endParaRPr lang="en-US" sz="950" dirty="0"/>
+          </a:p>
+        </p:txBody>
+      </p:sp>
+    </p:spTree>
+  </p:cSld>
+  <p:clrMapOvr>
+    <a:masterClrMapping/>
+  </p:clrMapOvr>
+</p:sld>
+</file>
+
+<file path=ppt/slides/slide12.xml><?xml version="1.0" encoding="utf-8"?>
 <p:sld xmlns:a="http://schemas.openxmlformats.org/drawingml/2006/main" xmlns:r="http://schemas.openxmlformats.org/officeDocument/2006/relationships" xmlns:p="http://schemas.openxmlformats.org/presentationml/2006/main">
   <p:cSld name="Slide 10">
     <p:spTree>
@@ -1896,14 +3279,14 @@
       </p:grpSpPr>
       <p:pic>
         <p:nvPicPr>
-          <p:cNvPr id="3" name="Image 0" descr="preencoded.png">    </p:cNvPr>
+          <p:cNvPr id="3" name="Image 0" descr="preencoded.png"/>
           <p:cNvPicPr>
             <a:picLocks noChangeAspect="1"/>
           </p:cNvPicPr>
           <p:nvPr/>
         </p:nvPicPr>
         <p:blipFill>
-          <a:blip r:embed="rId1"/>
+          <a:blip r:embed="rId3"/>
           <a:stretch>
             <a:fillRect/>
           </a:stretch>
@@ -1941,7 +3324,7 @@
           </a:bodyPr>
           <a:lstStyle/>
           <a:p>
-            <a:pPr algn="l" indent="0" marL="0">
+            <a:pPr marL="0" indent="0" algn="l">
               <a:buNone/>
             </a:pPr>
             <a:r>
@@ -1953,7 +3336,7 @@
                 <a:ea typeface="Playfair Display Bold" pitchFamily="34" charset="-122"/>
                 <a:cs typeface="Playfair Display Bold" pitchFamily="34" charset="-120"/>
               </a:rPr>
-              <a:t>Q&amp;A</a:t>
+              <a:t>Thank You!</a:t>
             </a:r>
             <a:endParaRPr lang="en-US" sz="3300" dirty="0"/>
           </a:p>
@@ -1961,14 +3344,14 @@
       </p:sp>
       <p:sp>
         <p:nvSpPr>
-          <p:cNvPr id="5" name="Text 1"/>
-          <p:cNvSpPr/>
-          <p:nvPr/>
-        </p:nvSpPr>
-        <p:spPr>
-          <a:xfrm>
-            <a:off x="5729846" y="2660154"/>
-            <a:ext cx="2414029" cy="262533"/>
+          <p:cNvPr id="6" name="Text 2"/>
+          <p:cNvSpPr/>
+          <p:nvPr/>
+        </p:nvSpPr>
+        <p:spPr>
+          <a:xfrm>
+            <a:off x="5809041" y="3351312"/>
+            <a:ext cx="2334834" cy="164306"/>
           </a:xfrm>
           <a:prstGeom prst="rect">
             <a:avLst/>
@@ -1982,34 +3365,101 @@
           </a:bodyPr>
           <a:lstStyle/>
           <a:p>
-            <a:pPr algn="l" indent="0" marL="0">
-              <a:buNone/>
-            </a:pPr>
-            <a:r>
-              <a:rPr lang="en-US" sz="1700" dirty="0">
-                <a:solidFill>
-                  <a:srgbClr val="2C3E50"/>
+            <a:pPr marL="0" indent="0" algn="l">
+              <a:buNone/>
+            </a:pPr>
+            <a:r>
+              <a:rPr lang="en-US" sz="1050" dirty="0">
+                <a:solidFill>
+                  <a:srgbClr val="D96C06"/>
                 </a:solidFill>
                 <a:latin typeface="Work Sans" pitchFamily="34" charset="0"/>
                 <a:ea typeface="Work Sans" pitchFamily="34" charset="-122"/>
                 <a:cs typeface="Work Sans" pitchFamily="34" charset="-120"/>
               </a:rPr>
-              <a:t>Questions &amp; Discussion</a:t>
-            </a:r>
-            <a:endParaRPr lang="en-US" sz="1700" dirty="0"/>
-          </a:p>
-        </p:txBody>
-      </p:sp>
-      <p:sp>
-        <p:nvSpPr>
-          <p:cNvPr id="6" name="Text 2"/>
-          <p:cNvSpPr/>
-          <p:nvPr/>
-        </p:nvSpPr>
-        <p:spPr>
-          <a:xfrm>
-            <a:off x="5809041" y="3351312"/>
-            <a:ext cx="2334834" cy="164306"/>
+              <a:t>Moving Forward!!!</a:t>
+            </a:r>
+            <a:endParaRPr lang="en-US" sz="1050" dirty="0"/>
+          </a:p>
+        </p:txBody>
+      </p:sp>
+    </p:spTree>
+  </p:cSld>
+  <p:clrMapOvr>
+    <a:masterClrMapping/>
+  </p:clrMapOvr>
+</p:sld>
+</file>
+
+<file path=ppt/slides/slide13.xml><?xml version="1.0" encoding="utf-8"?>
+<p:sld xmlns:a="http://schemas.openxmlformats.org/drawingml/2006/main" xmlns:r="http://schemas.openxmlformats.org/officeDocument/2006/relationships" xmlns:p="http://schemas.openxmlformats.org/presentationml/2006/main">
+  <p:cSld>
+    <p:spTree>
+      <p:nvGrpSpPr>
+        <p:cNvPr id="1" name="">
+          <a:extLst>
+            <a:ext uri="{FF2B5EF4-FFF2-40B4-BE49-F238E27FC236}">
+              <a16:creationId xmlns:a16="http://schemas.microsoft.com/office/drawing/2014/main" id="{5D33A694-BDF1-257F-6295-34F2071F61E3}"/>
+            </a:ext>
+          </a:extLst>
+        </p:cNvPr>
+        <p:cNvGrpSpPr/>
+        <p:nvPr/>
+      </p:nvGrpSpPr>
+      <p:grpSpPr>
+        <a:xfrm>
+          <a:off x="0" y="0"/>
+          <a:ext cx="0" cy="0"/>
+          <a:chOff x="0" y="0"/>
+          <a:chExt cx="0" cy="0"/>
+        </a:xfrm>
+      </p:grpSpPr>
+      <p:pic>
+        <p:nvPicPr>
+          <p:cNvPr id="3" name="Image 0" descr="preencoded.png">
+            <a:extLst>
+              <a:ext uri="{FF2B5EF4-FFF2-40B4-BE49-F238E27FC236}">
+                <a16:creationId xmlns:a16="http://schemas.microsoft.com/office/drawing/2014/main" id="{80A1CD5A-972B-6B08-0467-AF98B384C1C3}"/>
+              </a:ext>
+            </a:extLst>
+          </p:cNvPr>
+          <p:cNvPicPr>
+            <a:picLocks noChangeAspect="1"/>
+          </p:cNvPicPr>
+          <p:nvPr/>
+        </p:nvPicPr>
+        <p:blipFill>
+          <a:blip r:embed="rId3"/>
+          <a:stretch>
+            <a:fillRect/>
+          </a:stretch>
+        </p:blipFill>
+        <p:spPr>
+          <a:xfrm>
+            <a:off x="0" y="0"/>
+            <a:ext cx="9144000" cy="5143500"/>
+          </a:xfrm>
+          <a:prstGeom prst="rect">
+            <a:avLst/>
+          </a:prstGeom>
+        </p:spPr>
+      </p:pic>
+      <p:sp>
+        <p:nvSpPr>
+          <p:cNvPr id="4" name="Text 0">
+            <a:extLst>
+              <a:ext uri="{FF2B5EF4-FFF2-40B4-BE49-F238E27FC236}">
+                <a16:creationId xmlns:a16="http://schemas.microsoft.com/office/drawing/2014/main" id="{5741D876-63B8-A5B8-FA10-1315B0919819}"/>
+              </a:ext>
+            </a:extLst>
+          </p:cNvPr>
+          <p:cNvSpPr/>
+          <p:nvPr/>
+        </p:nvSpPr>
+        <p:spPr>
+          <a:xfrm>
+            <a:off x="1000125" y="1627882"/>
+            <a:ext cx="7143750" cy="525066"/>
           </a:xfrm>
           <a:prstGeom prst="rect">
             <a:avLst/>
@@ -2023,18 +3473,112 @@
           </a:bodyPr>
           <a:lstStyle/>
           <a:p>
-            <a:pPr algn="l" indent="0" marL="0">
-              <a:buNone/>
-            </a:pPr>
-            <a:r>
-              <a:rPr lang="en-US" sz="1050" dirty="0">
-                <a:solidFill>
-                  <a:srgbClr val="D96C06"/>
+            <a:pPr marL="0" indent="0" algn="l">
+              <a:buNone/>
+            </a:pPr>
+            <a:r>
+              <a:rPr lang="en-US" sz="3300" b="1" dirty="0">
+                <a:solidFill>
+                  <a:srgbClr val="0F2537"/>
+                </a:solidFill>
+                <a:latin typeface="Playfair Display Bold" pitchFamily="34" charset="0"/>
+                <a:ea typeface="Playfair Display Bold" pitchFamily="34" charset="-122"/>
+                <a:cs typeface="Playfair Display Bold" pitchFamily="34" charset="-120"/>
+              </a:rPr>
+              <a:t>Q&amp;A</a:t>
+            </a:r>
+            <a:endParaRPr lang="en-US" sz="3300" dirty="0"/>
+          </a:p>
+        </p:txBody>
+      </p:sp>
+      <p:sp>
+        <p:nvSpPr>
+          <p:cNvPr id="5" name="Text 1">
+            <a:extLst>
+              <a:ext uri="{FF2B5EF4-FFF2-40B4-BE49-F238E27FC236}">
+                <a16:creationId xmlns:a16="http://schemas.microsoft.com/office/drawing/2014/main" id="{ECC3474D-4BA2-2BFC-E7B3-D82F2CF19D11}"/>
+              </a:ext>
+            </a:extLst>
+          </p:cNvPr>
+          <p:cNvSpPr/>
+          <p:nvPr/>
+        </p:nvSpPr>
+        <p:spPr>
+          <a:xfrm>
+            <a:off x="5729846" y="2660154"/>
+            <a:ext cx="2414029" cy="262533"/>
+          </a:xfrm>
+          <a:prstGeom prst="rect">
+            <a:avLst/>
+          </a:prstGeom>
+          <a:noFill/>
+          <a:ln/>
+        </p:spPr>
+        <p:txBody>
+          <a:bodyPr wrap="square" lIns="0" tIns="0" rIns="0" bIns="0" rtlCol="0" anchor="t">
+            <a:spAutoFit/>
+          </a:bodyPr>
+          <a:lstStyle/>
+          <a:p>
+            <a:pPr marL="0" indent="0" algn="l">
+              <a:buNone/>
+            </a:pPr>
+            <a:r>
+              <a:rPr lang="en-US" sz="1700" dirty="0">
+                <a:solidFill>
+                  <a:srgbClr val="2C3E50"/>
                 </a:solidFill>
                 <a:latin typeface="Work Sans" pitchFamily="34" charset="0"/>
                 <a:ea typeface="Work Sans" pitchFamily="34" charset="-122"/>
                 <a:cs typeface="Work Sans" pitchFamily="34" charset="-120"/>
               </a:rPr>
+              <a:t>Questions &amp; Discussion</a:t>
+            </a:r>
+            <a:endParaRPr lang="en-US" sz="1700" dirty="0"/>
+          </a:p>
+        </p:txBody>
+      </p:sp>
+      <p:sp>
+        <p:nvSpPr>
+          <p:cNvPr id="6" name="Text 2">
+            <a:extLst>
+              <a:ext uri="{FF2B5EF4-FFF2-40B4-BE49-F238E27FC236}">
+                <a16:creationId xmlns:a16="http://schemas.microsoft.com/office/drawing/2014/main" id="{263EBDE4-B419-7339-543A-19B4260D25A0}"/>
+              </a:ext>
+            </a:extLst>
+          </p:cNvPr>
+          <p:cNvSpPr/>
+          <p:nvPr/>
+        </p:nvSpPr>
+        <p:spPr>
+          <a:xfrm>
+            <a:off x="5809041" y="3351312"/>
+            <a:ext cx="2334834" cy="164306"/>
+          </a:xfrm>
+          <a:prstGeom prst="rect">
+            <a:avLst/>
+          </a:prstGeom>
+          <a:noFill/>
+          <a:ln/>
+        </p:spPr>
+        <p:txBody>
+          <a:bodyPr wrap="square" lIns="0" tIns="0" rIns="0" bIns="0" rtlCol="0" anchor="t">
+            <a:spAutoFit/>
+          </a:bodyPr>
+          <a:lstStyle/>
+          <a:p>
+            <a:pPr marL="0" indent="0" algn="l">
+              <a:buNone/>
+            </a:pPr>
+            <a:r>
+              <a:rPr lang="en-US" sz="1050" dirty="0">
+                <a:solidFill>
+                  <a:srgbClr val="D96C06"/>
+                </a:solidFill>
+                <a:latin typeface="Work Sans" pitchFamily="34" charset="0"/>
+                <a:ea typeface="Work Sans" pitchFamily="34" charset="-122"/>
+                <a:cs typeface="Work Sans" pitchFamily="34" charset="-120"/>
+              </a:rPr>
               <a:t>Thank you for your time and support.</a:t>
             </a:r>
             <a:endParaRPr lang="en-US" sz="1050" dirty="0"/>
@@ -2042,6 +3586,11 @@
         </p:txBody>
       </p:sp>
     </p:spTree>
+    <p:extLst>
+      <p:ext uri="{BB962C8B-B14F-4D97-AF65-F5344CB8AC3E}">
+        <p14:creationId xmlns:p14="http://schemas.microsoft.com/office/powerpoint/2010/main" val="325414802"/>
+      </p:ext>
+    </p:extLst>
   </p:cSld>
   <p:clrMapOvr>
     <a:masterClrMapping/>
@@ -2066,30 +3615,6 @@
           <a:chExt cx="0" cy="0"/>
         </a:xfrm>
       </p:grpSpPr>
-      <p:pic>
-        <p:nvPicPr>
-          <p:cNvPr id="3" name="Image 0" descr="preencoded.png">    </p:cNvPr>
-          <p:cNvPicPr>
-            <a:picLocks noChangeAspect="1"/>
-          </p:cNvPicPr>
-          <p:nvPr/>
-        </p:nvPicPr>
-        <p:blipFill>
-          <a:blip r:embed="rId1"/>
-          <a:stretch>
-            <a:fillRect/>
-          </a:stretch>
-        </p:blipFill>
-        <p:spPr>
-          <a:xfrm>
-            <a:off x="0" y="0"/>
-            <a:ext cx="9144000" cy="5143500"/>
-          </a:xfrm>
-          <a:prstGeom prst="rect">
-            <a:avLst/>
-          </a:prstGeom>
-        </p:spPr>
-      </p:pic>
       <p:sp>
         <p:nvSpPr>
           <p:cNvPr id="4" name="Text 0"/>
@@ -2099,7 +3624,7 @@
         <p:spPr>
           <a:xfrm>
             <a:off x="642938" y="1329630"/>
-            <a:ext cx="7858125" cy="262533"/>
+            <a:ext cx="7858125" cy="246221"/>
           </a:xfrm>
           <a:prstGeom prst="rect">
             <a:avLst/>
@@ -2113,7 +3638,7 @@
           </a:bodyPr>
           <a:lstStyle/>
           <a:p>
-            <a:pPr algn="l" indent="0" marL="0">
+            <a:pPr marL="0" indent="0" algn="l">
               <a:buNone/>
             </a:pPr>
             <a:r>
@@ -2125,7 +3650,7 @@
                 <a:ea typeface="Playfair Display Bold" pitchFamily="34" charset="-122"/>
                 <a:cs typeface="Playfair Display Bold" pitchFamily="34" charset="-120"/>
               </a:rPr>
-              <a:t>Executive Summary</a:t>
+              <a:t>Abstract / Executive Summary</a:t>
             </a:r>
             <a:endParaRPr lang="en-US" sz="1600" dirty="0"/>
           </a:p>
@@ -2140,7 +3665,7 @@
         <p:spPr>
           <a:xfrm>
             <a:off x="857250" y="1806476"/>
-            <a:ext cx="5386834" cy="214313"/>
+            <a:ext cx="5717912" cy="178895"/>
           </a:xfrm>
           <a:prstGeom prst="rect">
             <a:avLst/>
@@ -2154,14 +3679,14 @@
           </a:bodyPr>
           <a:lstStyle/>
           <a:p>
-            <a:pPr algn="l" indent="0" marL="0">
+            <a:pPr marL="0" indent="0" algn="l">
               <a:lnSpc>
                 <a:spcPct val="120000"/>
               </a:lnSpc>
               <a:buNone/>
             </a:pPr>
             <a:r>
-              <a:rPr lang="en-US" sz="1050" dirty="0">
+              <a:rPr lang="en-US" sz="1050" b="1" dirty="0">
                 <a:solidFill>
                   <a:srgbClr val="2C3E50"/>
                 </a:solidFill>
@@ -2169,9 +3694,19 @@
                 <a:ea typeface="Work Sans" pitchFamily="34" charset="-122"/>
                 <a:cs typeface="Work Sans" pitchFamily="34" charset="-120"/>
               </a:rPr>
-              <a:t>The Vision: Bridging the gap between "fluent" generation and "factual" accuracy in AI.</a:t>
-            </a:r>
-            <a:endParaRPr lang="en-US" sz="1050" dirty="0"/>
+              <a:t>The Vision: </a:t>
+            </a:r>
+            <a:r>
+              <a:rPr lang="en-US" sz="1050" dirty="0">
+                <a:solidFill>
+                  <a:srgbClr val="2C3E50"/>
+                </a:solidFill>
+                <a:latin typeface="Work Sans" pitchFamily="34" charset="0"/>
+                <a:ea typeface="Work Sans" pitchFamily="34" charset="-122"/>
+                <a:cs typeface="Work Sans" pitchFamily="34" charset="-120"/>
+              </a:rPr>
+              <a:t>To bridge the gap between "fluent" generation and "factual" accuracy in AI.</a:t>
+            </a:r>
           </a:p>
         </p:txBody>
       </p:sp>
@@ -2184,7 +3719,7 @@
         <p:spPr>
           <a:xfrm>
             <a:off x="857250" y="2127945"/>
-            <a:ext cx="7643813" cy="428625"/>
+            <a:ext cx="7643813" cy="374398"/>
           </a:xfrm>
           <a:prstGeom prst="rect">
             <a:avLst/>
@@ -2198,14 +3733,14 @@
           </a:bodyPr>
           <a:lstStyle/>
           <a:p>
-            <a:pPr algn="l" indent="0" marL="0">
+            <a:pPr marL="0" indent="0" algn="l">
               <a:lnSpc>
                 <a:spcPct val="120000"/>
               </a:lnSpc>
               <a:buNone/>
             </a:pPr>
             <a:r>
-              <a:rPr lang="en-US" sz="1050" dirty="0">
+              <a:rPr lang="en-US" sz="1050" b="1" dirty="0">
                 <a:solidFill>
                   <a:srgbClr val="2C3E50"/>
                 </a:solidFill>
@@ -2213,7 +3748,18 @@
                 <a:ea typeface="Work Sans" pitchFamily="34" charset="-122"/>
                 <a:cs typeface="Work Sans" pitchFamily="34" charset="-120"/>
               </a:rPr>
-              <a:t>The Core Approach: Dynamically querying external knowledge bases to verify facts, rather than relying solely on internal model weights.</a:t>
+              <a:t>The Core Approach:</a:t>
+            </a:r>
+            <a:r>
+              <a:rPr lang="en-US" sz="1050" dirty="0">
+                <a:solidFill>
+                  <a:srgbClr val="2C3E50"/>
+                </a:solidFill>
+                <a:latin typeface="Work Sans" pitchFamily="34" charset="0"/>
+                <a:ea typeface="Work Sans" pitchFamily="34" charset="-122"/>
+                <a:cs typeface="Work Sans" pitchFamily="34" charset="-120"/>
+              </a:rPr>
+              <a:t> This research proposes a framework that doesn't just summarize dialogue based on internal weights but dynamically queries an external knowledge base to verify facts.</a:t>
             </a:r>
             <a:endParaRPr lang="en-US" sz="1050" dirty="0"/>
           </a:p>
@@ -2228,7 +3774,7 @@
         <p:spPr>
           <a:xfrm>
             <a:off x="857250" y="2663726"/>
-            <a:ext cx="7643813" cy="428625"/>
+            <a:ext cx="7643813" cy="372794"/>
           </a:xfrm>
           <a:prstGeom prst="rect">
             <a:avLst/>
@@ -2242,14 +3788,14 @@
           </a:bodyPr>
           <a:lstStyle/>
           <a:p>
-            <a:pPr algn="l" indent="0" marL="0">
+            <a:pPr marL="0" indent="0" algn="l">
               <a:lnSpc>
                 <a:spcPct val="120000"/>
               </a:lnSpc>
               <a:buNone/>
             </a:pPr>
             <a:r>
-              <a:rPr lang="en-US" sz="1050" dirty="0">
+              <a:rPr lang="en-US" sz="1050" b="1" dirty="0">
                 <a:solidFill>
                   <a:srgbClr val="2C3E50"/>
                 </a:solidFill>
@@ -2257,9 +3803,63 @@
                 <a:ea typeface="Work Sans" pitchFamily="34" charset="-122"/>
                 <a:cs typeface="Work Sans" pitchFamily="34" charset="-120"/>
               </a:rPr>
-              <a:t>Key Innovation: Integrating Retrieval-Augmented Generation (RAG) with Context-Aware Dialogue Modeling to solve the "Hallucination" problem.</a:t>
-            </a:r>
-            <a:endParaRPr lang="en-US" sz="1050" dirty="0"/>
+              <a:t>Key Innovation:</a:t>
+            </a:r>
+            <a:r>
+              <a:rPr lang="en-US" sz="1050" dirty="0">
+                <a:solidFill>
+                  <a:srgbClr val="2C3E50"/>
+                </a:solidFill>
+                <a:latin typeface="Work Sans" pitchFamily="34" charset="0"/>
+                <a:ea typeface="Work Sans" pitchFamily="34" charset="-122"/>
+                <a:cs typeface="Work Sans" pitchFamily="34" charset="-120"/>
+              </a:rPr>
+              <a:t> Integration of </a:t>
+            </a:r>
+            <a:r>
+              <a:rPr lang="en-US" sz="1050" b="1" dirty="0">
+                <a:solidFill>
+                  <a:srgbClr val="2C3E50"/>
+                </a:solidFill>
+                <a:latin typeface="Work Sans" pitchFamily="34" charset="0"/>
+                <a:ea typeface="Work Sans" pitchFamily="34" charset="-122"/>
+                <a:cs typeface="Work Sans" pitchFamily="34" charset="-120"/>
+              </a:rPr>
+              <a:t>Retrieval-Augmented Generation (RAG)</a:t>
+            </a:r>
+            <a:r>
+              <a:rPr lang="en-US" sz="1050" dirty="0">
+                <a:solidFill>
+                  <a:srgbClr val="2C3E50"/>
+                </a:solidFill>
+                <a:latin typeface="Work Sans" pitchFamily="34" charset="0"/>
+                <a:ea typeface="Work Sans" pitchFamily="34" charset="-122"/>
+                <a:cs typeface="Work Sans" pitchFamily="34" charset="-120"/>
+              </a:rPr>
+              <a:t> with </a:t>
+            </a:r>
+            <a:r>
+              <a:rPr lang="en-US" sz="1050" b="1" dirty="0">
+                <a:solidFill>
+                  <a:srgbClr val="2C3E50"/>
+                </a:solidFill>
+                <a:latin typeface="Work Sans" pitchFamily="34" charset="0"/>
+                <a:ea typeface="Work Sans" pitchFamily="34" charset="-122"/>
+                <a:cs typeface="Work Sans" pitchFamily="34" charset="-120"/>
+              </a:rPr>
+              <a:t>Context-Aware Dialogue Modeling</a:t>
+            </a:r>
+            <a:r>
+              <a:rPr lang="en-US" sz="1050" dirty="0">
+                <a:solidFill>
+                  <a:srgbClr val="2C3E50"/>
+                </a:solidFill>
+                <a:latin typeface="Work Sans" pitchFamily="34" charset="0"/>
+                <a:ea typeface="Work Sans" pitchFamily="34" charset="-122"/>
+                <a:cs typeface="Work Sans" pitchFamily="34" charset="-120"/>
+              </a:rPr>
+              <a:t> to solve the "Hallucination" problem in multi-turn conversations.</a:t>
+            </a:r>
           </a:p>
         </p:txBody>
       </p:sp>
@@ -2272,7 +3872,7 @@
         <p:spPr>
           <a:xfrm>
             <a:off x="857250" y="3492401"/>
-            <a:ext cx="6615447" cy="214313"/>
+            <a:ext cx="6944209" cy="180499"/>
           </a:xfrm>
           <a:prstGeom prst="rect">
             <a:avLst/>
@@ -2286,7 +3886,7 @@
           </a:bodyPr>
           <a:lstStyle/>
           <a:p>
-            <a:pPr algn="l" indent="0" marL="0">
+            <a:pPr marL="0" indent="0" algn="l">
               <a:lnSpc>
                 <a:spcPct val="120000"/>
               </a:lnSpc>
@@ -2301,7 +3901,7 @@
                 <a:ea typeface="Work Sans" pitchFamily="34" charset="-122"/>
                 <a:cs typeface="Work Sans" pitchFamily="34" charset="-120"/>
               </a:rPr>
-              <a:t>Q2 Milestone: Successfully completed environment setup, data indexing, and initial vector store creation.</a:t>
+              <a:t>Milestone: Successfully completed environment setup, data indexing, and initial vector store creation.</a:t>
             </a:r>
             <a:endParaRPr lang="en-US" sz="1050" dirty="0"/>
           </a:p>
@@ -2332,30 +3932,6 @@
           <a:chExt cx="0" cy="0"/>
         </a:xfrm>
       </p:grpSpPr>
-      <p:pic>
-        <p:nvPicPr>
-          <p:cNvPr id="3" name="Image 0" descr="preencoded.png">    </p:cNvPr>
-          <p:cNvPicPr>
-            <a:picLocks noChangeAspect="1"/>
-          </p:cNvPicPr>
-          <p:nvPr/>
-        </p:nvPicPr>
-        <p:blipFill>
-          <a:blip r:embed="rId1"/>
-          <a:stretch>
-            <a:fillRect/>
-          </a:stretch>
-        </p:blipFill>
-        <p:spPr>
-          <a:xfrm>
-            <a:off x="0" y="0"/>
-            <a:ext cx="9144000" cy="5143500"/>
-          </a:xfrm>
-          <a:prstGeom prst="rect">
-            <a:avLst/>
-          </a:prstGeom>
-        </p:spPr>
-      </p:pic>
       <p:sp>
         <p:nvSpPr>
           <p:cNvPr id="4" name="Text 0"/>
@@ -2365,7 +3941,7 @@
         <p:spPr>
           <a:xfrm>
             <a:off x="642938" y="895648"/>
-            <a:ext cx="7858125" cy="262533"/>
+            <a:ext cx="7858125" cy="246221"/>
           </a:xfrm>
           <a:prstGeom prst="rect">
             <a:avLst/>
@@ -2379,7 +3955,7 @@
           </a:bodyPr>
           <a:lstStyle/>
           <a:p>
-            <a:pPr algn="l" indent="0" marL="0">
+            <a:pPr marL="0" indent="0" algn="l">
               <a:buNone/>
             </a:pPr>
             <a:r>
@@ -2391,7 +3967,7 @@
                 <a:ea typeface="Playfair Display Bold" pitchFamily="34" charset="-122"/>
                 <a:cs typeface="Playfair Display Bold" pitchFamily="34" charset="-120"/>
               </a:rPr>
-              <a:t>Project Context &amp; Objectives</a:t>
+              <a:t>Introduction &amp; Context</a:t>
             </a:r>
             <a:endParaRPr lang="en-US" sz="1600" dirty="0"/>
           </a:p>
@@ -2406,7 +3982,7 @@
         <p:spPr>
           <a:xfrm>
             <a:off x="642938" y="1515368"/>
-            <a:ext cx="7858125" cy="196453"/>
+            <a:ext cx="7858125" cy="184666"/>
           </a:xfrm>
           <a:prstGeom prst="rect">
             <a:avLst/>
@@ -2420,7 +3996,7 @@
           </a:bodyPr>
           <a:lstStyle/>
           <a:p>
-            <a:pPr algn="l" indent="0" marL="0">
+            <a:pPr marL="0" indent="0" algn="l">
               <a:buNone/>
             </a:pPr>
             <a:r>
@@ -2432,7 +4008,7 @@
                 <a:ea typeface="Work Sans SemiBold" pitchFamily="34" charset="-122"/>
                 <a:cs typeface="Work Sans SemiBold" pitchFamily="34" charset="-120"/>
               </a:rPr>
-              <a:t>The Challenge:</a:t>
+              <a:t>Evolution of Summarization:</a:t>
             </a:r>
             <a:endParaRPr lang="en-US" sz="1200" dirty="0"/>
           </a:p>
@@ -2447,7 +4023,7 @@
         <p:spPr>
           <a:xfrm>
             <a:off x="857250" y="1783259"/>
-            <a:ext cx="7643813" cy="428625"/>
+            <a:ext cx="7643813" cy="180499"/>
           </a:xfrm>
           <a:prstGeom prst="rect">
             <a:avLst/>
@@ -2461,7 +4037,7 @@
           </a:bodyPr>
           <a:lstStyle/>
           <a:p>
-            <a:pPr algn="l" indent="0" marL="0">
+            <a:pPr marL="0" indent="0">
               <a:lnSpc>
                 <a:spcPct val="120000"/>
               </a:lnSpc>
@@ -2476,7 +4052,7 @@
                 <a:ea typeface="Work Sans" pitchFamily="34" charset="-122"/>
                 <a:cs typeface="Work Sans" pitchFamily="34" charset="-120"/>
               </a:rPr>
-              <a:t>Dialogues are messy (slang, interruptions, multiple speakers). LLMs often suffer from semantic drift in long conversations and create "plausible lies."</a:t>
+              <a:t>From Extractive (copy-pasting sentences) to Abstractive (rewriting like a human).</a:t>
             </a:r>
             <a:endParaRPr lang="en-US" sz="1050" dirty="0"/>
           </a:p>
@@ -2490,8 +4066,8 @@
         </p:nvSpPr>
         <p:spPr>
           <a:xfrm>
-            <a:off x="642938" y="2426196"/>
-            <a:ext cx="7858125" cy="196453"/>
+            <a:off x="642937" y="2226707"/>
+            <a:ext cx="7858125" cy="184666"/>
           </a:xfrm>
           <a:prstGeom prst="rect">
             <a:avLst/>
@@ -2505,7 +4081,7 @@
           </a:bodyPr>
           <a:lstStyle/>
           <a:p>
-            <a:pPr algn="l" indent="0" marL="0">
+            <a:pPr marL="0" indent="0" algn="l">
               <a:buNone/>
             </a:pPr>
             <a:r>
@@ -2517,7 +4093,7 @@
                 <a:ea typeface="Work Sans SemiBold" pitchFamily="34" charset="-122"/>
                 <a:cs typeface="Work Sans SemiBold" pitchFamily="34" charset="-120"/>
               </a:rPr>
-              <a:t>The Goal:</a:t>
+              <a:t>The Challenge of Dialogues:</a:t>
             </a:r>
             <a:endParaRPr lang="en-US" sz="1200" dirty="0"/>
           </a:p>
@@ -2531,8 +4107,8 @@
         </p:nvSpPr>
         <p:spPr>
           <a:xfrm>
-            <a:off x="857250" y="2694087"/>
-            <a:ext cx="4471485" cy="214313"/>
+            <a:off x="857250" y="2587687"/>
+            <a:ext cx="7077258" cy="374398"/>
           </a:xfrm>
           <a:prstGeom prst="rect">
             <a:avLst/>
@@ -2546,7 +4122,7 @@
           </a:bodyPr>
           <a:lstStyle/>
           <a:p>
-            <a:pPr algn="l" indent="0" marL="0">
+            <a:pPr marL="0" indent="0" algn="l">
               <a:lnSpc>
                 <a:spcPct val="120000"/>
               </a:lnSpc>
@@ -2561,7 +4137,26 @@
                 <a:ea typeface="Work Sans" pitchFamily="34" charset="-122"/>
                 <a:cs typeface="Work Sans" pitchFamily="34" charset="-120"/>
               </a:rPr>
-              <a:t>Ensure dialogue summaries are concise and 100% factually grounded.</a:t>
+              <a:t>Unlike documents, dialogues are messy—they contain slang, interruptions, multiple speakers, and implicit </a:t>
+            </a:r>
+          </a:p>
+          <a:p>
+            <a:pPr marL="0" indent="0" algn="l">
+              <a:lnSpc>
+                <a:spcPct val="120000"/>
+              </a:lnSpc>
+              <a:buNone/>
+            </a:pPr>
+            <a:r>
+              <a:rPr lang="en-US" sz="1050" dirty="0">
+                <a:solidFill>
+                  <a:srgbClr val="2C3E50"/>
+                </a:solidFill>
+                <a:latin typeface="Work Sans" pitchFamily="34" charset="0"/>
+                <a:ea typeface="Work Sans" pitchFamily="34" charset="-122"/>
+                <a:cs typeface="Work Sans" pitchFamily="34" charset="-120"/>
+              </a:rPr>
+              <a:t>references ("he," "that thing").</a:t>
             </a:r>
             <a:endParaRPr lang="en-US" sz="1050" dirty="0"/>
           </a:p>
@@ -2576,7 +4171,7 @@
         <p:spPr>
           <a:xfrm>
             <a:off x="642938" y="3122712"/>
-            <a:ext cx="7858125" cy="196453"/>
+            <a:ext cx="7858125" cy="184666"/>
           </a:xfrm>
           <a:prstGeom prst="rect">
             <a:avLst/>
@@ -2590,7 +4185,7 @@
           </a:bodyPr>
           <a:lstStyle/>
           <a:p>
-            <a:pPr algn="l" indent="0" marL="0">
+            <a:pPr marL="0" indent="0" algn="l">
               <a:buNone/>
             </a:pPr>
             <a:r>
@@ -2602,7 +4197,7 @@
                 <a:ea typeface="Work Sans SemiBold" pitchFamily="34" charset="-122"/>
                 <a:cs typeface="Work Sans SemiBold" pitchFamily="34" charset="-120"/>
               </a:rPr>
-              <a:t>Core Objectives:</a:t>
+              <a:t>Knowledge Grounding:</a:t>
             </a:r>
             <a:endParaRPr lang="en-US" sz="1200" dirty="0"/>
           </a:p>
@@ -2617,7 +4212,7 @@
         <p:spPr>
           <a:xfrm>
             <a:off x="857250" y="3390602"/>
-            <a:ext cx="4034126" cy="214313"/>
+            <a:ext cx="7134967" cy="374398"/>
           </a:xfrm>
           <a:prstGeom prst="rect">
             <a:avLst/>
@@ -2631,7 +4226,7 @@
           </a:bodyPr>
           <a:lstStyle/>
           <a:p>
-            <a:pPr algn="l" indent="0" marL="0">
+            <a:pPr marL="0" indent="0" algn="l">
               <a:lnSpc>
                 <a:spcPct val="120000"/>
               </a:lnSpc>
@@ -2646,36 +4241,11 @@
                 <a:ea typeface="Work Sans" pitchFamily="34" charset="-122"/>
                 <a:cs typeface="Work Sans" pitchFamily="34" charset="-120"/>
               </a:rPr>
-              <a:t>Develop a RAG-based pipeline for real-time semantic searches.</a:t>
-            </a:r>
-            <a:endParaRPr lang="en-US" sz="1050" dirty="0"/>
-          </a:p>
-        </p:txBody>
-      </p:sp>
-      <p:sp>
-        <p:nvSpPr>
-          <p:cNvPr id="11" name="Text 7"/>
-          <p:cNvSpPr/>
-          <p:nvPr/>
-        </p:nvSpPr>
-        <p:spPr>
-          <a:xfrm>
-            <a:off x="857250" y="3676352"/>
-            <a:ext cx="3087384" cy="214313"/>
-          </a:xfrm>
-          <a:prstGeom prst="rect">
-            <a:avLst/>
-          </a:prstGeom>
-          <a:noFill/>
-          <a:ln/>
-        </p:spPr>
-        <p:txBody>
-          <a:bodyPr wrap="none" lIns="0" tIns="0" rIns="0" bIns="0" rtlCol="0" anchor="t">
-            <a:spAutoFit/>
-          </a:bodyPr>
-          <a:lstStyle/>
-          <a:p>
-            <a:pPr algn="l" indent="0" marL="0">
+              <a:t>The process of anchoring AI responses in a verified source of truth (e.g., Wikipedia, internal company docs, </a:t>
+            </a:r>
+          </a:p>
+          <a:p>
+            <a:pPr marL="0" indent="0" algn="l">
               <a:lnSpc>
                 <a:spcPct val="120000"/>
               </a:lnSpc>
@@ -2690,51 +4260,7 @@
                 <a:ea typeface="Work Sans" pitchFamily="34" charset="-122"/>
                 <a:cs typeface="Work Sans" pitchFamily="34" charset="-120"/>
               </a:rPr>
-              <a:t>Implement a "Filtering Layer" for noise reduction.</a:t>
-            </a:r>
-            <a:endParaRPr lang="en-US" sz="1050" dirty="0"/>
-          </a:p>
-        </p:txBody>
-      </p:sp>
-      <p:sp>
-        <p:nvSpPr>
-          <p:cNvPr id="12" name="Text 8"/>
-          <p:cNvSpPr/>
-          <p:nvPr/>
-        </p:nvSpPr>
-        <p:spPr>
-          <a:xfrm>
-            <a:off x="857250" y="3962102"/>
-            <a:ext cx="4010909" cy="214313"/>
-          </a:xfrm>
-          <a:prstGeom prst="rect">
-            <a:avLst/>
-          </a:prstGeom>
-          <a:noFill/>
-          <a:ln/>
-        </p:spPr>
-        <p:txBody>
-          <a:bodyPr wrap="none" lIns="0" tIns="0" rIns="0" bIns="0" rtlCol="0" anchor="t">
-            <a:spAutoFit/>
-          </a:bodyPr>
-          <a:lstStyle/>
-          <a:p>
-            <a:pPr algn="l" indent="0" marL="0">
-              <a:lnSpc>
-                <a:spcPct val="120000"/>
-              </a:lnSpc>
-              <a:buNone/>
-            </a:pPr>
-            <a:r>
-              <a:rPr lang="en-US" sz="1050" dirty="0">
-                <a:solidFill>
-                  <a:srgbClr val="2C3E50"/>
-                </a:solidFill>
-                <a:latin typeface="Work Sans" pitchFamily="34" charset="0"/>
-                <a:ea typeface="Work Sans" pitchFamily="34" charset="-122"/>
-                <a:cs typeface="Work Sans" pitchFamily="34" charset="-120"/>
-              </a:rPr>
-              <a:t>Enable adaptive retrieval to know *when* to fetch external data.</a:t>
+              <a:t>or real-time databases).</a:t>
             </a:r>
             <a:endParaRPr lang="en-US" sz="1050" dirty="0"/>
           </a:p>
@@ -2749,6 +4275,1743 @@
 </file>
 
 <file path=ppt/slides/slide4.xml><?xml version="1.0" encoding="utf-8"?>
+<p:sld xmlns:a="http://schemas.openxmlformats.org/drawingml/2006/main" xmlns:r="http://schemas.openxmlformats.org/officeDocument/2006/relationships" xmlns:p="http://schemas.openxmlformats.org/presentationml/2006/main">
+  <p:cSld>
+    <p:spTree>
+      <p:nvGrpSpPr>
+        <p:cNvPr id="1" name="">
+          <a:extLst>
+            <a:ext uri="{FF2B5EF4-FFF2-40B4-BE49-F238E27FC236}">
+              <a16:creationId xmlns:a16="http://schemas.microsoft.com/office/drawing/2014/main" id="{230EB607-D095-473B-22F8-CA1786E0943C}"/>
+            </a:ext>
+          </a:extLst>
+        </p:cNvPr>
+        <p:cNvGrpSpPr/>
+        <p:nvPr/>
+      </p:nvGrpSpPr>
+      <p:grpSpPr>
+        <a:xfrm>
+          <a:off x="0" y="0"/>
+          <a:ext cx="0" cy="0"/>
+          <a:chOff x="0" y="0"/>
+          <a:chExt cx="0" cy="0"/>
+        </a:xfrm>
+      </p:grpSpPr>
+      <p:sp>
+        <p:nvSpPr>
+          <p:cNvPr id="4" name="Text 0">
+            <a:extLst>
+              <a:ext uri="{FF2B5EF4-FFF2-40B4-BE49-F238E27FC236}">
+                <a16:creationId xmlns:a16="http://schemas.microsoft.com/office/drawing/2014/main" id="{04C851E5-1310-6D3C-36F2-46CA942B3326}"/>
+              </a:ext>
+            </a:extLst>
+          </p:cNvPr>
+          <p:cNvSpPr/>
+          <p:nvPr/>
+        </p:nvSpPr>
+        <p:spPr>
+          <a:xfrm>
+            <a:off x="642938" y="895648"/>
+            <a:ext cx="7858125" cy="246221"/>
+          </a:xfrm>
+          <a:prstGeom prst="rect">
+            <a:avLst/>
+          </a:prstGeom>
+          <a:noFill/>
+          <a:ln/>
+        </p:spPr>
+        <p:txBody>
+          <a:bodyPr wrap="square" lIns="0" tIns="0" rIns="0" bIns="0" rtlCol="0" anchor="t">
+            <a:spAutoFit/>
+          </a:bodyPr>
+          <a:lstStyle/>
+          <a:p>
+            <a:pPr marL="0" indent="0" algn="l">
+              <a:buNone/>
+            </a:pPr>
+            <a:r>
+              <a:rPr lang="en-US" sz="1600" b="1" dirty="0">
+                <a:solidFill>
+                  <a:srgbClr val="0F2537"/>
+                </a:solidFill>
+                <a:latin typeface="Playfair Display Bold" pitchFamily="34" charset="0"/>
+                <a:ea typeface="Playfair Display Bold" pitchFamily="34" charset="-122"/>
+                <a:cs typeface="Playfair Display Bold" pitchFamily="34" charset="-120"/>
+              </a:rPr>
+              <a:t>Problem Statement</a:t>
+            </a:r>
+            <a:endParaRPr lang="en-US" sz="1600" dirty="0"/>
+          </a:p>
+        </p:txBody>
+      </p:sp>
+      <p:sp>
+        <p:nvSpPr>
+          <p:cNvPr id="5" name="Text 1">
+            <a:extLst>
+              <a:ext uri="{FF2B5EF4-FFF2-40B4-BE49-F238E27FC236}">
+                <a16:creationId xmlns:a16="http://schemas.microsoft.com/office/drawing/2014/main" id="{7FA143B6-407F-0398-5508-9BC901D1B9CB}"/>
+              </a:ext>
+            </a:extLst>
+          </p:cNvPr>
+          <p:cNvSpPr/>
+          <p:nvPr/>
+        </p:nvSpPr>
+        <p:spPr>
+          <a:xfrm>
+            <a:off x="642938" y="1515368"/>
+            <a:ext cx="7858125" cy="184666"/>
+          </a:xfrm>
+          <a:prstGeom prst="rect">
+            <a:avLst/>
+          </a:prstGeom>
+          <a:noFill/>
+          <a:ln/>
+        </p:spPr>
+        <p:txBody>
+          <a:bodyPr wrap="square" lIns="0" tIns="0" rIns="0" bIns="0" rtlCol="0" anchor="t">
+            <a:spAutoFit/>
+          </a:bodyPr>
+          <a:lstStyle/>
+          <a:p>
+            <a:pPr marL="0" indent="0" algn="l">
+              <a:buNone/>
+            </a:pPr>
+            <a:r>
+              <a:rPr lang="en-US" sz="1200" dirty="0">
+                <a:solidFill>
+                  <a:srgbClr val="0F2537"/>
+                </a:solidFill>
+                <a:latin typeface="Work Sans SemiBold" pitchFamily="34" charset="0"/>
+                <a:ea typeface="Work Sans SemiBold" pitchFamily="34" charset="-122"/>
+                <a:cs typeface="Work Sans SemiBold" pitchFamily="34" charset="-120"/>
+              </a:rPr>
+              <a:t>Semantic Drift:</a:t>
+            </a:r>
+            <a:endParaRPr lang="en-US" sz="1200" dirty="0"/>
+          </a:p>
+        </p:txBody>
+      </p:sp>
+      <p:sp>
+        <p:nvSpPr>
+          <p:cNvPr id="6" name="Text 2">
+            <a:extLst>
+              <a:ext uri="{FF2B5EF4-FFF2-40B4-BE49-F238E27FC236}">
+                <a16:creationId xmlns:a16="http://schemas.microsoft.com/office/drawing/2014/main" id="{D05ADFAC-328D-533B-2299-B3657AF61D18}"/>
+              </a:ext>
+            </a:extLst>
+          </p:cNvPr>
+          <p:cNvSpPr/>
+          <p:nvPr/>
+        </p:nvSpPr>
+        <p:spPr>
+          <a:xfrm>
+            <a:off x="857250" y="1783259"/>
+            <a:ext cx="7643813" cy="180499"/>
+          </a:xfrm>
+          <a:prstGeom prst="rect">
+            <a:avLst/>
+          </a:prstGeom>
+          <a:noFill/>
+          <a:ln/>
+        </p:spPr>
+        <p:txBody>
+          <a:bodyPr wrap="square" lIns="0" tIns="0" rIns="0" bIns="0" rtlCol="0" anchor="t">
+            <a:spAutoFit/>
+          </a:bodyPr>
+          <a:lstStyle/>
+          <a:p>
+            <a:pPr marL="0" indent="0">
+              <a:lnSpc>
+                <a:spcPct val="120000"/>
+              </a:lnSpc>
+              <a:buNone/>
+            </a:pPr>
+            <a:r>
+              <a:rPr lang="en-US" sz="1050" dirty="0">
+                <a:solidFill>
+                  <a:srgbClr val="2C3E50"/>
+                </a:solidFill>
+                <a:latin typeface="Work Sans" pitchFamily="34" charset="0"/>
+                <a:ea typeface="Work Sans" pitchFamily="34" charset="-122"/>
+                <a:cs typeface="Work Sans" pitchFamily="34" charset="-120"/>
+              </a:rPr>
+              <a:t>LLMs often lose the thread in long conversations (20+ turns).</a:t>
+            </a:r>
+            <a:endParaRPr lang="en-US" sz="1050" dirty="0"/>
+          </a:p>
+        </p:txBody>
+      </p:sp>
+      <p:sp>
+        <p:nvSpPr>
+          <p:cNvPr id="7" name="Text 3">
+            <a:extLst>
+              <a:ext uri="{FF2B5EF4-FFF2-40B4-BE49-F238E27FC236}">
+                <a16:creationId xmlns:a16="http://schemas.microsoft.com/office/drawing/2014/main" id="{4245BA00-41D6-713A-7F85-6D7D4329DF3E}"/>
+              </a:ext>
+            </a:extLst>
+          </p:cNvPr>
+          <p:cNvSpPr/>
+          <p:nvPr/>
+        </p:nvSpPr>
+        <p:spPr>
+          <a:xfrm>
+            <a:off x="642937" y="2226707"/>
+            <a:ext cx="7858125" cy="184666"/>
+          </a:xfrm>
+          <a:prstGeom prst="rect">
+            <a:avLst/>
+          </a:prstGeom>
+          <a:noFill/>
+          <a:ln/>
+        </p:spPr>
+        <p:txBody>
+          <a:bodyPr wrap="square" lIns="0" tIns="0" rIns="0" bIns="0" rtlCol="0" anchor="t">
+            <a:spAutoFit/>
+          </a:bodyPr>
+          <a:lstStyle/>
+          <a:p>
+            <a:pPr marL="0" indent="0" algn="l">
+              <a:buNone/>
+            </a:pPr>
+            <a:r>
+              <a:rPr lang="en-US" sz="1200" dirty="0">
+                <a:solidFill>
+                  <a:srgbClr val="0F2537"/>
+                </a:solidFill>
+                <a:latin typeface="Work Sans SemiBold" pitchFamily="34" charset="0"/>
+                <a:ea typeface="Work Sans SemiBold" pitchFamily="34" charset="-122"/>
+                <a:cs typeface="Work Sans SemiBold" pitchFamily="34" charset="-120"/>
+              </a:rPr>
+              <a:t>Fact-Checking Gap:</a:t>
+            </a:r>
+            <a:endParaRPr lang="en-US" sz="1200" dirty="0"/>
+          </a:p>
+        </p:txBody>
+      </p:sp>
+      <p:sp>
+        <p:nvSpPr>
+          <p:cNvPr id="8" name="Text 4">
+            <a:extLst>
+              <a:ext uri="{FF2B5EF4-FFF2-40B4-BE49-F238E27FC236}">
+                <a16:creationId xmlns:a16="http://schemas.microsoft.com/office/drawing/2014/main" id="{05AA99EB-49F8-D240-F371-2179136F08AB}"/>
+              </a:ext>
+            </a:extLst>
+          </p:cNvPr>
+          <p:cNvSpPr/>
+          <p:nvPr/>
+        </p:nvSpPr>
+        <p:spPr>
+          <a:xfrm>
+            <a:off x="857250" y="2587687"/>
+            <a:ext cx="5831725" cy="180499"/>
+          </a:xfrm>
+          <a:prstGeom prst="rect">
+            <a:avLst/>
+          </a:prstGeom>
+          <a:noFill/>
+          <a:ln/>
+        </p:spPr>
+        <p:txBody>
+          <a:bodyPr wrap="none" lIns="0" tIns="0" rIns="0" bIns="0" rtlCol="0" anchor="t">
+            <a:spAutoFit/>
+          </a:bodyPr>
+          <a:lstStyle/>
+          <a:p>
+            <a:pPr marL="0" indent="0" algn="l">
+              <a:lnSpc>
+                <a:spcPct val="120000"/>
+              </a:lnSpc>
+              <a:buNone/>
+            </a:pPr>
+            <a:r>
+              <a:rPr lang="en-US" sz="1050" dirty="0">
+                <a:solidFill>
+                  <a:srgbClr val="2C3E50"/>
+                </a:solidFill>
+                <a:latin typeface="Work Sans" pitchFamily="34" charset="0"/>
+                <a:ea typeface="Work Sans" pitchFamily="34" charset="-122"/>
+                <a:cs typeface="Work Sans" pitchFamily="34" charset="-120"/>
+              </a:rPr>
+              <a:t>LLMs create "plausible lies" (hallucinations) because they prioritize grammar over truth.</a:t>
+            </a:r>
+            <a:endParaRPr lang="en-US" sz="1050" dirty="0"/>
+          </a:p>
+        </p:txBody>
+      </p:sp>
+      <p:sp>
+        <p:nvSpPr>
+          <p:cNvPr id="9" name="Text 5">
+            <a:extLst>
+              <a:ext uri="{FF2B5EF4-FFF2-40B4-BE49-F238E27FC236}">
+                <a16:creationId xmlns:a16="http://schemas.microsoft.com/office/drawing/2014/main" id="{E385C2B6-193E-83DB-0079-39155C7B8D2F}"/>
+              </a:ext>
+            </a:extLst>
+          </p:cNvPr>
+          <p:cNvSpPr/>
+          <p:nvPr/>
+        </p:nvSpPr>
+        <p:spPr>
+          <a:xfrm>
+            <a:off x="642936" y="3007537"/>
+            <a:ext cx="7858125" cy="184666"/>
+          </a:xfrm>
+          <a:prstGeom prst="rect">
+            <a:avLst/>
+          </a:prstGeom>
+          <a:noFill/>
+          <a:ln/>
+        </p:spPr>
+        <p:txBody>
+          <a:bodyPr wrap="square" lIns="0" tIns="0" rIns="0" bIns="0" rtlCol="0" anchor="t">
+            <a:spAutoFit/>
+          </a:bodyPr>
+          <a:lstStyle/>
+          <a:p>
+            <a:pPr marL="0" indent="0" algn="l">
+              <a:buNone/>
+            </a:pPr>
+            <a:r>
+              <a:rPr lang="en-US" sz="1200" dirty="0">
+                <a:solidFill>
+                  <a:srgbClr val="0F2537"/>
+                </a:solidFill>
+                <a:latin typeface="Work Sans SemiBold" pitchFamily="34" charset="0"/>
+                <a:ea typeface="Work Sans SemiBold" pitchFamily="34" charset="-122"/>
+                <a:cs typeface="Work Sans SemiBold" pitchFamily="34" charset="-120"/>
+              </a:rPr>
+              <a:t>Stale Knowledge:</a:t>
+            </a:r>
+            <a:endParaRPr lang="en-US" sz="1200" dirty="0"/>
+          </a:p>
+        </p:txBody>
+      </p:sp>
+      <p:sp>
+        <p:nvSpPr>
+          <p:cNvPr id="10" name="Text 6">
+            <a:extLst>
+              <a:ext uri="{FF2B5EF4-FFF2-40B4-BE49-F238E27FC236}">
+                <a16:creationId xmlns:a16="http://schemas.microsoft.com/office/drawing/2014/main" id="{6D95F04C-9852-F86E-E12D-853EC29E4391}"/>
+              </a:ext>
+            </a:extLst>
+          </p:cNvPr>
+          <p:cNvSpPr/>
+          <p:nvPr/>
+        </p:nvSpPr>
+        <p:spPr>
+          <a:xfrm>
+            <a:off x="857248" y="3275427"/>
+            <a:ext cx="6093015" cy="180499"/>
+          </a:xfrm>
+          <a:prstGeom prst="rect">
+            <a:avLst/>
+          </a:prstGeom>
+          <a:noFill/>
+          <a:ln/>
+        </p:spPr>
+        <p:txBody>
+          <a:bodyPr wrap="none" lIns="0" tIns="0" rIns="0" bIns="0" rtlCol="0" anchor="t">
+            <a:spAutoFit/>
+          </a:bodyPr>
+          <a:lstStyle/>
+          <a:p>
+            <a:pPr marL="0" indent="0" algn="l">
+              <a:lnSpc>
+                <a:spcPct val="120000"/>
+              </a:lnSpc>
+              <a:buNone/>
+            </a:pPr>
+            <a:r>
+              <a:rPr lang="en-US" sz="1050" dirty="0">
+                <a:solidFill>
+                  <a:srgbClr val="2C3E50"/>
+                </a:solidFill>
+                <a:latin typeface="Work Sans" pitchFamily="34" charset="0"/>
+                <a:ea typeface="Work Sans" pitchFamily="34" charset="-122"/>
+                <a:cs typeface="Work Sans" pitchFamily="34" charset="-120"/>
+              </a:rPr>
+              <a:t>Traditional models cannot summarize events that happened after their training data cutoff.</a:t>
+            </a:r>
+            <a:endParaRPr lang="en-US" sz="1050" dirty="0"/>
+          </a:p>
+        </p:txBody>
+      </p:sp>
+      <p:sp>
+        <p:nvSpPr>
+          <p:cNvPr id="2" name="Text 5">
+            <a:extLst>
+              <a:ext uri="{FF2B5EF4-FFF2-40B4-BE49-F238E27FC236}">
+                <a16:creationId xmlns:a16="http://schemas.microsoft.com/office/drawing/2014/main" id="{E3FC3E1C-CD5C-557A-D8C7-DCE7BFC938ED}"/>
+              </a:ext>
+            </a:extLst>
+          </p:cNvPr>
+          <p:cNvSpPr/>
+          <p:nvPr/>
+        </p:nvSpPr>
+        <p:spPr>
+          <a:xfrm>
+            <a:off x="642935" y="3649385"/>
+            <a:ext cx="7858125" cy="184666"/>
+          </a:xfrm>
+          <a:prstGeom prst="rect">
+            <a:avLst/>
+          </a:prstGeom>
+          <a:noFill/>
+          <a:ln/>
+        </p:spPr>
+        <p:txBody>
+          <a:bodyPr wrap="square" lIns="0" tIns="0" rIns="0" bIns="0" rtlCol="0" anchor="t">
+            <a:spAutoFit/>
+          </a:bodyPr>
+          <a:lstStyle/>
+          <a:p>
+            <a:pPr marL="0" indent="0" algn="l">
+              <a:buNone/>
+            </a:pPr>
+            <a:r>
+              <a:rPr lang="en-US" sz="1200" dirty="0">
+                <a:solidFill>
+                  <a:srgbClr val="0F2537"/>
+                </a:solidFill>
+                <a:latin typeface="Work Sans SemiBold" pitchFamily="34" charset="0"/>
+                <a:ea typeface="Work Sans SemiBold" pitchFamily="34" charset="-122"/>
+                <a:cs typeface="Work Sans SemiBold" pitchFamily="34" charset="-120"/>
+              </a:rPr>
+              <a:t>Goal:</a:t>
+            </a:r>
+            <a:endParaRPr lang="en-US" sz="1200" dirty="0"/>
+          </a:p>
+        </p:txBody>
+      </p:sp>
+      <p:sp>
+        <p:nvSpPr>
+          <p:cNvPr id="3" name="Text 6">
+            <a:extLst>
+              <a:ext uri="{FF2B5EF4-FFF2-40B4-BE49-F238E27FC236}">
+                <a16:creationId xmlns:a16="http://schemas.microsoft.com/office/drawing/2014/main" id="{8CD3E58D-8698-AFBF-EE08-2D837502BD77}"/>
+              </a:ext>
+            </a:extLst>
+          </p:cNvPr>
+          <p:cNvSpPr/>
+          <p:nvPr/>
+        </p:nvSpPr>
+        <p:spPr>
+          <a:xfrm>
+            <a:off x="857247" y="3985439"/>
+            <a:ext cx="5761193" cy="180499"/>
+          </a:xfrm>
+          <a:prstGeom prst="rect">
+            <a:avLst/>
+          </a:prstGeom>
+          <a:noFill/>
+          <a:ln/>
+        </p:spPr>
+        <p:txBody>
+          <a:bodyPr wrap="none" lIns="0" tIns="0" rIns="0" bIns="0" rtlCol="0" anchor="t">
+            <a:spAutoFit/>
+          </a:bodyPr>
+          <a:lstStyle/>
+          <a:p>
+            <a:pPr marL="0" indent="0" algn="l">
+              <a:lnSpc>
+                <a:spcPct val="120000"/>
+              </a:lnSpc>
+              <a:buNone/>
+            </a:pPr>
+            <a:r>
+              <a:rPr lang="en-US" sz="1050" dirty="0">
+                <a:solidFill>
+                  <a:srgbClr val="2C3E50"/>
+                </a:solidFill>
+                <a:latin typeface="Work Sans" pitchFamily="34" charset="0"/>
+                <a:ea typeface="Work Sans" pitchFamily="34" charset="-122"/>
+                <a:cs typeface="Work Sans" pitchFamily="34" charset="-120"/>
+              </a:rPr>
+              <a:t>How can we ensure a dialogue summary is both concise and 100% factually grounded?</a:t>
+            </a:r>
+            <a:endParaRPr lang="en-US" sz="1050" dirty="0"/>
+          </a:p>
+        </p:txBody>
+      </p:sp>
+    </p:spTree>
+    <p:extLst>
+      <p:ext uri="{BB962C8B-B14F-4D97-AF65-F5344CB8AC3E}">
+        <p14:creationId xmlns:p14="http://schemas.microsoft.com/office/powerpoint/2010/main" val="4248725649"/>
+      </p:ext>
+    </p:extLst>
+  </p:cSld>
+  <p:clrMapOvr>
+    <a:masterClrMapping/>
+  </p:clrMapOvr>
+</p:sld>
+</file>
+
+<file path=ppt/slides/slide5.xml><?xml version="1.0" encoding="utf-8"?>
+<p:sld xmlns:a="http://schemas.openxmlformats.org/drawingml/2006/main" xmlns:r="http://schemas.openxmlformats.org/officeDocument/2006/relationships" xmlns:p="http://schemas.openxmlformats.org/presentationml/2006/main">
+  <p:cSld>
+    <p:spTree>
+      <p:nvGrpSpPr>
+        <p:cNvPr id="1" name="">
+          <a:extLst>
+            <a:ext uri="{FF2B5EF4-FFF2-40B4-BE49-F238E27FC236}">
+              <a16:creationId xmlns:a16="http://schemas.microsoft.com/office/drawing/2014/main" id="{14727A20-AFDA-E1DE-BFD4-D7FB83E45CBA}"/>
+            </a:ext>
+          </a:extLst>
+        </p:cNvPr>
+        <p:cNvGrpSpPr/>
+        <p:nvPr/>
+      </p:nvGrpSpPr>
+      <p:grpSpPr>
+        <a:xfrm>
+          <a:off x="0" y="0"/>
+          <a:ext cx="0" cy="0"/>
+          <a:chOff x="0" y="0"/>
+          <a:chExt cx="0" cy="0"/>
+        </a:xfrm>
+      </p:grpSpPr>
+      <p:sp>
+        <p:nvSpPr>
+          <p:cNvPr id="4" name="Text 0">
+            <a:extLst>
+              <a:ext uri="{FF2B5EF4-FFF2-40B4-BE49-F238E27FC236}">
+                <a16:creationId xmlns:a16="http://schemas.microsoft.com/office/drawing/2014/main" id="{4CEFCCC9-7A28-90E3-5FED-B2561157D376}"/>
+              </a:ext>
+            </a:extLst>
+          </p:cNvPr>
+          <p:cNvSpPr/>
+          <p:nvPr/>
+        </p:nvSpPr>
+        <p:spPr>
+          <a:xfrm>
+            <a:off x="642938" y="895648"/>
+            <a:ext cx="7858125" cy="246221"/>
+          </a:xfrm>
+          <a:prstGeom prst="rect">
+            <a:avLst/>
+          </a:prstGeom>
+          <a:noFill/>
+          <a:ln/>
+        </p:spPr>
+        <p:txBody>
+          <a:bodyPr wrap="square" lIns="0" tIns="0" rIns="0" bIns="0" rtlCol="0" anchor="t">
+            <a:spAutoFit/>
+          </a:bodyPr>
+          <a:lstStyle/>
+          <a:p>
+            <a:pPr marL="0" indent="0" algn="l">
+              <a:buNone/>
+            </a:pPr>
+            <a:r>
+              <a:rPr lang="en-US" sz="1600" b="1" dirty="0">
+                <a:solidFill>
+                  <a:srgbClr val="0F2537"/>
+                </a:solidFill>
+                <a:latin typeface="Playfair Display Bold" pitchFamily="34" charset="0"/>
+                <a:ea typeface="Playfair Display Bold" pitchFamily="34" charset="-122"/>
+                <a:cs typeface="Playfair Display Bold" pitchFamily="34" charset="-120"/>
+              </a:rPr>
+              <a:t>Literature Review &amp; Gap Analysis</a:t>
+            </a:r>
+            <a:endParaRPr lang="en-US" sz="1600" dirty="0"/>
+          </a:p>
+        </p:txBody>
+      </p:sp>
+      <p:sp>
+        <p:nvSpPr>
+          <p:cNvPr id="5" name="Text 1">
+            <a:extLst>
+              <a:ext uri="{FF2B5EF4-FFF2-40B4-BE49-F238E27FC236}">
+                <a16:creationId xmlns:a16="http://schemas.microsoft.com/office/drawing/2014/main" id="{04349EAC-29CC-DCF7-F582-131780C2711C}"/>
+              </a:ext>
+            </a:extLst>
+          </p:cNvPr>
+          <p:cNvSpPr/>
+          <p:nvPr/>
+        </p:nvSpPr>
+        <p:spPr>
+          <a:xfrm>
+            <a:off x="642938" y="1515368"/>
+            <a:ext cx="7858125" cy="184666"/>
+          </a:xfrm>
+          <a:prstGeom prst="rect">
+            <a:avLst/>
+          </a:prstGeom>
+          <a:noFill/>
+          <a:ln/>
+        </p:spPr>
+        <p:txBody>
+          <a:bodyPr wrap="square" lIns="0" tIns="0" rIns="0" bIns="0" rtlCol="0" anchor="t">
+            <a:spAutoFit/>
+          </a:bodyPr>
+          <a:lstStyle/>
+          <a:p>
+            <a:pPr marL="0" indent="0" algn="l">
+              <a:buNone/>
+            </a:pPr>
+            <a:r>
+              <a:rPr lang="en-US" sz="1200" dirty="0">
+                <a:solidFill>
+                  <a:srgbClr val="0F2537"/>
+                </a:solidFill>
+                <a:latin typeface="Work Sans SemiBold" pitchFamily="34" charset="0"/>
+                <a:ea typeface="Work Sans SemiBold" pitchFamily="34" charset="-122"/>
+                <a:cs typeface="Work Sans SemiBold" pitchFamily="34" charset="-120"/>
+              </a:rPr>
+              <a:t>Current Models:</a:t>
+            </a:r>
+            <a:endParaRPr lang="en-US" sz="1200" dirty="0"/>
+          </a:p>
+        </p:txBody>
+      </p:sp>
+      <p:sp>
+        <p:nvSpPr>
+          <p:cNvPr id="6" name="Text 2">
+            <a:extLst>
+              <a:ext uri="{FF2B5EF4-FFF2-40B4-BE49-F238E27FC236}">
+                <a16:creationId xmlns:a16="http://schemas.microsoft.com/office/drawing/2014/main" id="{1D78EC9D-C6DD-402D-6B1E-05735DB63AAD}"/>
+              </a:ext>
+            </a:extLst>
+          </p:cNvPr>
+          <p:cNvSpPr/>
+          <p:nvPr/>
+        </p:nvSpPr>
+        <p:spPr>
+          <a:xfrm>
+            <a:off x="857250" y="1783259"/>
+            <a:ext cx="7643813" cy="180499"/>
+          </a:xfrm>
+          <a:prstGeom prst="rect">
+            <a:avLst/>
+          </a:prstGeom>
+          <a:noFill/>
+          <a:ln/>
+        </p:spPr>
+        <p:txBody>
+          <a:bodyPr wrap="square" lIns="0" tIns="0" rIns="0" bIns="0" rtlCol="0" anchor="t">
+            <a:spAutoFit/>
+          </a:bodyPr>
+          <a:lstStyle/>
+          <a:p>
+            <a:pPr marL="0" indent="0">
+              <a:lnSpc>
+                <a:spcPct val="120000"/>
+              </a:lnSpc>
+              <a:buNone/>
+            </a:pPr>
+            <a:r>
+              <a:rPr lang="en-US" sz="1050" dirty="0">
+                <a:solidFill>
+                  <a:srgbClr val="2C3E50"/>
+                </a:solidFill>
+                <a:latin typeface="Work Sans" pitchFamily="34" charset="0"/>
+                <a:ea typeface="Work Sans" pitchFamily="34" charset="-122"/>
+                <a:cs typeface="Work Sans" pitchFamily="34" charset="-120"/>
+              </a:rPr>
+              <a:t>BART, T5, and GPT-3.5/4 are the current standards.</a:t>
+            </a:r>
+            <a:endParaRPr lang="en-US" sz="1050" dirty="0"/>
+          </a:p>
+        </p:txBody>
+      </p:sp>
+      <p:sp>
+        <p:nvSpPr>
+          <p:cNvPr id="7" name="Text 3">
+            <a:extLst>
+              <a:ext uri="{FF2B5EF4-FFF2-40B4-BE49-F238E27FC236}">
+                <a16:creationId xmlns:a16="http://schemas.microsoft.com/office/drawing/2014/main" id="{068324C3-F7CA-E269-32C2-DA70751C7C59}"/>
+              </a:ext>
+            </a:extLst>
+          </p:cNvPr>
+          <p:cNvSpPr/>
+          <p:nvPr/>
+        </p:nvSpPr>
+        <p:spPr>
+          <a:xfrm>
+            <a:off x="642937" y="2226707"/>
+            <a:ext cx="7858125" cy="184666"/>
+          </a:xfrm>
+          <a:prstGeom prst="rect">
+            <a:avLst/>
+          </a:prstGeom>
+          <a:noFill/>
+          <a:ln/>
+        </p:spPr>
+        <p:txBody>
+          <a:bodyPr wrap="square" lIns="0" tIns="0" rIns="0" bIns="0" rtlCol="0" anchor="t">
+            <a:spAutoFit/>
+          </a:bodyPr>
+          <a:lstStyle/>
+          <a:p>
+            <a:pPr marL="0" indent="0" algn="l">
+              <a:buNone/>
+            </a:pPr>
+            <a:r>
+              <a:rPr lang="en-US" sz="1200" dirty="0">
+                <a:solidFill>
+                  <a:srgbClr val="0F2537"/>
+                </a:solidFill>
+                <a:latin typeface="Work Sans SemiBold" pitchFamily="34" charset="0"/>
+                <a:ea typeface="Work Sans SemiBold" pitchFamily="34" charset="-122"/>
+                <a:cs typeface="Work Sans SemiBold" pitchFamily="34" charset="-120"/>
+              </a:rPr>
+              <a:t>Limitations identified in literature:</a:t>
+            </a:r>
+            <a:endParaRPr lang="en-US" sz="1200" dirty="0"/>
+          </a:p>
+        </p:txBody>
+      </p:sp>
+      <p:sp>
+        <p:nvSpPr>
+          <p:cNvPr id="8" name="Text 4">
+            <a:extLst>
+              <a:ext uri="{FF2B5EF4-FFF2-40B4-BE49-F238E27FC236}">
+                <a16:creationId xmlns:a16="http://schemas.microsoft.com/office/drawing/2014/main" id="{BD5B2DC4-EBFE-39EE-789D-8FD03EE7DFDE}"/>
+              </a:ext>
+            </a:extLst>
+          </p:cNvPr>
+          <p:cNvSpPr/>
+          <p:nvPr/>
+        </p:nvSpPr>
+        <p:spPr>
+          <a:xfrm>
+            <a:off x="857250" y="2587687"/>
+            <a:ext cx="6285375" cy="180499"/>
+          </a:xfrm>
+          <a:prstGeom prst="rect">
+            <a:avLst/>
+          </a:prstGeom>
+          <a:noFill/>
+          <a:ln/>
+        </p:spPr>
+        <p:txBody>
+          <a:bodyPr wrap="none" lIns="0" tIns="0" rIns="0" bIns="0" rtlCol="0" anchor="t">
+            <a:spAutoFit/>
+          </a:bodyPr>
+          <a:lstStyle/>
+          <a:p>
+            <a:pPr marL="0" indent="0" algn="l">
+              <a:lnSpc>
+                <a:spcPct val="120000"/>
+              </a:lnSpc>
+              <a:buNone/>
+            </a:pPr>
+            <a:r>
+              <a:rPr lang="en-US" sz="1050" dirty="0">
+                <a:solidFill>
+                  <a:srgbClr val="2C3E50"/>
+                </a:solidFill>
+                <a:latin typeface="Work Sans" pitchFamily="34" charset="0"/>
+                <a:ea typeface="Work Sans" pitchFamily="34" charset="-122"/>
+                <a:cs typeface="Work Sans" pitchFamily="34" charset="-120"/>
+              </a:rPr>
+              <a:t>Standard models treat every dialogue as a standalone text, ignoring external world knowledge.</a:t>
+            </a:r>
+            <a:endParaRPr lang="en-US" sz="1050" dirty="0"/>
+          </a:p>
+        </p:txBody>
+      </p:sp>
+      <p:sp>
+        <p:nvSpPr>
+          <p:cNvPr id="10" name="Text 6">
+            <a:extLst>
+              <a:ext uri="{FF2B5EF4-FFF2-40B4-BE49-F238E27FC236}">
+                <a16:creationId xmlns:a16="http://schemas.microsoft.com/office/drawing/2014/main" id="{DBE5594E-9448-1C0C-7181-D06B216E2C78}"/>
+              </a:ext>
+            </a:extLst>
+          </p:cNvPr>
+          <p:cNvSpPr/>
+          <p:nvPr/>
+        </p:nvSpPr>
+        <p:spPr>
+          <a:xfrm>
+            <a:off x="857250" y="2919574"/>
+            <a:ext cx="5039841" cy="180499"/>
+          </a:xfrm>
+          <a:prstGeom prst="rect">
+            <a:avLst/>
+          </a:prstGeom>
+          <a:noFill/>
+          <a:ln/>
+        </p:spPr>
+        <p:txBody>
+          <a:bodyPr wrap="none" lIns="0" tIns="0" rIns="0" bIns="0" rtlCol="0" anchor="t">
+            <a:spAutoFit/>
+          </a:bodyPr>
+          <a:lstStyle/>
+          <a:p>
+            <a:pPr marL="0" indent="0" algn="l">
+              <a:lnSpc>
+                <a:spcPct val="120000"/>
+              </a:lnSpc>
+              <a:buNone/>
+            </a:pPr>
+            <a:r>
+              <a:rPr lang="en-US" sz="1050" dirty="0">
+                <a:solidFill>
+                  <a:srgbClr val="2C3E50"/>
+                </a:solidFill>
+                <a:latin typeface="Work Sans" pitchFamily="34" charset="0"/>
+                <a:ea typeface="Work Sans" pitchFamily="34" charset="-122"/>
+                <a:cs typeface="Work Sans" pitchFamily="34" charset="-120"/>
+              </a:rPr>
+              <a:t>Evaluation metrics (ROUGE) focus on word overlap, not factual correctness.</a:t>
+            </a:r>
+            <a:endParaRPr lang="en-US" sz="1050" dirty="0"/>
+          </a:p>
+        </p:txBody>
+      </p:sp>
+      <p:sp>
+        <p:nvSpPr>
+          <p:cNvPr id="2" name="Text 5">
+            <a:extLst>
+              <a:ext uri="{FF2B5EF4-FFF2-40B4-BE49-F238E27FC236}">
+                <a16:creationId xmlns:a16="http://schemas.microsoft.com/office/drawing/2014/main" id="{6FB6E216-21FD-8143-5C68-3002048D7D9B}"/>
+              </a:ext>
+            </a:extLst>
+          </p:cNvPr>
+          <p:cNvSpPr/>
+          <p:nvPr/>
+        </p:nvSpPr>
+        <p:spPr>
+          <a:xfrm>
+            <a:off x="642935" y="3311545"/>
+            <a:ext cx="7858125" cy="184666"/>
+          </a:xfrm>
+          <a:prstGeom prst="rect">
+            <a:avLst/>
+          </a:prstGeom>
+          <a:noFill/>
+          <a:ln/>
+        </p:spPr>
+        <p:txBody>
+          <a:bodyPr wrap="square" lIns="0" tIns="0" rIns="0" bIns="0" rtlCol="0" anchor="t">
+            <a:spAutoFit/>
+          </a:bodyPr>
+          <a:lstStyle/>
+          <a:p>
+            <a:pPr marL="0" indent="0" algn="l">
+              <a:buNone/>
+            </a:pPr>
+            <a:r>
+              <a:rPr lang="en-US" sz="1200" dirty="0">
+                <a:solidFill>
+                  <a:srgbClr val="0F2537"/>
+                </a:solidFill>
+                <a:latin typeface="Work Sans SemiBold" pitchFamily="34" charset="0"/>
+                <a:ea typeface="Work Sans SemiBold" pitchFamily="34" charset="-122"/>
+                <a:cs typeface="Work Sans SemiBold" pitchFamily="34" charset="-120"/>
+              </a:rPr>
+              <a:t>The Gap:</a:t>
+            </a:r>
+            <a:endParaRPr lang="en-US" sz="1200" dirty="0"/>
+          </a:p>
+        </p:txBody>
+      </p:sp>
+      <p:sp>
+        <p:nvSpPr>
+          <p:cNvPr id="3" name="Text 6">
+            <a:extLst>
+              <a:ext uri="{FF2B5EF4-FFF2-40B4-BE49-F238E27FC236}">
+                <a16:creationId xmlns:a16="http://schemas.microsoft.com/office/drawing/2014/main" id="{E0431E5D-9C86-85FF-9C48-0C081F4B7034}"/>
+              </a:ext>
+            </a:extLst>
+          </p:cNvPr>
+          <p:cNvSpPr/>
+          <p:nvPr/>
+        </p:nvSpPr>
+        <p:spPr>
+          <a:xfrm>
+            <a:off x="857250" y="3643432"/>
+            <a:ext cx="7296869" cy="374398"/>
+          </a:xfrm>
+          <a:prstGeom prst="rect">
+            <a:avLst/>
+          </a:prstGeom>
+          <a:noFill/>
+          <a:ln/>
+        </p:spPr>
+        <p:txBody>
+          <a:bodyPr wrap="none" lIns="0" tIns="0" rIns="0" bIns="0" rtlCol="0" anchor="t">
+            <a:spAutoFit/>
+          </a:bodyPr>
+          <a:lstStyle/>
+          <a:p>
+            <a:pPr marL="0" indent="0" algn="l">
+              <a:lnSpc>
+                <a:spcPct val="120000"/>
+              </a:lnSpc>
+              <a:buNone/>
+            </a:pPr>
+            <a:r>
+              <a:rPr lang="en-US" sz="1050" dirty="0">
+                <a:solidFill>
+                  <a:srgbClr val="2C3E50"/>
+                </a:solidFill>
+                <a:latin typeface="Work Sans" pitchFamily="34" charset="0"/>
+                <a:ea typeface="Work Sans" pitchFamily="34" charset="-122"/>
+                <a:cs typeface="Work Sans" pitchFamily="34" charset="-120"/>
+              </a:rPr>
+              <a:t>There is a lack of unified frameworks that combine </a:t>
+            </a:r>
+          </a:p>
+          <a:p>
+            <a:pPr marL="0" indent="0" algn="l">
+              <a:lnSpc>
+                <a:spcPct val="120000"/>
+              </a:lnSpc>
+              <a:buNone/>
+            </a:pPr>
+            <a:r>
+              <a:rPr lang="en-US" sz="1050" b="1" dirty="0">
+                <a:solidFill>
+                  <a:srgbClr val="2C3E50"/>
+                </a:solidFill>
+                <a:latin typeface="Work Sans" pitchFamily="34" charset="0"/>
+                <a:ea typeface="Work Sans" pitchFamily="34" charset="-122"/>
+                <a:cs typeface="Work Sans" pitchFamily="34" charset="-120"/>
+              </a:rPr>
+              <a:t>Dense Vector Retrieval</a:t>
+            </a:r>
+            <a:r>
+              <a:rPr lang="en-US" sz="1050" dirty="0">
+                <a:solidFill>
+                  <a:srgbClr val="2C3E50"/>
+                </a:solidFill>
+                <a:latin typeface="Work Sans" pitchFamily="34" charset="0"/>
+                <a:ea typeface="Work Sans" pitchFamily="34" charset="-122"/>
+                <a:cs typeface="Work Sans" pitchFamily="34" charset="-120"/>
+              </a:rPr>
+              <a:t> with </a:t>
+            </a:r>
+            <a:r>
+              <a:rPr lang="en-US" sz="1050" b="1" dirty="0">
+                <a:solidFill>
+                  <a:srgbClr val="2C3E50"/>
+                </a:solidFill>
+                <a:latin typeface="Work Sans" pitchFamily="34" charset="0"/>
+                <a:ea typeface="Work Sans" pitchFamily="34" charset="-122"/>
+                <a:cs typeface="Work Sans" pitchFamily="34" charset="-120"/>
+              </a:rPr>
+              <a:t>Instruction-tuned LLMs</a:t>
+            </a:r>
+            <a:r>
+              <a:rPr lang="en-US" sz="1050" dirty="0">
+                <a:solidFill>
+                  <a:srgbClr val="2C3E50"/>
+                </a:solidFill>
+                <a:latin typeface="Work Sans" pitchFamily="34" charset="0"/>
+                <a:ea typeface="Work Sans" pitchFamily="34" charset="-122"/>
+                <a:cs typeface="Work Sans" pitchFamily="34" charset="-120"/>
+              </a:rPr>
+              <a:t> specifically for the nuances of multi-party dialogues.</a:t>
+            </a:r>
+            <a:endParaRPr lang="en-US" sz="1050" dirty="0"/>
+          </a:p>
+        </p:txBody>
+      </p:sp>
+    </p:spTree>
+    <p:extLst>
+      <p:ext uri="{BB962C8B-B14F-4D97-AF65-F5344CB8AC3E}">
+        <p14:creationId xmlns:p14="http://schemas.microsoft.com/office/powerpoint/2010/main" val="3880677124"/>
+      </p:ext>
+    </p:extLst>
+  </p:cSld>
+  <p:clrMapOvr>
+    <a:masterClrMapping/>
+  </p:clrMapOvr>
+</p:sld>
+</file>
+
+<file path=ppt/slides/slide6.xml><?xml version="1.0" encoding="utf-8"?>
+<p:sld xmlns:a="http://schemas.openxmlformats.org/drawingml/2006/main" xmlns:r="http://schemas.openxmlformats.org/officeDocument/2006/relationships" xmlns:p="http://schemas.openxmlformats.org/presentationml/2006/main">
+  <p:cSld>
+    <p:spTree>
+      <p:nvGrpSpPr>
+        <p:cNvPr id="1" name="">
+          <a:extLst>
+            <a:ext uri="{FF2B5EF4-FFF2-40B4-BE49-F238E27FC236}">
+              <a16:creationId xmlns:a16="http://schemas.microsoft.com/office/drawing/2014/main" id="{316E19A9-E2DC-D4C6-5E01-3F039DF5161C}"/>
+            </a:ext>
+          </a:extLst>
+        </p:cNvPr>
+        <p:cNvGrpSpPr/>
+        <p:nvPr/>
+      </p:nvGrpSpPr>
+      <p:grpSpPr>
+        <a:xfrm>
+          <a:off x="0" y="0"/>
+          <a:ext cx="0" cy="0"/>
+          <a:chOff x="0" y="0"/>
+          <a:chExt cx="0" cy="0"/>
+        </a:xfrm>
+      </p:grpSpPr>
+      <p:sp>
+        <p:nvSpPr>
+          <p:cNvPr id="4" name="Text 0">
+            <a:extLst>
+              <a:ext uri="{FF2B5EF4-FFF2-40B4-BE49-F238E27FC236}">
+                <a16:creationId xmlns:a16="http://schemas.microsoft.com/office/drawing/2014/main" id="{434D9D79-EFF4-6F54-C13F-9F507A04AA50}"/>
+              </a:ext>
+            </a:extLst>
+          </p:cNvPr>
+          <p:cNvSpPr/>
+          <p:nvPr/>
+        </p:nvSpPr>
+        <p:spPr>
+          <a:xfrm>
+            <a:off x="642938" y="895648"/>
+            <a:ext cx="7858125" cy="246221"/>
+          </a:xfrm>
+          <a:prstGeom prst="rect">
+            <a:avLst/>
+          </a:prstGeom>
+          <a:noFill/>
+          <a:ln/>
+        </p:spPr>
+        <p:txBody>
+          <a:bodyPr wrap="square" lIns="0" tIns="0" rIns="0" bIns="0" rtlCol="0" anchor="t">
+            <a:spAutoFit/>
+          </a:bodyPr>
+          <a:lstStyle/>
+          <a:p>
+            <a:pPr marL="0" marR="0" lvl="0" indent="0" algn="l" defTabSz="914400" rtl="0" eaLnBrk="1" fontAlgn="auto" latinLnBrk="0" hangingPunct="1">
+              <a:lnSpc>
+                <a:spcPct val="100000"/>
+              </a:lnSpc>
+              <a:spcBef>
+                <a:spcPts val="0"/>
+              </a:spcBef>
+              <a:spcAft>
+                <a:spcPts val="0"/>
+              </a:spcAft>
+              <a:buClrTx/>
+              <a:buSzTx/>
+              <a:buFontTx/>
+              <a:buNone/>
+              <a:tabLst/>
+              <a:defRPr/>
+            </a:pPr>
+            <a:r>
+              <a:rPr kumimoji="0" lang="en-US" sz="1600" b="1" i="0" u="none" strike="noStrike" kern="1200" cap="none" spc="0" normalizeH="0" baseline="0" noProof="0" dirty="0">
+                <a:ln>
+                  <a:noFill/>
+                </a:ln>
+                <a:solidFill>
+                  <a:srgbClr val="0F2537"/>
+                </a:solidFill>
+                <a:effectLst/>
+                <a:uLnTx/>
+                <a:uFillTx/>
+                <a:latin typeface="Playfair Display Bold" pitchFamily="34" charset="0"/>
+                <a:ea typeface="Playfair Display Bold" pitchFamily="34" charset="-122"/>
+                <a:cs typeface="Playfair Display Bold" pitchFamily="34" charset="-120"/>
+              </a:rPr>
+              <a:t>Research Objectives</a:t>
+            </a:r>
+            <a:endParaRPr kumimoji="0" lang="en-US" sz="1600" b="0" i="0" u="none" strike="noStrike" kern="1200" cap="none" spc="0" normalizeH="0" baseline="0" noProof="0" dirty="0">
+              <a:ln>
+                <a:noFill/>
+              </a:ln>
+              <a:solidFill>
+                <a:prstClr val="black"/>
+              </a:solidFill>
+              <a:effectLst/>
+              <a:uLnTx/>
+              <a:uFillTx/>
+              <a:latin typeface="Calibri" panose="020F0502020204030204"/>
+              <a:ea typeface="+mn-ea"/>
+              <a:cs typeface="+mn-cs"/>
+            </a:endParaRPr>
+          </a:p>
+        </p:txBody>
+      </p:sp>
+      <p:sp>
+        <p:nvSpPr>
+          <p:cNvPr id="5" name="Text 1">
+            <a:extLst>
+              <a:ext uri="{FF2B5EF4-FFF2-40B4-BE49-F238E27FC236}">
+                <a16:creationId xmlns:a16="http://schemas.microsoft.com/office/drawing/2014/main" id="{BBF53F65-D490-5A50-99D4-DB92A5E081BC}"/>
+              </a:ext>
+            </a:extLst>
+          </p:cNvPr>
+          <p:cNvSpPr/>
+          <p:nvPr/>
+        </p:nvSpPr>
+        <p:spPr>
+          <a:xfrm>
+            <a:off x="642938" y="1515368"/>
+            <a:ext cx="7858125" cy="184666"/>
+          </a:xfrm>
+          <a:prstGeom prst="rect">
+            <a:avLst/>
+          </a:prstGeom>
+          <a:noFill/>
+          <a:ln/>
+        </p:spPr>
+        <p:txBody>
+          <a:bodyPr wrap="square" lIns="0" tIns="0" rIns="0" bIns="0" rtlCol="0" anchor="t">
+            <a:spAutoFit/>
+          </a:bodyPr>
+          <a:lstStyle/>
+          <a:p>
+            <a:pPr marL="0" marR="0" lvl="0" indent="0" algn="l" defTabSz="914400" rtl="0" eaLnBrk="1" fontAlgn="auto" latinLnBrk="0" hangingPunct="1">
+              <a:lnSpc>
+                <a:spcPct val="100000"/>
+              </a:lnSpc>
+              <a:spcBef>
+                <a:spcPts val="0"/>
+              </a:spcBef>
+              <a:spcAft>
+                <a:spcPts val="0"/>
+              </a:spcAft>
+              <a:buClrTx/>
+              <a:buSzTx/>
+              <a:buFontTx/>
+              <a:buNone/>
+              <a:tabLst/>
+              <a:defRPr/>
+            </a:pPr>
+            <a:r>
+              <a:rPr kumimoji="0" lang="en-US" sz="1200" b="0" i="0" u="none" strike="noStrike" kern="1200" cap="none" spc="0" normalizeH="0" baseline="0" noProof="0" dirty="0">
+                <a:ln>
+                  <a:noFill/>
+                </a:ln>
+                <a:solidFill>
+                  <a:srgbClr val="0F2537"/>
+                </a:solidFill>
+                <a:effectLst/>
+                <a:uLnTx/>
+                <a:uFillTx/>
+                <a:latin typeface="Work Sans SemiBold" pitchFamily="34" charset="0"/>
+                <a:ea typeface="Work Sans SemiBold" pitchFamily="34" charset="-122"/>
+                <a:cs typeface="Work Sans SemiBold" pitchFamily="34" charset="-120"/>
+              </a:rPr>
+              <a:t>Framework Design:</a:t>
+            </a:r>
+            <a:endParaRPr kumimoji="0" lang="en-US" sz="1200" b="0" i="0" u="none" strike="noStrike" kern="1200" cap="none" spc="0" normalizeH="0" baseline="0" noProof="0" dirty="0">
+              <a:ln>
+                <a:noFill/>
+              </a:ln>
+              <a:solidFill>
+                <a:prstClr val="black"/>
+              </a:solidFill>
+              <a:effectLst/>
+              <a:uLnTx/>
+              <a:uFillTx/>
+              <a:latin typeface="Calibri" panose="020F0502020204030204"/>
+              <a:ea typeface="+mn-ea"/>
+              <a:cs typeface="+mn-cs"/>
+            </a:endParaRPr>
+          </a:p>
+        </p:txBody>
+      </p:sp>
+      <p:sp>
+        <p:nvSpPr>
+          <p:cNvPr id="6" name="Text 2">
+            <a:extLst>
+              <a:ext uri="{FF2B5EF4-FFF2-40B4-BE49-F238E27FC236}">
+                <a16:creationId xmlns:a16="http://schemas.microsoft.com/office/drawing/2014/main" id="{46CA2E95-0F4C-B43E-E3B9-F009AFCBF5C4}"/>
+              </a:ext>
+            </a:extLst>
+          </p:cNvPr>
+          <p:cNvSpPr/>
+          <p:nvPr/>
+        </p:nvSpPr>
+        <p:spPr>
+          <a:xfrm>
+            <a:off x="857250" y="1783259"/>
+            <a:ext cx="7643813" cy="180499"/>
+          </a:xfrm>
+          <a:prstGeom prst="rect">
+            <a:avLst/>
+          </a:prstGeom>
+          <a:noFill/>
+          <a:ln/>
+        </p:spPr>
+        <p:txBody>
+          <a:bodyPr wrap="square" lIns="0" tIns="0" rIns="0" bIns="0" rtlCol="0" anchor="t">
+            <a:spAutoFit/>
+          </a:bodyPr>
+          <a:lstStyle/>
+          <a:p>
+            <a:pPr marL="0" marR="0" lvl="0" indent="0" algn="l" defTabSz="914400" rtl="0" eaLnBrk="1" fontAlgn="auto" latinLnBrk="0" hangingPunct="1">
+              <a:lnSpc>
+                <a:spcPct val="120000"/>
+              </a:lnSpc>
+              <a:spcBef>
+                <a:spcPts val="0"/>
+              </a:spcBef>
+              <a:spcAft>
+                <a:spcPts val="0"/>
+              </a:spcAft>
+              <a:buClrTx/>
+              <a:buSzTx/>
+              <a:buFontTx/>
+              <a:buNone/>
+              <a:tabLst/>
+              <a:defRPr/>
+            </a:pPr>
+            <a:r>
+              <a:rPr kumimoji="0" lang="en-US" sz="1050" b="0" i="0" u="none" strike="noStrike" kern="1200" cap="none" spc="0" normalizeH="0" baseline="0" noProof="0" dirty="0">
+                <a:ln>
+                  <a:noFill/>
+                </a:ln>
+                <a:solidFill>
+                  <a:srgbClr val="2C3E50"/>
+                </a:solidFill>
+                <a:effectLst/>
+                <a:uLnTx/>
+                <a:uFillTx/>
+                <a:latin typeface="Work Sans" pitchFamily="34" charset="0"/>
+                <a:ea typeface="Work Sans" pitchFamily="34" charset="-122"/>
+                <a:cs typeface="Work Sans" pitchFamily="34" charset="-120"/>
+              </a:rPr>
+              <a:t>Develop a RAG-based pipeline that performs real-time semantic searches during the summarization process.</a:t>
+            </a:r>
+            <a:endParaRPr kumimoji="0" lang="en-US" sz="1050" b="0" i="0" u="none" strike="noStrike" kern="1200" cap="none" spc="0" normalizeH="0" baseline="0" noProof="0" dirty="0">
+              <a:ln>
+                <a:noFill/>
+              </a:ln>
+              <a:solidFill>
+                <a:prstClr val="black"/>
+              </a:solidFill>
+              <a:effectLst/>
+              <a:uLnTx/>
+              <a:uFillTx/>
+              <a:latin typeface="Calibri" panose="020F0502020204030204"/>
+              <a:ea typeface="+mn-ea"/>
+              <a:cs typeface="+mn-cs"/>
+            </a:endParaRPr>
+          </a:p>
+        </p:txBody>
+      </p:sp>
+      <p:sp>
+        <p:nvSpPr>
+          <p:cNvPr id="7" name="Text 3">
+            <a:extLst>
+              <a:ext uri="{FF2B5EF4-FFF2-40B4-BE49-F238E27FC236}">
+                <a16:creationId xmlns:a16="http://schemas.microsoft.com/office/drawing/2014/main" id="{0C6FCAE9-958D-7709-96B2-B1B6827FF5C1}"/>
+              </a:ext>
+            </a:extLst>
+          </p:cNvPr>
+          <p:cNvSpPr/>
+          <p:nvPr/>
+        </p:nvSpPr>
+        <p:spPr>
+          <a:xfrm>
+            <a:off x="642937" y="2226707"/>
+            <a:ext cx="7858125" cy="184666"/>
+          </a:xfrm>
+          <a:prstGeom prst="rect">
+            <a:avLst/>
+          </a:prstGeom>
+          <a:noFill/>
+          <a:ln/>
+        </p:spPr>
+        <p:txBody>
+          <a:bodyPr wrap="square" lIns="0" tIns="0" rIns="0" bIns="0" rtlCol="0" anchor="t">
+            <a:spAutoFit/>
+          </a:bodyPr>
+          <a:lstStyle/>
+          <a:p>
+            <a:pPr marL="0" marR="0" lvl="0" indent="0" algn="l" defTabSz="914400" rtl="0" eaLnBrk="1" fontAlgn="auto" latinLnBrk="0" hangingPunct="1">
+              <a:lnSpc>
+                <a:spcPct val="100000"/>
+              </a:lnSpc>
+              <a:spcBef>
+                <a:spcPts val="0"/>
+              </a:spcBef>
+              <a:spcAft>
+                <a:spcPts val="0"/>
+              </a:spcAft>
+              <a:buClrTx/>
+              <a:buSzTx/>
+              <a:buFontTx/>
+              <a:buNone/>
+              <a:tabLst/>
+              <a:defRPr/>
+            </a:pPr>
+            <a:r>
+              <a:rPr kumimoji="0" lang="en-US" sz="1200" b="0" i="0" u="none" strike="noStrike" kern="1200" cap="none" spc="0" normalizeH="0" baseline="0" noProof="0" dirty="0">
+                <a:ln>
+                  <a:noFill/>
+                </a:ln>
+                <a:solidFill>
+                  <a:srgbClr val="0F2537"/>
+                </a:solidFill>
+                <a:effectLst/>
+                <a:uLnTx/>
+                <a:uFillTx/>
+                <a:latin typeface="Work Sans SemiBold" pitchFamily="34" charset="0"/>
+                <a:ea typeface="Work Sans SemiBold" pitchFamily="34" charset="-122"/>
+                <a:cs typeface="Work Sans SemiBold" pitchFamily="34" charset="-120"/>
+              </a:rPr>
+              <a:t>Noise Reduction:</a:t>
+            </a:r>
+            <a:endParaRPr kumimoji="0" lang="en-US" sz="1200" b="0" i="0" u="none" strike="noStrike" kern="1200" cap="none" spc="0" normalizeH="0" baseline="0" noProof="0" dirty="0">
+              <a:ln>
+                <a:noFill/>
+              </a:ln>
+              <a:solidFill>
+                <a:prstClr val="black"/>
+              </a:solidFill>
+              <a:effectLst/>
+              <a:uLnTx/>
+              <a:uFillTx/>
+              <a:latin typeface="Calibri" panose="020F0502020204030204"/>
+              <a:ea typeface="+mn-ea"/>
+              <a:cs typeface="+mn-cs"/>
+            </a:endParaRPr>
+          </a:p>
+        </p:txBody>
+      </p:sp>
+      <p:sp>
+        <p:nvSpPr>
+          <p:cNvPr id="8" name="Text 4">
+            <a:extLst>
+              <a:ext uri="{FF2B5EF4-FFF2-40B4-BE49-F238E27FC236}">
+                <a16:creationId xmlns:a16="http://schemas.microsoft.com/office/drawing/2014/main" id="{815B04C4-B02A-B468-34CD-D4FB475F6359}"/>
+              </a:ext>
+            </a:extLst>
+          </p:cNvPr>
+          <p:cNvSpPr/>
+          <p:nvPr/>
+        </p:nvSpPr>
+        <p:spPr>
+          <a:xfrm>
+            <a:off x="857250" y="2587687"/>
+            <a:ext cx="7154203" cy="180499"/>
+          </a:xfrm>
+          <a:prstGeom prst="rect">
+            <a:avLst/>
+          </a:prstGeom>
+          <a:noFill/>
+          <a:ln/>
+        </p:spPr>
+        <p:txBody>
+          <a:bodyPr wrap="none" lIns="0" tIns="0" rIns="0" bIns="0" rtlCol="0" anchor="t">
+            <a:spAutoFit/>
+          </a:bodyPr>
+          <a:lstStyle/>
+          <a:p>
+            <a:pPr marL="0" marR="0" lvl="0" indent="0" algn="l" defTabSz="914400" rtl="0" eaLnBrk="1" fontAlgn="auto" latinLnBrk="0" hangingPunct="1">
+              <a:lnSpc>
+                <a:spcPct val="120000"/>
+              </a:lnSpc>
+              <a:spcBef>
+                <a:spcPts val="0"/>
+              </a:spcBef>
+              <a:spcAft>
+                <a:spcPts val="0"/>
+              </a:spcAft>
+              <a:buClrTx/>
+              <a:buSzTx/>
+              <a:buFontTx/>
+              <a:buNone/>
+              <a:tabLst/>
+              <a:defRPr/>
+            </a:pPr>
+            <a:r>
+              <a:rPr kumimoji="0" lang="en-US" sz="1050" b="0" i="0" u="none" strike="noStrike" kern="1200" cap="none" spc="0" normalizeH="0" baseline="0" noProof="0" dirty="0">
+                <a:ln>
+                  <a:noFill/>
+                </a:ln>
+                <a:solidFill>
+                  <a:srgbClr val="2C3E50"/>
+                </a:solidFill>
+                <a:effectLst/>
+                <a:uLnTx/>
+                <a:uFillTx/>
+                <a:latin typeface="Work Sans" pitchFamily="34" charset="0"/>
+                <a:ea typeface="Work Sans" pitchFamily="34" charset="-122"/>
+                <a:cs typeface="Work Sans" pitchFamily="34" charset="-120"/>
+              </a:rPr>
+              <a:t>Implement a "Filtering Layer" to remove non-essential dialogue chatter (filler words) before summarization.</a:t>
+            </a:r>
+            <a:endParaRPr kumimoji="0" lang="en-US" sz="1050" b="0" i="0" u="none" strike="noStrike" kern="1200" cap="none" spc="0" normalizeH="0" baseline="0" noProof="0" dirty="0">
+              <a:ln>
+                <a:noFill/>
+              </a:ln>
+              <a:solidFill>
+                <a:prstClr val="black"/>
+              </a:solidFill>
+              <a:effectLst/>
+              <a:uLnTx/>
+              <a:uFillTx/>
+              <a:latin typeface="Calibri" panose="020F0502020204030204"/>
+              <a:ea typeface="+mn-ea"/>
+              <a:cs typeface="+mn-cs"/>
+            </a:endParaRPr>
+          </a:p>
+        </p:txBody>
+      </p:sp>
+      <p:sp>
+        <p:nvSpPr>
+          <p:cNvPr id="9" name="Text 5">
+            <a:extLst>
+              <a:ext uri="{FF2B5EF4-FFF2-40B4-BE49-F238E27FC236}">
+                <a16:creationId xmlns:a16="http://schemas.microsoft.com/office/drawing/2014/main" id="{BA5CD5FF-4BE8-B793-B1BA-11FCBA1D321E}"/>
+              </a:ext>
+            </a:extLst>
+          </p:cNvPr>
+          <p:cNvSpPr/>
+          <p:nvPr/>
+        </p:nvSpPr>
+        <p:spPr>
+          <a:xfrm>
+            <a:off x="642936" y="3007537"/>
+            <a:ext cx="7858125" cy="184666"/>
+          </a:xfrm>
+          <a:prstGeom prst="rect">
+            <a:avLst/>
+          </a:prstGeom>
+          <a:noFill/>
+          <a:ln/>
+        </p:spPr>
+        <p:txBody>
+          <a:bodyPr wrap="square" lIns="0" tIns="0" rIns="0" bIns="0" rtlCol="0" anchor="t">
+            <a:spAutoFit/>
+          </a:bodyPr>
+          <a:lstStyle/>
+          <a:p>
+            <a:pPr marL="0" marR="0" lvl="0" indent="0" algn="l" defTabSz="914400" rtl="0" eaLnBrk="1" fontAlgn="auto" latinLnBrk="0" hangingPunct="1">
+              <a:lnSpc>
+                <a:spcPct val="100000"/>
+              </a:lnSpc>
+              <a:spcBef>
+                <a:spcPts val="0"/>
+              </a:spcBef>
+              <a:spcAft>
+                <a:spcPts val="0"/>
+              </a:spcAft>
+              <a:buClrTx/>
+              <a:buSzTx/>
+              <a:buFontTx/>
+              <a:buNone/>
+              <a:tabLst/>
+              <a:defRPr/>
+            </a:pPr>
+            <a:r>
+              <a:rPr kumimoji="0" lang="en-US" sz="1200" b="0" i="0" u="none" strike="noStrike" kern="1200" cap="none" spc="0" normalizeH="0" baseline="0" noProof="0" dirty="0">
+                <a:ln>
+                  <a:noFill/>
+                </a:ln>
+                <a:solidFill>
+                  <a:srgbClr val="0F2537"/>
+                </a:solidFill>
+                <a:effectLst/>
+                <a:uLnTx/>
+                <a:uFillTx/>
+                <a:latin typeface="Work Sans SemiBold" pitchFamily="34" charset="0"/>
+                <a:ea typeface="Work Sans SemiBold" pitchFamily="34" charset="-122"/>
+                <a:cs typeface="Work Sans SemiBold" pitchFamily="34" charset="-120"/>
+              </a:rPr>
+              <a:t>Adaptive Retrieval:</a:t>
+            </a:r>
+            <a:endParaRPr kumimoji="0" lang="en-US" sz="1200" b="0" i="0" u="none" strike="noStrike" kern="1200" cap="none" spc="0" normalizeH="0" baseline="0" noProof="0" dirty="0">
+              <a:ln>
+                <a:noFill/>
+              </a:ln>
+              <a:solidFill>
+                <a:prstClr val="black"/>
+              </a:solidFill>
+              <a:effectLst/>
+              <a:uLnTx/>
+              <a:uFillTx/>
+              <a:latin typeface="Calibri" panose="020F0502020204030204"/>
+              <a:ea typeface="+mn-ea"/>
+              <a:cs typeface="+mn-cs"/>
+            </a:endParaRPr>
+          </a:p>
+        </p:txBody>
+      </p:sp>
+      <p:sp>
+        <p:nvSpPr>
+          <p:cNvPr id="10" name="Text 6">
+            <a:extLst>
+              <a:ext uri="{FF2B5EF4-FFF2-40B4-BE49-F238E27FC236}">
+                <a16:creationId xmlns:a16="http://schemas.microsoft.com/office/drawing/2014/main" id="{4295C52B-F939-B396-821D-127EA70BB190}"/>
+              </a:ext>
+            </a:extLst>
+          </p:cNvPr>
+          <p:cNvSpPr/>
+          <p:nvPr/>
+        </p:nvSpPr>
+        <p:spPr>
+          <a:xfrm>
+            <a:off x="857248" y="3275427"/>
+            <a:ext cx="6521016" cy="180499"/>
+          </a:xfrm>
+          <a:prstGeom prst="rect">
+            <a:avLst/>
+          </a:prstGeom>
+          <a:noFill/>
+          <a:ln/>
+        </p:spPr>
+        <p:txBody>
+          <a:bodyPr wrap="none" lIns="0" tIns="0" rIns="0" bIns="0" rtlCol="0" anchor="t">
+            <a:spAutoFit/>
+          </a:bodyPr>
+          <a:lstStyle/>
+          <a:p>
+            <a:pPr marL="0" marR="0" lvl="0" indent="0" algn="l" defTabSz="914400" rtl="0" eaLnBrk="1" fontAlgn="auto" latinLnBrk="0" hangingPunct="1">
+              <a:lnSpc>
+                <a:spcPct val="120000"/>
+              </a:lnSpc>
+              <a:spcBef>
+                <a:spcPts val="0"/>
+              </a:spcBef>
+              <a:spcAft>
+                <a:spcPts val="0"/>
+              </a:spcAft>
+              <a:buClrTx/>
+              <a:buSzTx/>
+              <a:buFontTx/>
+              <a:buNone/>
+              <a:tabLst/>
+              <a:defRPr/>
+            </a:pPr>
+            <a:r>
+              <a:rPr kumimoji="0" lang="en-US" sz="1050" b="0" i="0" u="none" strike="noStrike" kern="1200" cap="none" spc="0" normalizeH="0" baseline="0" noProof="0" dirty="0">
+                <a:ln>
+                  <a:noFill/>
+                </a:ln>
+                <a:solidFill>
+                  <a:srgbClr val="2C3E50"/>
+                </a:solidFill>
+                <a:effectLst/>
+                <a:uLnTx/>
+                <a:uFillTx/>
+                <a:latin typeface="Work Sans" pitchFamily="34" charset="0"/>
+                <a:ea typeface="Work Sans" pitchFamily="34" charset="-122"/>
+                <a:cs typeface="Work Sans" pitchFamily="34" charset="-120"/>
+              </a:rPr>
+              <a:t>Ensure the model knows *when* to fetch external data and when to rely on the dialogue context.</a:t>
+            </a:r>
+            <a:endParaRPr kumimoji="0" lang="en-US" sz="1050" b="0" i="0" u="none" strike="noStrike" kern="1200" cap="none" spc="0" normalizeH="0" baseline="0" noProof="0" dirty="0">
+              <a:ln>
+                <a:noFill/>
+              </a:ln>
+              <a:solidFill>
+                <a:prstClr val="black"/>
+              </a:solidFill>
+              <a:effectLst/>
+              <a:uLnTx/>
+              <a:uFillTx/>
+              <a:latin typeface="Calibri" panose="020F0502020204030204"/>
+              <a:ea typeface="+mn-ea"/>
+              <a:cs typeface="+mn-cs"/>
+            </a:endParaRPr>
+          </a:p>
+        </p:txBody>
+      </p:sp>
+      <p:sp>
+        <p:nvSpPr>
+          <p:cNvPr id="2" name="Text 5">
+            <a:extLst>
+              <a:ext uri="{FF2B5EF4-FFF2-40B4-BE49-F238E27FC236}">
+                <a16:creationId xmlns:a16="http://schemas.microsoft.com/office/drawing/2014/main" id="{F6BDE8F3-3F61-3A3E-1F01-10E46EB52561}"/>
+              </a:ext>
+            </a:extLst>
+          </p:cNvPr>
+          <p:cNvSpPr/>
+          <p:nvPr/>
+        </p:nvSpPr>
+        <p:spPr>
+          <a:xfrm>
+            <a:off x="642935" y="3649385"/>
+            <a:ext cx="7858125" cy="184666"/>
+          </a:xfrm>
+          <a:prstGeom prst="rect">
+            <a:avLst/>
+          </a:prstGeom>
+          <a:noFill/>
+          <a:ln/>
+        </p:spPr>
+        <p:txBody>
+          <a:bodyPr wrap="square" lIns="0" tIns="0" rIns="0" bIns="0" rtlCol="0" anchor="t">
+            <a:spAutoFit/>
+          </a:bodyPr>
+          <a:lstStyle/>
+          <a:p>
+            <a:pPr marL="0" marR="0" lvl="0" indent="0" algn="l" defTabSz="914400" rtl="0" eaLnBrk="1" fontAlgn="auto" latinLnBrk="0" hangingPunct="1">
+              <a:lnSpc>
+                <a:spcPct val="100000"/>
+              </a:lnSpc>
+              <a:spcBef>
+                <a:spcPts val="0"/>
+              </a:spcBef>
+              <a:spcAft>
+                <a:spcPts val="0"/>
+              </a:spcAft>
+              <a:buClrTx/>
+              <a:buSzTx/>
+              <a:buFontTx/>
+              <a:buNone/>
+              <a:tabLst/>
+              <a:defRPr/>
+            </a:pPr>
+            <a:r>
+              <a:rPr kumimoji="0" lang="en-US" sz="1200" b="0" i="0" u="none" strike="noStrike" kern="1200" cap="none" spc="0" normalizeH="0" baseline="0" noProof="0" dirty="0">
+                <a:ln>
+                  <a:noFill/>
+                </a:ln>
+                <a:solidFill>
+                  <a:srgbClr val="0F2537"/>
+                </a:solidFill>
+                <a:effectLst/>
+                <a:uLnTx/>
+                <a:uFillTx/>
+                <a:latin typeface="Work Sans SemiBold" pitchFamily="34" charset="0"/>
+                <a:ea typeface="Work Sans SemiBold" pitchFamily="34" charset="-122"/>
+                <a:cs typeface="Work Sans SemiBold" pitchFamily="34" charset="-120"/>
+              </a:rPr>
+              <a:t>Benchmarking:</a:t>
+            </a:r>
+            <a:endParaRPr kumimoji="0" lang="en-US" sz="1200" b="0" i="0" u="none" strike="noStrike" kern="1200" cap="none" spc="0" normalizeH="0" baseline="0" noProof="0" dirty="0">
+              <a:ln>
+                <a:noFill/>
+              </a:ln>
+              <a:solidFill>
+                <a:prstClr val="black"/>
+              </a:solidFill>
+              <a:effectLst/>
+              <a:uLnTx/>
+              <a:uFillTx/>
+              <a:latin typeface="Calibri" panose="020F0502020204030204"/>
+              <a:ea typeface="+mn-ea"/>
+              <a:cs typeface="+mn-cs"/>
+            </a:endParaRPr>
+          </a:p>
+        </p:txBody>
+      </p:sp>
+      <p:sp>
+        <p:nvSpPr>
+          <p:cNvPr id="3" name="Text 6">
+            <a:extLst>
+              <a:ext uri="{FF2B5EF4-FFF2-40B4-BE49-F238E27FC236}">
+                <a16:creationId xmlns:a16="http://schemas.microsoft.com/office/drawing/2014/main" id="{ECE1D722-2D30-EFC5-BE84-E22E919630FA}"/>
+              </a:ext>
+            </a:extLst>
+          </p:cNvPr>
+          <p:cNvSpPr/>
+          <p:nvPr/>
+        </p:nvSpPr>
+        <p:spPr>
+          <a:xfrm>
+            <a:off x="857247" y="3985439"/>
+            <a:ext cx="5442195" cy="180499"/>
+          </a:xfrm>
+          <a:prstGeom prst="rect">
+            <a:avLst/>
+          </a:prstGeom>
+          <a:noFill/>
+          <a:ln/>
+        </p:spPr>
+        <p:txBody>
+          <a:bodyPr wrap="none" lIns="0" tIns="0" rIns="0" bIns="0" rtlCol="0" anchor="t">
+            <a:spAutoFit/>
+          </a:bodyPr>
+          <a:lstStyle/>
+          <a:p>
+            <a:pPr marL="0" marR="0" lvl="0" indent="0" algn="l" defTabSz="914400" rtl="0" eaLnBrk="1" fontAlgn="auto" latinLnBrk="0" hangingPunct="1">
+              <a:lnSpc>
+                <a:spcPct val="120000"/>
+              </a:lnSpc>
+              <a:spcBef>
+                <a:spcPts val="0"/>
+              </a:spcBef>
+              <a:spcAft>
+                <a:spcPts val="0"/>
+              </a:spcAft>
+              <a:buClrTx/>
+              <a:buSzTx/>
+              <a:buFontTx/>
+              <a:buNone/>
+              <a:tabLst/>
+              <a:defRPr/>
+            </a:pPr>
+            <a:r>
+              <a:rPr kumimoji="0" lang="en-US" sz="1050" b="0" i="0" u="none" strike="noStrike" kern="1200" cap="none" spc="0" normalizeH="0" baseline="0" noProof="0" dirty="0">
+                <a:ln>
+                  <a:noFill/>
+                </a:ln>
+                <a:solidFill>
+                  <a:srgbClr val="2C3E50"/>
+                </a:solidFill>
+                <a:effectLst/>
+                <a:uLnTx/>
+                <a:uFillTx/>
+                <a:latin typeface="Work Sans" pitchFamily="34" charset="0"/>
+                <a:ea typeface="Work Sans" pitchFamily="34" charset="-122"/>
+                <a:cs typeface="Work Sans" pitchFamily="34" charset="-120"/>
+              </a:rPr>
+              <a:t>Evaluate performance using both linguistic (ROUGE) and factual (</a:t>
+            </a:r>
+            <a:r>
+              <a:rPr kumimoji="0" lang="en-US" sz="1050" b="0" i="0" u="none" strike="noStrike" kern="1200" cap="none" spc="0" normalizeH="0" baseline="0" noProof="0" dirty="0" err="1">
+                <a:ln>
+                  <a:noFill/>
+                </a:ln>
+                <a:solidFill>
+                  <a:srgbClr val="2C3E50"/>
+                </a:solidFill>
+                <a:effectLst/>
+                <a:uLnTx/>
+                <a:uFillTx/>
+                <a:latin typeface="Work Sans" pitchFamily="34" charset="0"/>
+                <a:ea typeface="Work Sans" pitchFamily="34" charset="-122"/>
+                <a:cs typeface="Work Sans" pitchFamily="34" charset="-120"/>
+              </a:rPr>
+              <a:t>FactCC</a:t>
+            </a:r>
+            <a:r>
+              <a:rPr kumimoji="0" lang="en-US" sz="1050" b="0" i="0" u="none" strike="noStrike" kern="1200" cap="none" spc="0" normalizeH="0" baseline="0" noProof="0" dirty="0">
+                <a:ln>
+                  <a:noFill/>
+                </a:ln>
+                <a:solidFill>
+                  <a:srgbClr val="2C3E50"/>
+                </a:solidFill>
+                <a:effectLst/>
+                <a:uLnTx/>
+                <a:uFillTx/>
+                <a:latin typeface="Work Sans" pitchFamily="34" charset="0"/>
+                <a:ea typeface="Work Sans" pitchFamily="34" charset="-122"/>
+                <a:cs typeface="Work Sans" pitchFamily="34" charset="-120"/>
+              </a:rPr>
+              <a:t>) metrics.</a:t>
+            </a:r>
+            <a:endParaRPr kumimoji="0" lang="en-US" sz="1050" b="0" i="0" u="none" strike="noStrike" kern="1200" cap="none" spc="0" normalizeH="0" baseline="0" noProof="0" dirty="0">
+              <a:ln>
+                <a:noFill/>
+              </a:ln>
+              <a:solidFill>
+                <a:prstClr val="black"/>
+              </a:solidFill>
+              <a:effectLst/>
+              <a:uLnTx/>
+              <a:uFillTx/>
+              <a:latin typeface="Calibri" panose="020F0502020204030204"/>
+              <a:ea typeface="+mn-ea"/>
+              <a:cs typeface="+mn-cs"/>
+            </a:endParaRPr>
+          </a:p>
+        </p:txBody>
+      </p:sp>
+    </p:spTree>
+    <p:extLst>
+      <p:ext uri="{BB962C8B-B14F-4D97-AF65-F5344CB8AC3E}">
+        <p14:creationId xmlns:p14="http://schemas.microsoft.com/office/powerpoint/2010/main" val="3878784847"/>
+      </p:ext>
+    </p:extLst>
+  </p:cSld>
+  <p:clrMapOvr>
+    <a:masterClrMapping/>
+  </p:clrMapOvr>
+</p:sld>
+</file>
+
+<file path=ppt/slides/slide7.xml><?xml version="1.0" encoding="utf-8"?>
 <p:sld xmlns:a="http://schemas.openxmlformats.org/drawingml/2006/main" xmlns:r="http://schemas.openxmlformats.org/officeDocument/2006/relationships" xmlns:p="http://schemas.openxmlformats.org/presentationml/2006/main">
   <p:cSld name="Slide 4">
     <p:spTree>
@@ -2765,30 +6028,6 @@
           <a:chExt cx="0" cy="0"/>
         </a:xfrm>
       </p:grpSpPr>
-      <p:pic>
-        <p:nvPicPr>
-          <p:cNvPr id="3" name="Image 0" descr="preencoded.png">    </p:cNvPr>
-          <p:cNvPicPr>
-            <a:picLocks noChangeAspect="1"/>
-          </p:cNvPicPr>
-          <p:nvPr/>
-        </p:nvPicPr>
-        <p:blipFill>
-          <a:blip r:embed="rId1"/>
-          <a:stretch>
-            <a:fillRect/>
-          </a:stretch>
-        </p:blipFill>
-        <p:spPr>
-          <a:xfrm>
-            <a:off x="0" y="0"/>
-            <a:ext cx="9144000" cy="5143500"/>
-          </a:xfrm>
-          <a:prstGeom prst="rect">
-            <a:avLst/>
-          </a:prstGeom>
-        </p:spPr>
-      </p:pic>
       <p:sp>
         <p:nvSpPr>
           <p:cNvPr id="4" name="Text 0"/>
@@ -2798,7 +6037,7 @@
         <p:spPr>
           <a:xfrm>
             <a:off x="571500" y="428625"/>
-            <a:ext cx="8001000" cy="262533"/>
+            <a:ext cx="8001000" cy="246221"/>
           </a:xfrm>
           <a:prstGeom prst="rect">
             <a:avLst/>
@@ -2812,7 +6051,7 @@
           </a:bodyPr>
           <a:lstStyle/>
           <a:p>
-            <a:pPr algn="l" indent="0" marL="0">
+            <a:pPr marL="0" indent="0" algn="l">
               <a:buNone/>
             </a:pPr>
             <a:r>
@@ -2824,7 +6063,7 @@
                 <a:ea typeface="Playfair Display Bold" pitchFamily="34" charset="-122"/>
                 <a:cs typeface="Playfair Display Bold" pitchFamily="34" charset="-120"/>
               </a:rPr>
-              <a:t>Q2 Achievements: Methodology Implementation</a:t>
+              <a:t>Proposed Methodology (The Technical Core)</a:t>
             </a:r>
             <a:endParaRPr lang="en-US" sz="1600" dirty="0"/>
           </a:p>
@@ -2839,7 +6078,7 @@
         <p:spPr>
           <a:xfrm>
             <a:off x="571500" y="1119783"/>
-            <a:ext cx="3786188" cy="182166"/>
+            <a:ext cx="3786188" cy="169277"/>
           </a:xfrm>
           <a:prstGeom prst="rect">
             <a:avLst/>
@@ -2853,7 +6092,7 @@
           </a:bodyPr>
           <a:lstStyle/>
           <a:p>
-            <a:pPr algn="l" indent="0" marL="0">
+            <a:pPr marL="0" indent="0" algn="l">
               <a:buNone/>
             </a:pPr>
             <a:r>
@@ -2865,7 +6104,7 @@
                 <a:ea typeface="Work Sans SemiBold" pitchFamily="34" charset="-122"/>
                 <a:cs typeface="Work Sans SemiBold" pitchFamily="34" charset="-120"/>
               </a:rPr>
-              <a:t>Input Processing</a:t>
+              <a:t>Input Processing:</a:t>
             </a:r>
             <a:endParaRPr lang="en-US" sz="1100" dirty="0"/>
           </a:p>
@@ -2880,7 +6119,7 @@
         <p:spPr>
           <a:xfrm>
             <a:off x="785813" y="1409105"/>
-            <a:ext cx="3309454" cy="205718"/>
+            <a:ext cx="3012043" cy="359201"/>
           </a:xfrm>
           <a:prstGeom prst="rect">
             <a:avLst/>
@@ -2894,7 +6133,7 @@
           </a:bodyPr>
           <a:lstStyle/>
           <a:p>
-            <a:pPr algn="l" indent="0" marL="0">
+            <a:pPr marL="0" indent="0" algn="l">
               <a:lnSpc>
                 <a:spcPct val="128000"/>
               </a:lnSpc>
@@ -2909,36 +6148,11 @@
                 <a:ea typeface="Work Sans" pitchFamily="34" charset="-122"/>
                 <a:cs typeface="Work Sans" pitchFamily="34" charset="-120"/>
               </a:rPr>
-              <a:t>Established tokenization pipelines for multi-turn dialogues.</a:t>
-            </a:r>
-            <a:endParaRPr lang="en-US" sz="950" dirty="0"/>
-          </a:p>
-        </p:txBody>
-      </p:sp>
-      <p:sp>
-        <p:nvSpPr>
-          <p:cNvPr id="7" name="Text 3"/>
-          <p:cNvSpPr/>
-          <p:nvPr/>
-        </p:nvSpPr>
-        <p:spPr>
-          <a:xfrm>
-            <a:off x="785813" y="1700547"/>
-            <a:ext cx="3238128" cy="205718"/>
-          </a:xfrm>
-          <a:prstGeom prst="rect">
-            <a:avLst/>
-          </a:prstGeom>
-          <a:noFill/>
-          <a:ln/>
-        </p:spPr>
-        <p:txBody>
-          <a:bodyPr wrap="none" lIns="0" tIns="0" rIns="0" bIns="0" rtlCol="0" anchor="t">
-            <a:spAutoFit/>
-          </a:bodyPr>
-          <a:lstStyle/>
-          <a:p>
-            <a:pPr algn="l" indent="0" marL="0">
+              <a:t>Tokenization of multi-turn dialogues and speaker </a:t>
+            </a:r>
+          </a:p>
+          <a:p>
+            <a:pPr marL="0" indent="0" algn="l">
               <a:lnSpc>
                 <a:spcPct val="128000"/>
               </a:lnSpc>
@@ -2953,7 +6167,7 @@
                 <a:ea typeface="Work Sans" pitchFamily="34" charset="-122"/>
                 <a:cs typeface="Work Sans" pitchFamily="34" charset="-120"/>
               </a:rPr>
-              <a:t>Automated speaker identification and context windowing.</a:t>
+              <a:t>identification.</a:t>
             </a:r>
             <a:endParaRPr lang="en-US" sz="950" dirty="0"/>
           </a:p>
@@ -2968,7 +6182,7 @@
         <p:spPr>
           <a:xfrm>
             <a:off x="571500" y="2049140"/>
-            <a:ext cx="3786188" cy="182166"/>
+            <a:ext cx="3786188" cy="169277"/>
           </a:xfrm>
           <a:prstGeom prst="rect">
             <a:avLst/>
@@ -2982,7 +6196,7 @@
           </a:bodyPr>
           <a:lstStyle/>
           <a:p>
-            <a:pPr algn="l" indent="0" marL="0">
+            <a:pPr marL="0" indent="0" algn="l">
               <a:buNone/>
             </a:pPr>
             <a:r>
@@ -2994,7 +6208,7 @@
                 <a:ea typeface="Work Sans SemiBold" pitchFamily="34" charset="-122"/>
                 <a:cs typeface="Work Sans SemiBold" pitchFamily="34" charset="-120"/>
               </a:rPr>
-              <a:t>Augmentation Strategy</a:t>
+              <a:t>Augmentation:</a:t>
             </a:r>
             <a:endParaRPr lang="en-US" sz="1100" dirty="0"/>
           </a:p>
@@ -3009,7 +6223,7 @@
         <p:spPr>
           <a:xfrm>
             <a:off x="785813" y="2338462"/>
-            <a:ext cx="3571875" cy="411435"/>
+            <a:ext cx="3571875" cy="172098"/>
           </a:xfrm>
           <a:prstGeom prst="rect">
             <a:avLst/>
@@ -3023,7 +6237,7 @@
           </a:bodyPr>
           <a:lstStyle/>
           <a:p>
-            <a:pPr algn="l" indent="0" marL="0">
+            <a:pPr marL="0" indent="0" algn="l">
               <a:lnSpc>
                 <a:spcPct val="128000"/>
               </a:lnSpc>
@@ -3038,7 +6252,7 @@
                 <a:ea typeface="Work Sans" pitchFamily="34" charset="-122"/>
                 <a:cs typeface="Work Sans" pitchFamily="34" charset="-120"/>
               </a:rPr>
-              <a:t>Developed mechanisms to inject retrieved "Knowledge Triples" into the prompt.</a:t>
+              <a:t>Injecting the retrieved "Knowledge Triples" into the prompt.</a:t>
             </a:r>
             <a:endParaRPr lang="en-US" sz="950" dirty="0"/>
           </a:p>
@@ -3046,14 +6260,55 @@
       </p:sp>
       <p:sp>
         <p:nvSpPr>
-          <p:cNvPr id="10" name="Text 6"/>
-          <p:cNvSpPr/>
-          <p:nvPr/>
-        </p:nvSpPr>
-        <p:spPr>
-          <a:xfrm>
-            <a:off x="785813" y="2835622"/>
-            <a:ext cx="2851779" cy="205718"/>
+          <p:cNvPr id="11" name="Text 7"/>
+          <p:cNvSpPr/>
+          <p:nvPr/>
+        </p:nvSpPr>
+        <p:spPr>
+          <a:xfrm>
+            <a:off x="4786313" y="1119783"/>
+            <a:ext cx="3786188" cy="169277"/>
+          </a:xfrm>
+          <a:prstGeom prst="rect">
+            <a:avLst/>
+          </a:prstGeom>
+          <a:noFill/>
+          <a:ln/>
+        </p:spPr>
+        <p:txBody>
+          <a:bodyPr wrap="square" lIns="0" tIns="0" rIns="0" bIns="0" rtlCol="0" anchor="t">
+            <a:spAutoFit/>
+          </a:bodyPr>
+          <a:lstStyle/>
+          <a:p>
+            <a:pPr marL="0" indent="0" algn="l">
+              <a:buNone/>
+            </a:pPr>
+            <a:r>
+              <a:rPr lang="en-US" sz="1100" dirty="0">
+                <a:solidFill>
+                  <a:srgbClr val="D96C06"/>
+                </a:solidFill>
+                <a:latin typeface="Work Sans SemiBold" pitchFamily="34" charset="0"/>
+                <a:ea typeface="Work Sans SemiBold" pitchFamily="34" charset="-122"/>
+                <a:cs typeface="Work Sans SemiBold" pitchFamily="34" charset="-120"/>
+              </a:rPr>
+              <a:t>Retrieval Engine:</a:t>
+            </a:r>
+            <a:endParaRPr lang="en-US" sz="1100" dirty="0"/>
+          </a:p>
+        </p:txBody>
+      </p:sp>
+      <p:sp>
+        <p:nvSpPr>
+          <p:cNvPr id="12" name="Text 8"/>
+          <p:cNvSpPr/>
+          <p:nvPr/>
+        </p:nvSpPr>
+        <p:spPr>
+          <a:xfrm>
+            <a:off x="5000625" y="1409105"/>
+            <a:ext cx="2545569" cy="172098"/>
           </a:xfrm>
           <a:prstGeom prst="rect">
             <a:avLst/>
@@ -3067,7 +6322,7 @@
           </a:bodyPr>
           <a:lstStyle/>
           <a:p>
-            <a:pPr algn="l" indent="0" marL="0">
+            <a:pPr marL="0" indent="0" algn="l">
               <a:lnSpc>
                 <a:spcPct val="128000"/>
               </a:lnSpc>
@@ -3082,7 +6337,7 @@
                 <a:ea typeface="Work Sans" pitchFamily="34" charset="-122"/>
                 <a:cs typeface="Work Sans" pitchFamily="34" charset="-120"/>
               </a:rPr>
-              <a:t>Optimized prompt templates for factual grounding.</a:t>
+              <a:t>Query formulation from dialogue snippets.</a:t>
             </a:r>
             <a:endParaRPr lang="en-US" sz="950" dirty="0"/>
           </a:p>
@@ -3090,14 +6345,138 @@
       </p:sp>
       <p:sp>
         <p:nvSpPr>
-          <p:cNvPr id="11" name="Text 7"/>
-          <p:cNvSpPr/>
-          <p:nvPr/>
-        </p:nvSpPr>
-        <p:spPr>
-          <a:xfrm>
-            <a:off x="4786313" y="1119783"/>
-            <a:ext cx="3786188" cy="182166"/>
+          <p:cNvPr id="13" name="Text 9"/>
+          <p:cNvSpPr/>
+          <p:nvPr/>
+        </p:nvSpPr>
+        <p:spPr>
+          <a:xfrm>
+            <a:off x="5000625" y="1700547"/>
+            <a:ext cx="3387146" cy="359201"/>
+          </a:xfrm>
+          <a:prstGeom prst="rect">
+            <a:avLst/>
+          </a:prstGeom>
+          <a:noFill/>
+          <a:ln/>
+        </p:spPr>
+        <p:txBody>
+          <a:bodyPr wrap="none" lIns="0" tIns="0" rIns="0" bIns="0" rtlCol="0" anchor="t">
+            <a:spAutoFit/>
+          </a:bodyPr>
+          <a:lstStyle/>
+          <a:p>
+            <a:pPr marL="0" indent="0" algn="l">
+              <a:lnSpc>
+                <a:spcPct val="128000"/>
+              </a:lnSpc>
+              <a:buNone/>
+            </a:pPr>
+            <a:r>
+              <a:rPr lang="en-US" sz="950" dirty="0">
+                <a:solidFill>
+                  <a:srgbClr val="2C3E50"/>
+                </a:solidFill>
+                <a:latin typeface="Work Sans" pitchFamily="34" charset="0"/>
+                <a:ea typeface="Work Sans" pitchFamily="34" charset="-122"/>
+                <a:cs typeface="Work Sans" pitchFamily="34" charset="-120"/>
+              </a:rPr>
+              <a:t>Searching a </a:t>
+            </a:r>
+            <a:r>
+              <a:rPr lang="en-US" sz="950" b="1" dirty="0">
+                <a:solidFill>
+                  <a:srgbClr val="2C3E50"/>
+                </a:solidFill>
+                <a:latin typeface="Work Sans" pitchFamily="34" charset="0"/>
+                <a:ea typeface="Work Sans" pitchFamily="34" charset="-122"/>
+                <a:cs typeface="Work Sans" pitchFamily="34" charset="-120"/>
+              </a:rPr>
+              <a:t>Vector Database (</a:t>
+            </a:r>
+            <a:r>
+              <a:rPr lang="en-US" sz="950" b="1" dirty="0" err="1">
+                <a:solidFill>
+                  <a:srgbClr val="2C3E50"/>
+                </a:solidFill>
+                <a:latin typeface="Work Sans" pitchFamily="34" charset="0"/>
+                <a:ea typeface="Work Sans" pitchFamily="34" charset="-122"/>
+                <a:cs typeface="Work Sans" pitchFamily="34" charset="-120"/>
+              </a:rPr>
+              <a:t>ChromaDB</a:t>
+            </a:r>
+            <a:r>
+              <a:rPr lang="en-US" sz="950" b="1" dirty="0">
+                <a:solidFill>
+                  <a:srgbClr val="2C3E50"/>
+                </a:solidFill>
+                <a:latin typeface="Work Sans" pitchFamily="34" charset="0"/>
+                <a:ea typeface="Work Sans" pitchFamily="34" charset="-122"/>
+                <a:cs typeface="Work Sans" pitchFamily="34" charset="-120"/>
+              </a:rPr>
+              <a:t>/FAISS)</a:t>
+            </a:r>
+            <a:r>
+              <a:rPr lang="en-US" sz="950" dirty="0">
+                <a:solidFill>
+                  <a:srgbClr val="2C3E50"/>
+                </a:solidFill>
+                <a:latin typeface="Work Sans" pitchFamily="34" charset="0"/>
+                <a:ea typeface="Work Sans" pitchFamily="34" charset="-122"/>
+                <a:cs typeface="Work Sans" pitchFamily="34" charset="-120"/>
+              </a:rPr>
+              <a:t> using </a:t>
+            </a:r>
+          </a:p>
+          <a:p>
+            <a:pPr marL="0" indent="0" algn="l">
+              <a:lnSpc>
+                <a:spcPct val="128000"/>
+              </a:lnSpc>
+              <a:buNone/>
+            </a:pPr>
+            <a:r>
+              <a:rPr lang="en-US" sz="950" b="1" dirty="0">
+                <a:solidFill>
+                  <a:srgbClr val="2C3E50"/>
+                </a:solidFill>
+                <a:latin typeface="Work Sans" pitchFamily="34" charset="0"/>
+                <a:ea typeface="Work Sans" pitchFamily="34" charset="-122"/>
+                <a:cs typeface="Work Sans" pitchFamily="34" charset="-120"/>
+              </a:rPr>
+              <a:t>Dense Passage Retrieval (DPR)</a:t>
+            </a:r>
+            <a:r>
+              <a:rPr lang="en-US" sz="950" dirty="0">
+                <a:solidFill>
+                  <a:srgbClr val="2C3E50"/>
+                </a:solidFill>
+                <a:latin typeface="Work Sans" pitchFamily="34" charset="0"/>
+                <a:ea typeface="Work Sans" pitchFamily="34" charset="-122"/>
+                <a:cs typeface="Work Sans" pitchFamily="34" charset="-120"/>
+              </a:rPr>
+              <a:t>.</a:t>
+            </a:r>
+            <a:endParaRPr lang="en-US" sz="950" dirty="0"/>
+          </a:p>
+        </p:txBody>
+      </p:sp>
+      <p:sp>
+        <p:nvSpPr>
+          <p:cNvPr id="2" name="Text 7">
+            <a:extLst>
+              <a:ext uri="{FF2B5EF4-FFF2-40B4-BE49-F238E27FC236}">
+                <a16:creationId xmlns:a16="http://schemas.microsoft.com/office/drawing/2014/main" id="{9E103946-D193-FFBF-EFAA-6279BCDAD26D}"/>
+              </a:ext>
+            </a:extLst>
+          </p:cNvPr>
+          <p:cNvSpPr/>
+          <p:nvPr/>
+        </p:nvSpPr>
+        <p:spPr>
+          <a:xfrm>
+            <a:off x="4786312" y="2216256"/>
+            <a:ext cx="3786188" cy="169277"/>
           </a:xfrm>
           <a:prstGeom prst="rect">
             <a:avLst/>
@@ -3111,7 +6490,7 @@
           </a:bodyPr>
           <a:lstStyle/>
           <a:p>
-            <a:pPr algn="l" indent="0" marL="0">
+            <a:pPr marL="0" indent="0" algn="l">
               <a:buNone/>
             </a:pPr>
             <a:r>
@@ -3123,7 +6502,7 @@
                 <a:ea typeface="Work Sans SemiBold" pitchFamily="34" charset="-122"/>
                 <a:cs typeface="Work Sans SemiBold" pitchFamily="34" charset="-120"/>
               </a:rPr>
-              <a:t>Retrieval Engine Setup</a:t>
+              <a:t>Generation:</a:t>
             </a:r>
             <a:endParaRPr lang="en-US" sz="1100" dirty="0"/>
           </a:p>
@@ -3131,28 +6510,34 @@
       </p:sp>
       <p:sp>
         <p:nvSpPr>
-          <p:cNvPr id="12" name="Text 8"/>
-          <p:cNvSpPr/>
-          <p:nvPr/>
-        </p:nvSpPr>
-        <p:spPr>
-          <a:xfrm>
-            <a:off x="5000625" y="1409105"/>
-            <a:ext cx="2673158" cy="205718"/>
-          </a:xfrm>
-          <a:prstGeom prst="rect">
-            <a:avLst/>
-          </a:prstGeom>
-          <a:noFill/>
-          <a:ln/>
-        </p:spPr>
-        <p:txBody>
-          <a:bodyPr wrap="none" lIns="0" tIns="0" rIns="0" bIns="0" rtlCol="0" anchor="t">
-            <a:spAutoFit/>
-          </a:bodyPr>
-          <a:lstStyle/>
-          <a:p>
-            <a:pPr algn="l" indent="0" marL="0">
+          <p:cNvPr id="16" name="Text 5">
+            <a:extLst>
+              <a:ext uri="{FF2B5EF4-FFF2-40B4-BE49-F238E27FC236}">
+                <a16:creationId xmlns:a16="http://schemas.microsoft.com/office/drawing/2014/main" id="{67583BBA-90BA-0B3E-7B79-243ED07BE32D}"/>
+              </a:ext>
+            </a:extLst>
+          </p:cNvPr>
+          <p:cNvSpPr/>
+          <p:nvPr/>
+        </p:nvSpPr>
+        <p:spPr>
+          <a:xfrm>
+            <a:off x="5000626" y="2545735"/>
+            <a:ext cx="3571875" cy="546303"/>
+          </a:xfrm>
+          <a:prstGeom prst="rect">
+            <a:avLst/>
+          </a:prstGeom>
+          <a:noFill/>
+          <a:ln/>
+        </p:spPr>
+        <p:txBody>
+          <a:bodyPr wrap="square" lIns="0" tIns="0" rIns="0" bIns="0" rtlCol="0" anchor="t">
+            <a:spAutoFit/>
+          </a:bodyPr>
+          <a:lstStyle/>
+          <a:p>
+            <a:pPr marL="0" indent="0" algn="l">
               <a:lnSpc>
                 <a:spcPct val="128000"/>
               </a:lnSpc>
@@ -3167,43 +6552,10 @@
                 <a:ea typeface="Work Sans" pitchFamily="34" charset="-122"/>
                 <a:cs typeface="Work Sans" pitchFamily="34" charset="-120"/>
               </a:rPr>
-              <a:t>Formulated query logic from dialogue snippets.</a:t>
-            </a:r>
-            <a:endParaRPr lang="en-US" sz="950" dirty="0"/>
-          </a:p>
-        </p:txBody>
-      </p:sp>
-      <p:sp>
-        <p:nvSpPr>
-          <p:cNvPr id="13" name="Text 9"/>
-          <p:cNvSpPr/>
-          <p:nvPr/>
-        </p:nvSpPr>
-        <p:spPr>
-          <a:xfrm>
-            <a:off x="5000625" y="1700547"/>
-            <a:ext cx="3230761" cy="205718"/>
-          </a:xfrm>
-          <a:prstGeom prst="rect">
-            <a:avLst/>
-          </a:prstGeom>
-          <a:noFill/>
-          <a:ln/>
-        </p:spPr>
-        <p:txBody>
-          <a:bodyPr wrap="none" lIns="0" tIns="0" rIns="0" bIns="0" rtlCol="0" anchor="t">
-            <a:spAutoFit/>
-          </a:bodyPr>
-          <a:lstStyle/>
-          <a:p>
-            <a:pPr algn="l" indent="0" marL="0">
-              <a:lnSpc>
-                <a:spcPct val="128000"/>
-              </a:lnSpc>
-              <a:buNone/>
-            </a:pPr>
-            <a:r>
-              <a:rPr lang="en-US" sz="950" dirty="0">
+              <a:t>Using a Large Language Model (e.g., Llama-3-8B or Mistral) with </a:t>
+            </a:r>
+            <a:r>
+              <a:rPr lang="en-US" sz="950" b="1" dirty="0" err="1">
                 <a:solidFill>
                   <a:srgbClr val="2C3E50"/>
                 </a:solidFill>
@@ -3211,43 +6563,10 @@
                 <a:ea typeface="Work Sans" pitchFamily="34" charset="-122"/>
                 <a:cs typeface="Work Sans" pitchFamily="34" charset="-120"/>
               </a:rPr>
-              <a:t>Deployed Vector Database using ChromaDB and FAISS.</a:t>
-            </a:r>
-            <a:endParaRPr lang="en-US" sz="950" dirty="0"/>
-          </a:p>
-        </p:txBody>
-      </p:sp>
-      <p:sp>
-        <p:nvSpPr>
-          <p:cNvPr id="14" name="Text 10"/>
-          <p:cNvSpPr/>
-          <p:nvPr/>
-        </p:nvSpPr>
-        <p:spPr>
-          <a:xfrm>
-            <a:off x="5000625" y="1991990"/>
-            <a:ext cx="3571875" cy="411435"/>
-          </a:xfrm>
-          <a:prstGeom prst="rect">
-            <a:avLst/>
-          </a:prstGeom>
-          <a:noFill/>
-          <a:ln/>
-        </p:spPr>
-        <p:txBody>
-          <a:bodyPr wrap="square" lIns="0" tIns="0" rIns="0" bIns="0" rtlCol="0" anchor="t">
-            <a:spAutoFit/>
-          </a:bodyPr>
-          <a:lstStyle/>
-          <a:p>
-            <a:pPr algn="l" indent="0" marL="0">
-              <a:lnSpc>
-                <a:spcPct val="128000"/>
-              </a:lnSpc>
-              <a:buNone/>
-            </a:pPr>
-            <a:r>
-              <a:rPr lang="en-US" sz="950" dirty="0">
+              <a:t>LoRA</a:t>
+            </a:r>
+            <a:r>
+              <a:rPr lang="en-US" sz="950" b="1" dirty="0">
                 <a:solidFill>
                   <a:srgbClr val="2C3E50"/>
                 </a:solidFill>
@@ -3255,41 +6574,8 @@
                 <a:ea typeface="Work Sans" pitchFamily="34" charset="-122"/>
                 <a:cs typeface="Work Sans" pitchFamily="34" charset="-120"/>
               </a:rPr>
-              <a:t>Implemented Dense Passage Retrieval (DPR) for semantic search.</a:t>
-            </a:r>
-            <a:endParaRPr lang="en-US" sz="950" dirty="0"/>
-          </a:p>
-        </p:txBody>
-      </p:sp>
-      <p:sp>
-        <p:nvSpPr>
-          <p:cNvPr id="15" name="Text 11"/>
-          <p:cNvSpPr/>
-          <p:nvPr/>
-        </p:nvSpPr>
-        <p:spPr>
-          <a:xfrm>
-            <a:off x="5000625" y="2489150"/>
-            <a:ext cx="2923105" cy="205718"/>
-          </a:xfrm>
-          <a:prstGeom prst="rect">
-            <a:avLst/>
-          </a:prstGeom>
-          <a:noFill/>
-          <a:ln/>
-        </p:spPr>
-        <p:txBody>
-          <a:bodyPr wrap="none" lIns="0" tIns="0" rIns="0" bIns="0" rtlCol="0" anchor="t">
-            <a:spAutoFit/>
-          </a:bodyPr>
-          <a:lstStyle/>
-          <a:p>
-            <a:pPr algn="l" indent="0" marL="0">
-              <a:lnSpc>
-                <a:spcPct val="128000"/>
-              </a:lnSpc>
-              <a:buNone/>
-            </a:pPr>
+              <a:t> (Low-Rank Adaptation)</a:t>
+            </a:r>
             <a:r>
               <a:rPr lang="en-US" sz="950" dirty="0">
                 <a:solidFill>
@@ -3299,7 +6585,7 @@
                 <a:ea typeface="Work Sans" pitchFamily="34" charset="-122"/>
                 <a:cs typeface="Work Sans" pitchFamily="34" charset="-120"/>
               </a:rPr>
-              <a:t>Achieved sub-second latency for real-time retrieval.</a:t>
+              <a:t> for domain-specific fine-tuning.</a:t>
             </a:r>
             <a:endParaRPr lang="en-US" sz="950" dirty="0"/>
           </a:p>
@@ -3313,7 +6599,7 @@
 </p:sld>
 </file>
 
-<file path=ppt/slides/slide5.xml><?xml version="1.0" encoding="utf-8"?>
+<file path=ppt/slides/slide8.xml><?xml version="1.0" encoding="utf-8"?>
 <p:sld xmlns:a="http://schemas.openxmlformats.org/drawingml/2006/main" xmlns:r="http://schemas.openxmlformats.org/officeDocument/2006/relationships" xmlns:p="http://schemas.openxmlformats.org/presentationml/2006/main">
   <p:cSld name="Slide 5">
     <p:spTree>
@@ -3332,14 +6618,14 @@
       </p:grpSpPr>
       <p:pic>
         <p:nvPicPr>
-          <p:cNvPr id="3" name="Image 0" descr="preencoded.png">    </p:cNvPr>
+          <p:cNvPr id="3" name="Image 0" descr="preencoded.png"/>
           <p:cNvPicPr>
             <a:picLocks noChangeAspect="1"/>
           </p:cNvPicPr>
           <p:nvPr/>
         </p:nvPicPr>
         <p:blipFill>
-          <a:blip r:embed="rId1"/>
+          <a:blip r:embed="rId3"/>
           <a:stretch>
             <a:fillRect/>
           </a:stretch>
@@ -3377,7 +6663,7 @@
           </a:bodyPr>
           <a:lstStyle/>
           <a:p>
-            <a:pPr algn="l" indent="0" marL="0">
+            <a:pPr marL="0" indent="0" algn="l">
               <a:buNone/>
             </a:pPr>
             <a:r>
@@ -3418,7 +6704,7 @@
           </a:bodyPr>
           <a:lstStyle/>
           <a:p>
-            <a:pPr algn="l" indent="0" marL="0">
+            <a:pPr marL="0" indent="0" algn="l">
               <a:buNone/>
             </a:pPr>
             <a:r>
@@ -3459,7 +6745,7 @@
           </a:bodyPr>
           <a:lstStyle/>
           <a:p>
-            <a:pPr algn="l" indent="0" marL="0">
+            <a:pPr marL="0" indent="0" algn="l">
               <a:lnSpc>
                 <a:spcPct val="120000"/>
               </a:lnSpc>
@@ -3503,7 +6789,7 @@
           </a:bodyPr>
           <a:lstStyle/>
           <a:p>
-            <a:pPr algn="l" indent="0" marL="0">
+            <a:pPr marL="0" indent="0" algn="l">
               <a:buNone/>
             </a:pPr>
             <a:r>
@@ -3544,7 +6830,7 @@
           </a:bodyPr>
           <a:lstStyle/>
           <a:p>
-            <a:pPr algn="l" indent="0" marL="0">
+            <a:pPr marL="0" indent="0" algn="l">
               <a:lnSpc>
                 <a:spcPct val="120000"/>
               </a:lnSpc>
@@ -3588,7 +6874,7 @@
           </a:bodyPr>
           <a:lstStyle/>
           <a:p>
-            <a:pPr algn="l" indent="0" marL="0">
+            <a:pPr marL="0" indent="0" algn="l">
               <a:buNone/>
             </a:pPr>
             <a:r>
@@ -3629,7 +6915,7 @@
           </a:bodyPr>
           <a:lstStyle/>
           <a:p>
-            <a:pPr algn="l" indent="0" marL="0">
+            <a:pPr marL="0" indent="0" algn="l">
               <a:lnSpc>
                 <a:spcPct val="120000"/>
               </a:lnSpc>
@@ -3673,7 +6959,7 @@
           </a:bodyPr>
           <a:lstStyle/>
           <a:p>
-            <a:pPr algn="l" indent="0" marL="0">
+            <a:pPr marL="0" indent="0" algn="l">
               <a:buNone/>
             </a:pPr>
             <a:r>
@@ -3714,7 +7000,7 @@
           </a:bodyPr>
           <a:lstStyle/>
           <a:p>
-            <a:pPr algn="l" indent="0" marL="0">
+            <a:pPr marL="0" indent="0" algn="l">
               <a:lnSpc>
                 <a:spcPct val="120000"/>
               </a:lnSpc>
@@ -3758,7 +7044,7 @@
           </a:bodyPr>
           <a:lstStyle/>
           <a:p>
-            <a:pPr algn="l" indent="0" marL="0">
+            <a:pPr marL="0" indent="0" algn="l">
               <a:buNone/>
             </a:pPr>
             <a:r>
@@ -3799,7 +7085,7 @@
           </a:bodyPr>
           <a:lstStyle/>
           <a:p>
-            <a:pPr algn="l" indent="0" marL="0">
+            <a:pPr marL="0" indent="0" algn="l">
               <a:lnSpc>
                 <a:spcPct val="120000"/>
               </a:lnSpc>
@@ -3843,7 +7129,7 @@
           </a:bodyPr>
           <a:lstStyle/>
           <a:p>
-            <a:pPr algn="l" indent="0" marL="0">
+            <a:pPr marL="0" indent="0" algn="l">
               <a:buNone/>
             </a:pPr>
             <a:r>
@@ -3884,7 +7170,7 @@
           </a:bodyPr>
           <a:lstStyle/>
           <a:p>
-            <a:pPr algn="l" indent="0" marL="0">
+            <a:pPr marL="0" indent="0" algn="l">
               <a:lnSpc>
                 <a:spcPct val="120000"/>
               </a:lnSpc>
@@ -3913,894 +7199,7 @@
 </p:sld>
 </file>
 
-<file path=ppt/slides/slide6.xml><?xml version="1.0" encoding="utf-8"?>
-<p:sld xmlns:a="http://schemas.openxmlformats.org/drawingml/2006/main" xmlns:r="http://schemas.openxmlformats.org/officeDocument/2006/relationships" xmlns:p="http://schemas.openxmlformats.org/presentationml/2006/main">
-  <p:cSld name="Slide 6">
-    <p:spTree>
-      <p:nvGrpSpPr>
-        <p:cNvPr id="1" name=""/>
-        <p:cNvGrpSpPr/>
-        <p:nvPr/>
-      </p:nvGrpSpPr>
-      <p:grpSpPr>
-        <a:xfrm>
-          <a:off x="0" y="0"/>
-          <a:ext cx="0" cy="0"/>
-          <a:chOff x="0" y="0"/>
-          <a:chExt cx="0" cy="0"/>
-        </a:xfrm>
-      </p:grpSpPr>
-      <p:pic>
-        <p:nvPicPr>
-          <p:cNvPr id="3" name="Image 0" descr="preencoded.png">    </p:cNvPr>
-          <p:cNvPicPr>
-            <a:picLocks noChangeAspect="1"/>
-          </p:cNvPicPr>
-          <p:nvPr/>
-        </p:nvPicPr>
-        <p:blipFill>
-          <a:blip r:embed="rId1"/>
-          <a:stretch>
-            <a:fillRect/>
-          </a:stretch>
-        </p:blipFill>
-        <p:spPr>
-          <a:xfrm>
-            <a:off x="0" y="0"/>
-            <a:ext cx="9144000" cy="5143500"/>
-          </a:xfrm>
-          <a:prstGeom prst="rect">
-            <a:avLst/>
-          </a:prstGeom>
-        </p:spPr>
-      </p:pic>
-      <p:sp>
-        <p:nvSpPr>
-          <p:cNvPr id="4" name="Text 0"/>
-          <p:cNvSpPr/>
-          <p:nvPr/>
-        </p:nvSpPr>
-        <p:spPr>
-          <a:xfrm>
-            <a:off x="642938" y="735499"/>
-            <a:ext cx="7858125" cy="262533"/>
-          </a:xfrm>
-          <a:prstGeom prst="rect">
-            <a:avLst/>
-          </a:prstGeom>
-          <a:noFill/>
-          <a:ln/>
-        </p:spPr>
-        <p:txBody>
-          <a:bodyPr wrap="square" lIns="0" tIns="0" rIns="0" bIns="0" rtlCol="0" anchor="t">
-            <a:spAutoFit/>
-          </a:bodyPr>
-          <a:lstStyle/>
-          <a:p>
-            <a:pPr algn="l" indent="0" marL="0">
-              <a:buNone/>
-            </a:pPr>
-            <a:r>
-              <a:rPr lang="en-US" sz="1600" b="1" dirty="0">
-                <a:solidFill>
-                  <a:srgbClr val="0F2537"/>
-                </a:solidFill>
-                <a:latin typeface="Playfair Display Bold" pitchFamily="34" charset="0"/>
-                <a:ea typeface="Playfair Display Bold" pitchFamily="34" charset="-122"/>
-                <a:cs typeface="Playfair Display Bold" pitchFamily="34" charset="-120"/>
-              </a:rPr>
-              <a:t>Algorithmic Foundation &amp; Infrastructure</a:t>
-            </a:r>
-            <a:endParaRPr lang="en-US" sz="1600" dirty="0"/>
-          </a:p>
-        </p:txBody>
-      </p:sp>
-      <p:sp>
-        <p:nvSpPr>
-          <p:cNvPr id="5" name="Text 1"/>
-          <p:cNvSpPr/>
-          <p:nvPr/>
-        </p:nvSpPr>
-        <p:spPr>
-          <a:xfrm>
-            <a:off x="642938" y="1358791"/>
-            <a:ext cx="469785" cy="221456"/>
-          </a:xfrm>
-          <a:prstGeom prst="rect">
-            <a:avLst/>
-          </a:prstGeom>
-          <a:noFill/>
-          <a:ln/>
-        </p:spPr>
-        <p:txBody>
-          <a:bodyPr wrap="none" lIns="0" tIns="0" rIns="0" bIns="0" rtlCol="0" anchor="t">
-            <a:spAutoFit/>
-          </a:bodyPr>
-          <a:lstStyle/>
-          <a:p>
-            <a:pPr algn="l" indent="0" marL="0">
-              <a:buNone/>
-            </a:pPr>
-            <a:r>
-              <a:rPr lang="en-US" sz="1400" b="1" dirty="0">
-                <a:solidFill>
-                  <a:srgbClr val="D96C06"/>
-                </a:solidFill>
-                <a:latin typeface="Playfair Display Bold" pitchFamily="34" charset="0"/>
-                <a:ea typeface="Playfair Display Bold" pitchFamily="34" charset="-122"/>
-                <a:cs typeface="Playfair Display Bold" pitchFamily="34" charset="-120"/>
-              </a:rPr>
-              <a:t>L = L</a:t>
-            </a:r>
-            <a:endParaRPr lang="en-US" sz="1400" dirty="0"/>
-          </a:p>
-        </p:txBody>
-      </p:sp>
-      <p:sp>
-        <p:nvSpPr>
-          <p:cNvPr id="6" name="Text 2"/>
-          <p:cNvSpPr/>
-          <p:nvPr/>
-        </p:nvSpPr>
-        <p:spPr>
-          <a:xfrm>
-            <a:off x="1112723" y="1430927"/>
-            <a:ext cx="250031" cy="183952"/>
-          </a:xfrm>
-          <a:prstGeom prst="rect">
-            <a:avLst/>
-          </a:prstGeom>
-          <a:noFill/>
-          <a:ln/>
-        </p:spPr>
-        <p:txBody>
-          <a:bodyPr wrap="none" lIns="0" tIns="0" rIns="0" bIns="0" rtlCol="0" anchor="t">
-            <a:spAutoFit/>
-          </a:bodyPr>
-          <a:lstStyle/>
-          <a:p>
-            <a:pPr algn="l" indent="0" marL="0">
-              <a:buNone/>
-            </a:pPr>
-            <a:r>
-              <a:rPr lang="en-US" sz="1150" b="1" baseline="-40000" dirty="0">
-                <a:solidFill>
-                  <a:srgbClr val="D96C06"/>
-                </a:solidFill>
-                <a:latin typeface="Playfair Display Bold" pitchFamily="34" charset="0"/>
-                <a:ea typeface="Playfair Display Bold" pitchFamily="34" charset="-122"/>
-                <a:cs typeface="Playfair Display Bold" pitchFamily="34" charset="-120"/>
-              </a:rPr>
-              <a:t>gen</a:t>
-            </a:r>
-            <a:endParaRPr lang="en-US" sz="1150" dirty="0"/>
-          </a:p>
-        </p:txBody>
-      </p:sp>
-      <p:sp>
-        <p:nvSpPr>
-          <p:cNvPr id="7" name="Text 3"/>
-          <p:cNvSpPr/>
-          <p:nvPr/>
-        </p:nvSpPr>
-        <p:spPr>
-          <a:xfrm>
-            <a:off x="1362754" y="1358791"/>
-            <a:ext cx="495681" cy="221456"/>
-          </a:xfrm>
-          <a:prstGeom prst="rect">
-            <a:avLst/>
-          </a:prstGeom>
-          <a:noFill/>
-          <a:ln/>
-        </p:spPr>
-        <p:txBody>
-          <a:bodyPr wrap="none" lIns="0" tIns="0" rIns="0" bIns="0" rtlCol="0" anchor="t">
-            <a:spAutoFit/>
-          </a:bodyPr>
-          <a:lstStyle/>
-          <a:p>
-            <a:pPr algn="l" indent="0" marL="0">
-              <a:buNone/>
-            </a:pPr>
-            <a:r>
-              <a:rPr lang="en-US" sz="1400" b="1" dirty="0">
-                <a:solidFill>
-                  <a:srgbClr val="D96C06"/>
-                </a:solidFill>
-                <a:latin typeface="Playfair Display Bold" pitchFamily="34" charset="0"/>
-                <a:ea typeface="Playfair Display Bold" pitchFamily="34" charset="-122"/>
-                <a:cs typeface="Playfair Display Bold" pitchFamily="34" charset="-120"/>
-              </a:rPr>
-              <a:t>+ λ L</a:t>
-            </a:r>
-            <a:endParaRPr lang="en-US" sz="1400" dirty="0"/>
-          </a:p>
-        </p:txBody>
-      </p:sp>
-      <p:sp>
-        <p:nvSpPr>
-          <p:cNvPr id="8" name="Text 4"/>
-          <p:cNvSpPr/>
-          <p:nvPr/>
-        </p:nvSpPr>
-        <p:spPr>
-          <a:xfrm>
-            <a:off x="1858435" y="1430927"/>
-            <a:ext cx="268337" cy="183952"/>
-          </a:xfrm>
-          <a:prstGeom prst="rect">
-            <a:avLst/>
-          </a:prstGeom>
-          <a:noFill/>
-          <a:ln/>
-        </p:spPr>
-        <p:txBody>
-          <a:bodyPr wrap="none" lIns="0" tIns="0" rIns="0" bIns="0" rtlCol="0" anchor="t">
-            <a:spAutoFit/>
-          </a:bodyPr>
-          <a:lstStyle/>
-          <a:p>
-            <a:pPr algn="l" indent="0" marL="0">
-              <a:buNone/>
-            </a:pPr>
-            <a:r>
-              <a:rPr lang="en-US" sz="1150" b="1" baseline="-40000" dirty="0">
-                <a:solidFill>
-                  <a:srgbClr val="D96C06"/>
-                </a:solidFill>
-                <a:latin typeface="Playfair Display Bold" pitchFamily="34" charset="0"/>
-                <a:ea typeface="Playfair Display Bold" pitchFamily="34" charset="-122"/>
-                <a:cs typeface="Playfair Display Bold" pitchFamily="34" charset="-120"/>
-              </a:rPr>
-              <a:t>fact</a:t>
-            </a:r>
-            <a:endParaRPr lang="en-US" sz="1150" dirty="0"/>
-          </a:p>
-        </p:txBody>
-      </p:sp>
-      <p:sp>
-        <p:nvSpPr>
-          <p:cNvPr id="9" name="Text 5"/>
-          <p:cNvSpPr/>
-          <p:nvPr/>
-        </p:nvSpPr>
-        <p:spPr>
-          <a:xfrm>
-            <a:off x="642938" y="1689888"/>
-            <a:ext cx="7858125" cy="146447"/>
-          </a:xfrm>
-          <a:prstGeom prst="rect">
-            <a:avLst/>
-          </a:prstGeom>
-          <a:noFill/>
-          <a:ln/>
-        </p:spPr>
-        <p:txBody>
-          <a:bodyPr wrap="square" lIns="0" tIns="0" rIns="0" bIns="0" rtlCol="0" anchor="t">
-            <a:spAutoFit/>
-          </a:bodyPr>
-          <a:lstStyle/>
-          <a:p>
-            <a:pPr algn="l" indent="0" marL="0">
-              <a:buNone/>
-            </a:pPr>
-            <a:r>
-              <a:rPr lang="en-US" sz="950" i="1" dirty="0">
-                <a:solidFill>
-                  <a:srgbClr val="2C3E50"/>
-                </a:solidFill>
-                <a:latin typeface="Work Sans" pitchFamily="34" charset="0"/>
-                <a:ea typeface="Work Sans" pitchFamily="34" charset="-122"/>
-                <a:cs typeface="Work Sans" pitchFamily="34" charset="-120"/>
-              </a:rPr>
-              <a:t>Objective Function: Combining standard Cross-Entropy Loss with a factual consistency penalty.</a:t>
-            </a:r>
-            <a:endParaRPr lang="en-US" sz="950" dirty="0"/>
-          </a:p>
-        </p:txBody>
-      </p:sp>
-      <p:sp>
-        <p:nvSpPr>
-          <p:cNvPr id="10" name="Text 6"/>
-          <p:cNvSpPr/>
-          <p:nvPr/>
-        </p:nvSpPr>
-        <p:spPr>
-          <a:xfrm>
-            <a:off x="642938" y="2059577"/>
-            <a:ext cx="1597856" cy="221456"/>
-          </a:xfrm>
-          <a:prstGeom prst="rect">
-            <a:avLst/>
-          </a:prstGeom>
-          <a:noFill/>
-          <a:ln/>
-        </p:spPr>
-        <p:txBody>
-          <a:bodyPr wrap="square" lIns="0" tIns="0" rIns="0" bIns="0" rtlCol="0" anchor="t">
-            <a:spAutoFit/>
-          </a:bodyPr>
-          <a:lstStyle/>
-          <a:p>
-            <a:pPr algn="l" indent="0" marL="0">
-              <a:buNone/>
-            </a:pPr>
-            <a:r>
-              <a:rPr lang="en-US" sz="1400" b="1" dirty="0">
-                <a:solidFill>
-                  <a:srgbClr val="D96C06"/>
-                </a:solidFill>
-                <a:latin typeface="Playfair Display Bold" pitchFamily="34" charset="0"/>
-                <a:ea typeface="Playfair Display Bold" pitchFamily="34" charset="-122"/>
-                <a:cs typeface="Playfair Display Bold" pitchFamily="34" charset="-120"/>
-              </a:rPr>
-              <a:t>P(z|x) ∝ exp(sim(E</a:t>
-            </a:r>
-            <a:endParaRPr lang="en-US" sz="1400" dirty="0"/>
-          </a:p>
-        </p:txBody>
-      </p:sp>
-      <p:sp>
-        <p:nvSpPr>
-          <p:cNvPr id="11" name="Text 7"/>
-          <p:cNvSpPr/>
-          <p:nvPr/>
-        </p:nvSpPr>
-        <p:spPr>
-          <a:xfrm>
-            <a:off x="2240793" y="2131712"/>
-            <a:ext cx="83353" cy="183952"/>
-          </a:xfrm>
-          <a:prstGeom prst="rect">
-            <a:avLst/>
-          </a:prstGeom>
-          <a:noFill/>
-          <a:ln/>
-        </p:spPr>
-        <p:txBody>
-          <a:bodyPr wrap="none" lIns="0" tIns="0" rIns="0" bIns="0" rtlCol="0" anchor="t">
-            <a:spAutoFit/>
-          </a:bodyPr>
-          <a:lstStyle/>
-          <a:p>
-            <a:pPr algn="l" indent="0" marL="0">
-              <a:buNone/>
-            </a:pPr>
-            <a:r>
-              <a:rPr lang="en-US" sz="1150" b="1" baseline="-40000" dirty="0">
-                <a:solidFill>
-                  <a:srgbClr val="D96C06"/>
-                </a:solidFill>
-                <a:latin typeface="Playfair Display Bold" pitchFamily="34" charset="0"/>
-                <a:ea typeface="Playfair Display Bold" pitchFamily="34" charset="-122"/>
-                <a:cs typeface="Playfair Display Bold" pitchFamily="34" charset="-120"/>
-              </a:rPr>
-              <a:t>x</a:t>
-            </a:r>
-            <a:endParaRPr lang="en-US" sz="1150" dirty="0"/>
-          </a:p>
-        </p:txBody>
-      </p:sp>
-      <p:sp>
-        <p:nvSpPr>
-          <p:cNvPr id="12" name="Text 8"/>
-          <p:cNvSpPr/>
-          <p:nvPr/>
-        </p:nvSpPr>
-        <p:spPr>
-          <a:xfrm>
-            <a:off x="2324147" y="2059577"/>
-            <a:ext cx="233428" cy="221456"/>
-          </a:xfrm>
-          <a:prstGeom prst="rect">
-            <a:avLst/>
-          </a:prstGeom>
-          <a:noFill/>
-          <a:ln/>
-        </p:spPr>
-        <p:txBody>
-          <a:bodyPr wrap="none" lIns="0" tIns="0" rIns="0" bIns="0" rtlCol="0" anchor="t">
-            <a:spAutoFit/>
-          </a:bodyPr>
-          <a:lstStyle/>
-          <a:p>
-            <a:pPr algn="l" indent="0" marL="0">
-              <a:buNone/>
-            </a:pPr>
-            <a:r>
-              <a:rPr lang="en-US" sz="1400" b="1" dirty="0">
-                <a:solidFill>
-                  <a:srgbClr val="D96C06"/>
-                </a:solidFill>
-                <a:latin typeface="Playfair Display Bold" pitchFamily="34" charset="0"/>
-                <a:ea typeface="Playfair Display Bold" pitchFamily="34" charset="-122"/>
-                <a:cs typeface="Playfair Display Bold" pitchFamily="34" charset="-120"/>
-              </a:rPr>
-              <a:t>, E</a:t>
-            </a:r>
-            <a:endParaRPr lang="en-US" sz="1400" dirty="0"/>
-          </a:p>
-        </p:txBody>
-      </p:sp>
-      <p:sp>
-        <p:nvSpPr>
-          <p:cNvPr id="13" name="Text 9"/>
-          <p:cNvSpPr/>
-          <p:nvPr/>
-        </p:nvSpPr>
-        <p:spPr>
-          <a:xfrm>
-            <a:off x="2557574" y="2131712"/>
-            <a:ext cx="74005" cy="183952"/>
-          </a:xfrm>
-          <a:prstGeom prst="rect">
-            <a:avLst/>
-          </a:prstGeom>
-          <a:noFill/>
-          <a:ln/>
-        </p:spPr>
-        <p:txBody>
-          <a:bodyPr wrap="none" lIns="0" tIns="0" rIns="0" bIns="0" rtlCol="0" anchor="t">
-            <a:spAutoFit/>
-          </a:bodyPr>
-          <a:lstStyle/>
-          <a:p>
-            <a:pPr algn="l" indent="0" marL="0">
-              <a:buNone/>
-            </a:pPr>
-            <a:r>
-              <a:rPr lang="en-US" sz="1150" b="1" baseline="-40000" dirty="0">
-                <a:solidFill>
-                  <a:srgbClr val="D96C06"/>
-                </a:solidFill>
-                <a:latin typeface="Playfair Display Bold" pitchFamily="34" charset="0"/>
-                <a:ea typeface="Playfair Display Bold" pitchFamily="34" charset="-122"/>
-                <a:cs typeface="Playfair Display Bold" pitchFamily="34" charset="-120"/>
-              </a:rPr>
-              <a:t>z</a:t>
-            </a:r>
-            <a:endParaRPr lang="en-US" sz="1150" dirty="0"/>
-          </a:p>
-        </p:txBody>
-      </p:sp>
-      <p:sp>
-        <p:nvSpPr>
-          <p:cNvPr id="14" name="Text 10"/>
-          <p:cNvSpPr/>
-          <p:nvPr/>
-        </p:nvSpPr>
-        <p:spPr>
-          <a:xfrm>
-            <a:off x="2631579" y="2059577"/>
-            <a:ext cx="133220" cy="221456"/>
-          </a:xfrm>
-          <a:prstGeom prst="rect">
-            <a:avLst/>
-          </a:prstGeom>
-          <a:noFill/>
-          <a:ln/>
-        </p:spPr>
-        <p:txBody>
-          <a:bodyPr wrap="none" lIns="0" tIns="0" rIns="0" bIns="0" rtlCol="0" anchor="t">
-            <a:spAutoFit/>
-          </a:bodyPr>
-          <a:lstStyle/>
-          <a:p>
-            <a:pPr algn="l" indent="0" marL="0">
-              <a:buNone/>
-            </a:pPr>
-            <a:r>
-              <a:rPr lang="en-US" sz="1400" b="1" dirty="0">
-                <a:solidFill>
-                  <a:srgbClr val="D96C06"/>
-                </a:solidFill>
-                <a:latin typeface="Playfair Display Bold" pitchFamily="34" charset="0"/>
-                <a:ea typeface="Playfair Display Bold" pitchFamily="34" charset="-122"/>
-                <a:cs typeface="Playfair Display Bold" pitchFamily="34" charset="-120"/>
-              </a:rPr>
-              <a:t>))</a:t>
-            </a:r>
-            <a:endParaRPr lang="en-US" sz="1400" dirty="0"/>
-          </a:p>
-        </p:txBody>
-      </p:sp>
-      <p:sp>
-        <p:nvSpPr>
-          <p:cNvPr id="15" name="Text 11"/>
-          <p:cNvSpPr/>
-          <p:nvPr/>
-        </p:nvSpPr>
-        <p:spPr>
-          <a:xfrm>
-            <a:off x="642938" y="2390673"/>
-            <a:ext cx="7858125" cy="146447"/>
-          </a:xfrm>
-          <a:prstGeom prst="rect">
-            <a:avLst/>
-          </a:prstGeom>
-          <a:noFill/>
-          <a:ln/>
-        </p:spPr>
-        <p:txBody>
-          <a:bodyPr wrap="square" lIns="0" tIns="0" rIns="0" bIns="0" rtlCol="0" anchor="t">
-            <a:spAutoFit/>
-          </a:bodyPr>
-          <a:lstStyle/>
-          <a:p>
-            <a:pPr algn="l" indent="0" marL="0">
-              <a:buNone/>
-            </a:pPr>
-            <a:r>
-              <a:rPr lang="en-US" sz="950" i="1" dirty="0">
-                <a:solidFill>
-                  <a:srgbClr val="2C3E50"/>
-                </a:solidFill>
-                <a:latin typeface="Work Sans" pitchFamily="34" charset="0"/>
-                <a:ea typeface="Work Sans" pitchFamily="34" charset="-122"/>
-                <a:cs typeface="Work Sans" pitchFamily="34" charset="-120"/>
-              </a:rPr>
-              <a:t>Retrieval Logic: Utilizing Cosine Similarity to find relevant external context 'z' for dialogue 'x'.</a:t>
-            </a:r>
-            <a:endParaRPr lang="en-US" sz="950" dirty="0"/>
-          </a:p>
-        </p:txBody>
-      </p:sp>
-      <p:sp>
-        <p:nvSpPr>
-          <p:cNvPr id="16" name="Text 12"/>
-          <p:cNvSpPr/>
-          <p:nvPr/>
-        </p:nvSpPr>
-        <p:spPr>
-          <a:xfrm>
-            <a:off x="642938" y="3330076"/>
-            <a:ext cx="3786188" cy="182166"/>
-          </a:xfrm>
-          <a:prstGeom prst="rect">
-            <a:avLst/>
-          </a:prstGeom>
-          <a:noFill/>
-          <a:ln/>
-        </p:spPr>
-        <p:txBody>
-          <a:bodyPr wrap="square" lIns="0" tIns="0" rIns="0" bIns="0" rtlCol="0" anchor="t">
-            <a:spAutoFit/>
-          </a:bodyPr>
-          <a:lstStyle/>
-          <a:p>
-            <a:pPr algn="l" indent="0" marL="0">
-              <a:buNone/>
-            </a:pPr>
-            <a:r>
-              <a:rPr lang="en-US" sz="1100" dirty="0">
-                <a:solidFill>
-                  <a:srgbClr val="0F2537"/>
-                </a:solidFill>
-                <a:latin typeface="Work Sans SemiBold" pitchFamily="34" charset="0"/>
-                <a:ea typeface="Work Sans SemiBold" pitchFamily="34" charset="-122"/>
-                <a:cs typeface="Work Sans SemiBold" pitchFamily="34" charset="-120"/>
-              </a:rPr>
-              <a:t>Hardware Deployed</a:t>
-            </a:r>
-            <a:endParaRPr lang="en-US" sz="1100" dirty="0"/>
-          </a:p>
-        </p:txBody>
-      </p:sp>
-      <p:sp>
-        <p:nvSpPr>
-          <p:cNvPr id="17" name="Text 13"/>
-          <p:cNvSpPr/>
-          <p:nvPr/>
-        </p:nvSpPr>
-        <p:spPr>
-          <a:xfrm>
-            <a:off x="842963" y="3619398"/>
-            <a:ext cx="2291804" cy="205718"/>
-          </a:xfrm>
-          <a:prstGeom prst="rect">
-            <a:avLst/>
-          </a:prstGeom>
-          <a:noFill/>
-          <a:ln/>
-        </p:spPr>
-        <p:txBody>
-          <a:bodyPr wrap="none" lIns="0" tIns="0" rIns="0" bIns="0" rtlCol="0" anchor="t">
-            <a:spAutoFit/>
-          </a:bodyPr>
-          <a:lstStyle/>
-          <a:p>
-            <a:pPr algn="l" indent="0" marL="0">
-              <a:lnSpc>
-                <a:spcPct val="128000"/>
-              </a:lnSpc>
-              <a:buNone/>
-            </a:pPr>
-            <a:r>
-              <a:rPr lang="en-US" sz="950" dirty="0">
-                <a:solidFill>
-                  <a:srgbClr val="2C3E50"/>
-                </a:solidFill>
-                <a:latin typeface="Work Sans" pitchFamily="34" charset="0"/>
-                <a:ea typeface="Work Sans" pitchFamily="34" charset="-122"/>
-                <a:cs typeface="Work Sans" pitchFamily="34" charset="-120"/>
-              </a:rPr>
-              <a:t>NVIDIA A100 / RTX 3090 (24GB VRAM)</a:t>
-            </a:r>
-            <a:endParaRPr lang="en-US" sz="950" dirty="0"/>
-          </a:p>
-        </p:txBody>
-      </p:sp>
-      <p:sp>
-        <p:nvSpPr>
-          <p:cNvPr id="18" name="Text 14"/>
-          <p:cNvSpPr/>
-          <p:nvPr/>
-        </p:nvSpPr>
-        <p:spPr>
-          <a:xfrm>
-            <a:off x="842963" y="3882265"/>
-            <a:ext cx="1114732" cy="205718"/>
-          </a:xfrm>
-          <a:prstGeom prst="rect">
-            <a:avLst/>
-          </a:prstGeom>
-          <a:noFill/>
-          <a:ln/>
-        </p:spPr>
-        <p:txBody>
-          <a:bodyPr wrap="none" lIns="0" tIns="0" rIns="0" bIns="0" rtlCol="0" anchor="t">
-            <a:spAutoFit/>
-          </a:bodyPr>
-          <a:lstStyle/>
-          <a:p>
-            <a:pPr algn="l" indent="0" marL="0">
-              <a:lnSpc>
-                <a:spcPct val="128000"/>
-              </a:lnSpc>
-              <a:buNone/>
-            </a:pPr>
-            <a:r>
-              <a:rPr lang="en-US" sz="950" dirty="0">
-                <a:solidFill>
-                  <a:srgbClr val="2C3E50"/>
-                </a:solidFill>
-                <a:latin typeface="Work Sans" pitchFamily="34" charset="0"/>
-                <a:ea typeface="Work Sans" pitchFamily="34" charset="-122"/>
-                <a:cs typeface="Work Sans" pitchFamily="34" charset="-120"/>
-              </a:rPr>
-              <a:t>64GB System RAM</a:t>
-            </a:r>
-            <a:endParaRPr lang="en-US" sz="950" dirty="0"/>
-          </a:p>
-        </p:txBody>
-      </p:sp>
-      <p:sp>
-        <p:nvSpPr>
-          <p:cNvPr id="19" name="Text 15"/>
-          <p:cNvSpPr/>
-          <p:nvPr/>
-        </p:nvSpPr>
-        <p:spPr>
-          <a:xfrm>
-            <a:off x="842963" y="4145133"/>
-            <a:ext cx="2644666" cy="205718"/>
-          </a:xfrm>
-          <a:prstGeom prst="rect">
-            <a:avLst/>
-          </a:prstGeom>
-          <a:noFill/>
-          <a:ln/>
-        </p:spPr>
-        <p:txBody>
-          <a:bodyPr wrap="none" lIns="0" tIns="0" rIns="0" bIns="0" rtlCol="0" anchor="t">
-            <a:spAutoFit/>
-          </a:bodyPr>
-          <a:lstStyle/>
-          <a:p>
-            <a:pPr algn="l" indent="0" marL="0">
-              <a:lnSpc>
-                <a:spcPct val="128000"/>
-              </a:lnSpc>
-              <a:buNone/>
-            </a:pPr>
-            <a:r>
-              <a:rPr lang="en-US" sz="950" dirty="0">
-                <a:solidFill>
-                  <a:srgbClr val="2C3E50"/>
-                </a:solidFill>
-                <a:latin typeface="Work Sans" pitchFamily="34" charset="0"/>
-                <a:ea typeface="Work Sans" pitchFamily="34" charset="-122"/>
-                <a:cs typeface="Work Sans" pitchFamily="34" charset="-120"/>
-              </a:rPr>
-              <a:t>High-speed NVMe Storage for Vector Indexing</a:t>
-            </a:r>
-            <a:endParaRPr lang="en-US" sz="950" dirty="0"/>
-          </a:p>
-        </p:txBody>
-      </p:sp>
-      <p:sp>
-        <p:nvSpPr>
-          <p:cNvPr id="20" name="Text 16"/>
-          <p:cNvSpPr/>
-          <p:nvPr/>
-        </p:nvSpPr>
-        <p:spPr>
-          <a:xfrm>
-            <a:off x="4714875" y="3330076"/>
-            <a:ext cx="3786188" cy="182166"/>
-          </a:xfrm>
-          <a:prstGeom prst="rect">
-            <a:avLst/>
-          </a:prstGeom>
-          <a:noFill/>
-          <a:ln/>
-        </p:spPr>
-        <p:txBody>
-          <a:bodyPr wrap="square" lIns="0" tIns="0" rIns="0" bIns="0" rtlCol="0" anchor="t">
-            <a:spAutoFit/>
-          </a:bodyPr>
-          <a:lstStyle/>
-          <a:p>
-            <a:pPr algn="l" indent="0" marL="0">
-              <a:buNone/>
-            </a:pPr>
-            <a:r>
-              <a:rPr lang="en-US" sz="1100" dirty="0">
-                <a:solidFill>
-                  <a:srgbClr val="0F2537"/>
-                </a:solidFill>
-                <a:latin typeface="Work Sans SemiBold" pitchFamily="34" charset="0"/>
-                <a:ea typeface="Work Sans SemiBold" pitchFamily="34" charset="-122"/>
-                <a:cs typeface="Work Sans SemiBold" pitchFamily="34" charset="-120"/>
-              </a:rPr>
-              <a:t>Software Stack</a:t>
-            </a:r>
-            <a:endParaRPr lang="en-US" sz="1100" dirty="0"/>
-          </a:p>
-        </p:txBody>
-      </p:sp>
-      <p:sp>
-        <p:nvSpPr>
-          <p:cNvPr id="21" name="Text 17"/>
-          <p:cNvSpPr/>
-          <p:nvPr/>
-        </p:nvSpPr>
-        <p:spPr>
-          <a:xfrm>
-            <a:off x="4914900" y="3619398"/>
-            <a:ext cx="2179709" cy="205718"/>
-          </a:xfrm>
-          <a:prstGeom prst="rect">
-            <a:avLst/>
-          </a:prstGeom>
-          <a:noFill/>
-          <a:ln/>
-        </p:spPr>
-        <p:txBody>
-          <a:bodyPr wrap="none" lIns="0" tIns="0" rIns="0" bIns="0" rtlCol="0" anchor="t">
-            <a:spAutoFit/>
-          </a:bodyPr>
-          <a:lstStyle/>
-          <a:p>
-            <a:pPr algn="l" indent="0" marL="0">
-              <a:lnSpc>
-                <a:spcPct val="128000"/>
-              </a:lnSpc>
-              <a:buNone/>
-            </a:pPr>
-            <a:r>
-              <a:rPr lang="en-US" sz="950" dirty="0">
-                <a:solidFill>
-                  <a:srgbClr val="2C3E50"/>
-                </a:solidFill>
-                <a:latin typeface="Work Sans" pitchFamily="34" charset="0"/>
-                <a:ea typeface="Work Sans" pitchFamily="34" charset="-122"/>
-                <a:cs typeface="Work Sans" pitchFamily="34" charset="-120"/>
-              </a:rPr>
-              <a:t>PyTorch &amp; HuggingFace Transformers</a:t>
-            </a:r>
-            <a:endParaRPr lang="en-US" sz="950" dirty="0"/>
-          </a:p>
-        </p:txBody>
-      </p:sp>
-      <p:sp>
-        <p:nvSpPr>
-          <p:cNvPr id="22" name="Text 18"/>
-          <p:cNvSpPr/>
-          <p:nvPr/>
-        </p:nvSpPr>
-        <p:spPr>
-          <a:xfrm>
-            <a:off x="4914900" y="3882265"/>
-            <a:ext cx="1429615" cy="205718"/>
-          </a:xfrm>
-          <a:prstGeom prst="rect">
-            <a:avLst/>
-          </a:prstGeom>
-          <a:noFill/>
-          <a:ln/>
-        </p:spPr>
-        <p:txBody>
-          <a:bodyPr wrap="none" lIns="0" tIns="0" rIns="0" bIns="0" rtlCol="0" anchor="t">
-            <a:spAutoFit/>
-          </a:bodyPr>
-          <a:lstStyle/>
-          <a:p>
-            <a:pPr algn="l" indent="0" marL="0">
-              <a:lnSpc>
-                <a:spcPct val="128000"/>
-              </a:lnSpc>
-              <a:buNone/>
-            </a:pPr>
-            <a:r>
-              <a:rPr lang="en-US" sz="950" dirty="0">
-                <a:solidFill>
-                  <a:srgbClr val="2C3E50"/>
-                </a:solidFill>
-                <a:latin typeface="Work Sans" pitchFamily="34" charset="0"/>
-                <a:ea typeface="Work Sans" pitchFamily="34" charset="-122"/>
-                <a:cs typeface="Work Sans" pitchFamily="34" charset="-120"/>
-              </a:rPr>
-              <a:t>LangChain Orchestration</a:t>
-            </a:r>
-            <a:endParaRPr lang="en-US" sz="950" dirty="0"/>
-          </a:p>
-        </p:txBody>
-      </p:sp>
-      <p:sp>
-        <p:nvSpPr>
-          <p:cNvPr id="23" name="Text 19"/>
-          <p:cNvSpPr/>
-          <p:nvPr/>
-        </p:nvSpPr>
-        <p:spPr>
-          <a:xfrm>
-            <a:off x="4914900" y="4145133"/>
-            <a:ext cx="2086980" cy="205718"/>
-          </a:xfrm>
-          <a:prstGeom prst="rect">
-            <a:avLst/>
-          </a:prstGeom>
-          <a:noFill/>
-          <a:ln/>
-        </p:spPr>
-        <p:txBody>
-          <a:bodyPr wrap="none" lIns="0" tIns="0" rIns="0" bIns="0" rtlCol="0" anchor="t">
-            <a:spAutoFit/>
-          </a:bodyPr>
-          <a:lstStyle/>
-          <a:p>
-            <a:pPr algn="l" indent="0" marL="0">
-              <a:lnSpc>
-                <a:spcPct val="128000"/>
-              </a:lnSpc>
-              <a:buNone/>
-            </a:pPr>
-            <a:r>
-              <a:rPr lang="en-US" sz="950" dirty="0">
-                <a:solidFill>
-                  <a:srgbClr val="2C3E50"/>
-                </a:solidFill>
-                <a:latin typeface="Work Sans" pitchFamily="34" charset="0"/>
-                <a:ea typeface="Work Sans" pitchFamily="34" charset="-122"/>
-                <a:cs typeface="Work Sans" pitchFamily="34" charset="-120"/>
-              </a:rPr>
-              <a:t>Pinecone / ChromaDB Vector Stores</a:t>
-            </a:r>
-            <a:endParaRPr lang="en-US" sz="950" dirty="0"/>
-          </a:p>
-        </p:txBody>
-      </p:sp>
-    </p:spTree>
-  </p:cSld>
-  <p:clrMapOvr>
-    <a:masterClrMapping/>
-  </p:clrMapOvr>
-</p:sld>
-</file>
-
-<file path=ppt/slides/slide7.xml><?xml version="1.0" encoding="utf-8"?>
+<file path=ppt/slides/slide9.xml><?xml version="1.0" encoding="utf-8"?>
 <p:sld xmlns:a="http://schemas.openxmlformats.org/drawingml/2006/main" xmlns:r="http://schemas.openxmlformats.org/officeDocument/2006/relationships" xmlns:p="http://schemas.openxmlformats.org/presentationml/2006/main">
   <p:cSld name="Slide 7">
     <p:spTree>
@@ -4819,14 +7218,14 @@
       </p:grpSpPr>
       <p:pic>
         <p:nvPicPr>
-          <p:cNvPr id="3" name="Image 0" descr="preencoded.png">    </p:cNvPr>
+          <p:cNvPr id="3" name="Image 0" descr="preencoded.png"/>
           <p:cNvPicPr>
             <a:picLocks noChangeAspect="1"/>
           </p:cNvPicPr>
           <p:nvPr/>
         </p:nvPicPr>
         <p:blipFill>
-          <a:blip r:embed="rId1"/>
+          <a:blip r:embed="rId3"/>
           <a:stretch>
             <a:fillRect/>
           </a:stretch>
@@ -4864,7 +7263,7 @@
           </a:bodyPr>
           <a:lstStyle/>
           <a:p>
-            <a:pPr algn="l" indent="0" marL="0">
+            <a:pPr marL="0" indent="0" algn="l">
               <a:buNone/>
             </a:pPr>
             <a:r>
@@ -4891,7 +7290,7 @@
         <p:spPr>
           <a:xfrm>
             <a:off x="571500" y="1055489"/>
-            <a:ext cx="3840463" cy="198239"/>
+            <a:ext cx="3840463" cy="184666"/>
           </a:xfrm>
           <a:prstGeom prst="rect">
             <a:avLst/>
@@ -4905,7 +7304,7 @@
           </a:bodyPr>
           <a:lstStyle/>
           <a:p>
-            <a:pPr algn="l" indent="0" marL="0">
+            <a:pPr marL="0" indent="0" algn="l">
               <a:buNone/>
             </a:pPr>
             <a:r>
@@ -4917,7 +7316,7 @@
                 <a:ea typeface="Playfair Display Bold" pitchFamily="34" charset="-122"/>
                 <a:cs typeface="Playfair Display Bold" pitchFamily="34" charset="-120"/>
               </a:rPr>
-              <a:t>Datasets Prepared in Q2</a:t>
+              <a:t>Datasets Prepared</a:t>
             </a:r>
             <a:endParaRPr lang="en-US" sz="1200" dirty="0"/>
           </a:p>
@@ -4946,7 +7345,7 @@
           </a:bodyPr>
           <a:lstStyle/>
           <a:p>
-            <a:pPr algn="l" indent="0" marL="0">
+            <a:pPr marL="0" indent="0" algn="l">
               <a:lnSpc>
                 <a:spcPct val="128000"/>
               </a:lnSpc>
@@ -4990,7 +7389,7 @@
           </a:bodyPr>
           <a:lstStyle/>
           <a:p>
-            <a:pPr algn="l" indent="0" marL="0">
+            <a:pPr marL="0" indent="0" algn="l">
               <a:lnSpc>
                 <a:spcPct val="128000"/>
               </a:lnSpc>
@@ -5034,7 +7433,7 @@
           </a:bodyPr>
           <a:lstStyle/>
           <a:p>
-            <a:pPr algn="l" indent="0" marL="0">
+            <a:pPr marL="0" indent="0" algn="l">
               <a:lnSpc>
                 <a:spcPct val="128000"/>
               </a:lnSpc>
@@ -5078,7 +7477,7 @@
           </a:bodyPr>
           <a:lstStyle/>
           <a:p>
-            <a:pPr algn="l" indent="0" marL="0">
+            <a:pPr marL="0" indent="0" algn="l">
               <a:buNone/>
             </a:pPr>
             <a:r>
@@ -5119,7 +7518,7 @@
           </a:bodyPr>
           <a:lstStyle/>
           <a:p>
-            <a:pPr algn="l" indent="0" marL="0">
+            <a:pPr marL="0" indent="0" algn="l">
               <a:lnSpc>
                 <a:spcPct val="128000"/>
               </a:lnSpc>
@@ -5163,7 +7562,7 @@
           </a:bodyPr>
           <a:lstStyle/>
           <a:p>
-            <a:pPr algn="l" indent="0" marL="0">
+            <a:pPr marL="0" indent="0" algn="l">
               <a:lnSpc>
                 <a:spcPct val="128000"/>
               </a:lnSpc>
@@ -5207,7 +7606,7 @@
           </a:bodyPr>
           <a:lstStyle/>
           <a:p>
-            <a:pPr algn="l" indent="0" marL="0">
+            <a:pPr marL="0" indent="0" algn="l">
               <a:lnSpc>
                 <a:spcPct val="128000"/>
               </a:lnSpc>
@@ -5223,1108 +7622,6 @@
                 <a:cs typeface="Work Sans" pitchFamily="34" charset="-120"/>
               </a:rPr>
               <a:t>Human Evaluation: Expert qualitative rating on Informativeness and Conciseness.</a:t>
-            </a:r>
-            <a:endParaRPr lang="en-US" sz="950" dirty="0"/>
-          </a:p>
-        </p:txBody>
-      </p:sp>
-    </p:spTree>
-  </p:cSld>
-  <p:clrMapOvr>
-    <a:masterClrMapping/>
-  </p:clrMapOvr>
-</p:sld>
-</file>
-
-<file path=ppt/slides/slide8.xml><?xml version="1.0" encoding="utf-8"?>
-<p:sld xmlns:a="http://schemas.openxmlformats.org/drawingml/2006/main" xmlns:r="http://schemas.openxmlformats.org/officeDocument/2006/relationships" xmlns:p="http://schemas.openxmlformats.org/presentationml/2006/main">
-  <p:cSld name="Slide 8">
-    <p:spTree>
-      <p:nvGrpSpPr>
-        <p:cNvPr id="1" name=""/>
-        <p:cNvGrpSpPr/>
-        <p:nvPr/>
-      </p:nvGrpSpPr>
-      <p:grpSpPr>
-        <a:xfrm>
-          <a:off x="0" y="0"/>
-          <a:ext cx="0" cy="0"/>
-          <a:chOff x="0" y="0"/>
-          <a:chExt cx="0" cy="0"/>
-        </a:xfrm>
-      </p:grpSpPr>
-      <p:pic>
-        <p:nvPicPr>
-          <p:cNvPr id="3" name="Image 0" descr="preencoded.png">    </p:cNvPr>
-          <p:cNvPicPr>
-            <a:picLocks noChangeAspect="1"/>
-          </p:cNvPicPr>
-          <p:nvPr/>
-        </p:nvPicPr>
-        <p:blipFill>
-          <a:blip r:embed="rId1"/>
-          <a:stretch>
-            <a:fillRect/>
-          </a:stretch>
-        </p:blipFill>
-        <p:spPr>
-          <a:xfrm>
-            <a:off x="0" y="0"/>
-            <a:ext cx="9144000" cy="5143500"/>
-          </a:xfrm>
-          <a:prstGeom prst="rect">
-            <a:avLst/>
-          </a:prstGeom>
-        </p:spPr>
-      </p:pic>
-      <p:sp>
-        <p:nvSpPr>
-          <p:cNvPr id="4" name="Text 0"/>
-          <p:cNvSpPr/>
-          <p:nvPr/>
-        </p:nvSpPr>
-        <p:spPr>
-          <a:xfrm>
-            <a:off x="428625" y="903573"/>
-            <a:ext cx="8286750" cy="262533"/>
-          </a:xfrm>
-          <a:prstGeom prst="rect">
-            <a:avLst/>
-          </a:prstGeom>
-          <a:noFill/>
-          <a:ln/>
-        </p:spPr>
-        <p:txBody>
-          <a:bodyPr wrap="square" lIns="0" tIns="0" rIns="0" bIns="0" rtlCol="0" anchor="t">
-            <a:spAutoFit/>
-          </a:bodyPr>
-          <a:lstStyle/>
-          <a:p>
-            <a:pPr algn="l" indent="0" marL="0">
-              <a:buNone/>
-            </a:pPr>
-            <a:r>
-              <a:rPr lang="en-US" sz="1600" b="1" dirty="0">
-                <a:solidFill>
-                  <a:srgbClr val="0F2537"/>
-                </a:solidFill>
-                <a:latin typeface="Playfair Display Bold" pitchFamily="34" charset="0"/>
-                <a:ea typeface="Playfair Display Bold" pitchFamily="34" charset="-122"/>
-                <a:cs typeface="Playfair Display Bold" pitchFamily="34" charset="-120"/>
-              </a:rPr>
-              <a:t>Project Timeline &amp; Q3 Roadmap</a:t>
-            </a:r>
-            <a:endParaRPr lang="en-US" sz="1600" dirty="0"/>
-          </a:p>
-        </p:txBody>
-      </p:sp>
-      <p:sp>
-        <p:nvSpPr>
-          <p:cNvPr id="5" name="Text 1"/>
-          <p:cNvSpPr/>
-          <p:nvPr/>
-        </p:nvSpPr>
-        <p:spPr>
-          <a:xfrm>
-            <a:off x="428625" y="1630449"/>
-            <a:ext cx="1285875" cy="146447"/>
-          </a:xfrm>
-          <a:prstGeom prst="rect">
-            <a:avLst/>
-          </a:prstGeom>
-          <a:noFill/>
-          <a:ln/>
-        </p:spPr>
-        <p:txBody>
-          <a:bodyPr wrap="none" lIns="0" tIns="0" rIns="0" bIns="0" rtlCol="0" anchor="t">
-            <a:spAutoFit/>
-          </a:bodyPr>
-          <a:lstStyle/>
-          <a:p>
-            <a:pPr algn="l" indent="0" marL="0">
-              <a:buNone/>
-            </a:pPr>
-            <a:r>
-              <a:rPr lang="en-US" sz="900" b="1" spc="1" kern="0" dirty="0">
-                <a:solidFill>
-                  <a:srgbClr val="D96C06"/>
-                </a:solidFill>
-                <a:latin typeface="Work Sans Bold" pitchFamily="34" charset="0"/>
-                <a:ea typeface="Work Sans Bold" pitchFamily="34" charset="-122"/>
-                <a:cs typeface="Work Sans Bold" pitchFamily="34" charset="-120"/>
-              </a:rPr>
-              <a:t>Q1 - Q2 2026</a:t>
-            </a:r>
-            <a:endParaRPr lang="en-US" sz="900" dirty="0"/>
-          </a:p>
-        </p:txBody>
-      </p:sp>
-      <p:sp>
-        <p:nvSpPr>
-          <p:cNvPr id="6" name="Text 2"/>
-          <p:cNvSpPr/>
-          <p:nvPr/>
-        </p:nvSpPr>
-        <p:spPr>
-          <a:xfrm>
-            <a:off x="1714500" y="1630449"/>
-            <a:ext cx="5857875" cy="182166"/>
-          </a:xfrm>
-          <a:prstGeom prst="rect">
-            <a:avLst/>
-          </a:prstGeom>
-          <a:noFill/>
-          <a:ln/>
-        </p:spPr>
-        <p:txBody>
-          <a:bodyPr wrap="square" lIns="0" tIns="0" rIns="0" bIns="0" rtlCol="0" anchor="t">
-            <a:spAutoFit/>
-          </a:bodyPr>
-          <a:lstStyle/>
-          <a:p>
-            <a:pPr algn="l" indent="0" marL="0">
-              <a:buNone/>
-            </a:pPr>
-            <a:r>
-              <a:rPr lang="en-US" sz="1100" dirty="0">
-                <a:solidFill>
-                  <a:srgbClr val="0F2537"/>
-                </a:solidFill>
-                <a:latin typeface="Work Sans SemiBold" pitchFamily="34" charset="0"/>
-                <a:ea typeface="Work Sans SemiBold" pitchFamily="34" charset="-122"/>
-                <a:cs typeface="Work Sans SemiBold" pitchFamily="34" charset="-120"/>
-              </a:rPr>
-              <a:t>Foundation &amp; Infrastructure </a:t>
-            </a:r>
-            <a:r>
-              <a:rPr lang="en-US" sz="700" b="1" dirty="0">
-                <a:solidFill>
-                  <a:srgbClr val="F0F4F8"/>
-                </a:solidFill>
-                <a:latin typeface="Work Sans Bold" pitchFamily="34" charset="0"/>
-                <a:ea typeface="Work Sans Bold" pitchFamily="34" charset="-122"/>
-                <a:cs typeface="Work Sans Bold" pitchFamily="34" charset="-120"/>
-              </a:rPr>
-              <a:t>COMPLETED</a:t>
-            </a:r>
-            <a:endParaRPr lang="en-US" sz="1100" dirty="0"/>
-          </a:p>
-        </p:txBody>
-      </p:sp>
-      <p:sp>
-        <p:nvSpPr>
-          <p:cNvPr id="7" name="Text 3"/>
-          <p:cNvSpPr/>
-          <p:nvPr/>
-        </p:nvSpPr>
-        <p:spPr>
-          <a:xfrm>
-            <a:off x="1914525" y="1869765"/>
-            <a:ext cx="2251425" cy="205718"/>
-          </a:xfrm>
-          <a:prstGeom prst="rect">
-            <a:avLst/>
-          </a:prstGeom>
-          <a:noFill/>
-          <a:ln/>
-        </p:spPr>
-        <p:txBody>
-          <a:bodyPr wrap="none" lIns="0" tIns="0" rIns="0" bIns="0" rtlCol="0" anchor="t">
-            <a:spAutoFit/>
-          </a:bodyPr>
-          <a:lstStyle/>
-          <a:p>
-            <a:pPr algn="l" indent="0" marL="0">
-              <a:lnSpc>
-                <a:spcPct val="128000"/>
-              </a:lnSpc>
-              <a:buNone/>
-            </a:pPr>
-            <a:r>
-              <a:rPr lang="en-US" sz="950" dirty="0">
-                <a:solidFill>
-                  <a:srgbClr val="2C3E50"/>
-                </a:solidFill>
-                <a:latin typeface="Work Sans" pitchFamily="34" charset="0"/>
-                <a:ea typeface="Work Sans" pitchFamily="34" charset="-122"/>
-                <a:cs typeface="Work Sans" pitchFamily="34" charset="-120"/>
-              </a:rPr>
-              <a:t>Literature Review &amp; Environment Setup</a:t>
-            </a:r>
-            <a:endParaRPr lang="en-US" sz="950" dirty="0"/>
-          </a:p>
-        </p:txBody>
-      </p:sp>
-      <p:sp>
-        <p:nvSpPr>
-          <p:cNvPr id="8" name="Text 4"/>
-          <p:cNvSpPr/>
-          <p:nvPr/>
-        </p:nvSpPr>
-        <p:spPr>
-          <a:xfrm>
-            <a:off x="1914525" y="2075483"/>
-            <a:ext cx="2180099" cy="205718"/>
-          </a:xfrm>
-          <a:prstGeom prst="rect">
-            <a:avLst/>
-          </a:prstGeom>
-          <a:noFill/>
-          <a:ln/>
-        </p:spPr>
-        <p:txBody>
-          <a:bodyPr wrap="none" lIns="0" tIns="0" rIns="0" bIns="0" rtlCol="0" anchor="t">
-            <a:spAutoFit/>
-          </a:bodyPr>
-          <a:lstStyle/>
-          <a:p>
-            <a:pPr algn="l" indent="0" marL="0">
-              <a:lnSpc>
-                <a:spcPct val="128000"/>
-              </a:lnSpc>
-              <a:buNone/>
-            </a:pPr>
-            <a:r>
-              <a:rPr lang="en-US" sz="950" dirty="0">
-                <a:solidFill>
-                  <a:srgbClr val="2C3E50"/>
-                </a:solidFill>
-                <a:latin typeface="Work Sans" pitchFamily="34" charset="0"/>
-                <a:ea typeface="Work Sans" pitchFamily="34" charset="-122"/>
-                <a:cs typeface="Work Sans" pitchFamily="34" charset="-120"/>
-              </a:rPr>
-              <a:t>Data Indexing &amp; Vector Store Creation</a:t>
-            </a:r>
-            <a:endParaRPr lang="en-US" sz="950" dirty="0"/>
-          </a:p>
-        </p:txBody>
-      </p:sp>
-      <p:sp>
-        <p:nvSpPr>
-          <p:cNvPr id="9" name="Text 5"/>
-          <p:cNvSpPr/>
-          <p:nvPr/>
-        </p:nvSpPr>
-        <p:spPr>
-          <a:xfrm>
-            <a:off x="428625" y="2609813"/>
-            <a:ext cx="1285875" cy="146447"/>
-          </a:xfrm>
-          <a:prstGeom prst="rect">
-            <a:avLst/>
-          </a:prstGeom>
-          <a:noFill/>
-          <a:ln/>
-        </p:spPr>
-        <p:txBody>
-          <a:bodyPr wrap="none" lIns="0" tIns="0" rIns="0" bIns="0" rtlCol="0" anchor="t">
-            <a:spAutoFit/>
-          </a:bodyPr>
-          <a:lstStyle/>
-          <a:p>
-            <a:pPr algn="l" indent="0" marL="0">
-              <a:buNone/>
-            </a:pPr>
-            <a:r>
-              <a:rPr lang="en-US" sz="900" b="1" spc="1" kern="0" dirty="0">
-                <a:solidFill>
-                  <a:srgbClr val="D96C06"/>
-                </a:solidFill>
-                <a:latin typeface="Work Sans Bold" pitchFamily="34" charset="0"/>
-                <a:ea typeface="Work Sans Bold" pitchFamily="34" charset="-122"/>
-                <a:cs typeface="Work Sans Bold" pitchFamily="34" charset="-120"/>
-              </a:rPr>
-              <a:t>Q3 2026</a:t>
-            </a:r>
-            <a:endParaRPr lang="en-US" sz="900" dirty="0"/>
-          </a:p>
-        </p:txBody>
-      </p:sp>
-      <p:sp>
-        <p:nvSpPr>
-          <p:cNvPr id="10" name="Text 6"/>
-          <p:cNvSpPr/>
-          <p:nvPr/>
-        </p:nvSpPr>
-        <p:spPr>
-          <a:xfrm>
-            <a:off x="1714500" y="2609813"/>
-            <a:ext cx="5857875" cy="182166"/>
-          </a:xfrm>
-          <a:prstGeom prst="rect">
-            <a:avLst/>
-          </a:prstGeom>
-          <a:noFill/>
-          <a:ln/>
-        </p:spPr>
-        <p:txBody>
-          <a:bodyPr wrap="square" lIns="0" tIns="0" rIns="0" bIns="0" rtlCol="0" anchor="t">
-            <a:spAutoFit/>
-          </a:bodyPr>
-          <a:lstStyle/>
-          <a:p>
-            <a:pPr algn="l" indent="0" marL="0">
-              <a:buNone/>
-            </a:pPr>
-            <a:r>
-              <a:rPr lang="en-US" sz="1100" dirty="0">
-                <a:solidFill>
-                  <a:srgbClr val="0F2537"/>
-                </a:solidFill>
-                <a:latin typeface="Work Sans SemiBold" pitchFamily="34" charset="0"/>
-                <a:ea typeface="Work Sans SemiBold" pitchFamily="34" charset="-122"/>
-                <a:cs typeface="Work Sans SemiBold" pitchFamily="34" charset="-120"/>
-              </a:rPr>
-              <a:t>Model Development </a:t>
-            </a:r>
-            <a:r>
-              <a:rPr lang="en-US" sz="700" b="1" dirty="0">
-                <a:solidFill>
-                  <a:srgbClr val="0F2537"/>
-                </a:solidFill>
-                <a:latin typeface="Work Sans Bold" pitchFamily="34" charset="0"/>
-                <a:ea typeface="Work Sans Bold" pitchFamily="34" charset="-122"/>
-                <a:cs typeface="Work Sans Bold" pitchFamily="34" charset="-120"/>
-              </a:rPr>
-              <a:t>ACTIVE FOCUS</a:t>
-            </a:r>
-            <a:endParaRPr lang="en-US" sz="1100" dirty="0"/>
-          </a:p>
-        </p:txBody>
-      </p:sp>
-      <p:sp>
-        <p:nvSpPr>
-          <p:cNvPr id="11" name="Text 7"/>
-          <p:cNvSpPr/>
-          <p:nvPr/>
-        </p:nvSpPr>
-        <p:spPr>
-          <a:xfrm>
-            <a:off x="1914525" y="2849128"/>
-            <a:ext cx="3187647" cy="205718"/>
-          </a:xfrm>
-          <a:prstGeom prst="rect">
-            <a:avLst/>
-          </a:prstGeom>
-          <a:noFill/>
-          <a:ln/>
-        </p:spPr>
-        <p:txBody>
-          <a:bodyPr wrap="none" lIns="0" tIns="0" rIns="0" bIns="0" rtlCol="0" anchor="t">
-            <a:spAutoFit/>
-          </a:bodyPr>
-          <a:lstStyle/>
-          <a:p>
-            <a:pPr algn="l" indent="0" marL="0">
-              <a:lnSpc>
-                <a:spcPct val="128000"/>
-              </a:lnSpc>
-              <a:buNone/>
-            </a:pPr>
-            <a:r>
-              <a:rPr lang="en-US" sz="950" dirty="0">
-                <a:solidFill>
-                  <a:srgbClr val="2C3E50"/>
-                </a:solidFill>
-                <a:latin typeface="Work Sans" pitchFamily="34" charset="0"/>
-                <a:ea typeface="Work Sans" pitchFamily="34" charset="-122"/>
-                <a:cs typeface="Work Sans" pitchFamily="34" charset="-120"/>
-              </a:rPr>
-              <a:t>Model Training: Fine-tuning LLMs with RAG using LoRA</a:t>
-            </a:r>
-            <a:endParaRPr lang="en-US" sz="950" dirty="0"/>
-          </a:p>
-        </p:txBody>
-      </p:sp>
-      <p:sp>
-        <p:nvSpPr>
-          <p:cNvPr id="12" name="Text 8"/>
-          <p:cNvSpPr/>
-          <p:nvPr/>
-        </p:nvSpPr>
-        <p:spPr>
-          <a:xfrm>
-            <a:off x="1914525" y="3054846"/>
-            <a:ext cx="2165896" cy="205718"/>
-          </a:xfrm>
-          <a:prstGeom prst="rect">
-            <a:avLst/>
-          </a:prstGeom>
-          <a:noFill/>
-          <a:ln/>
-        </p:spPr>
-        <p:txBody>
-          <a:bodyPr wrap="none" lIns="0" tIns="0" rIns="0" bIns="0" rtlCol="0" anchor="t">
-            <a:spAutoFit/>
-          </a:bodyPr>
-          <a:lstStyle/>
-          <a:p>
-            <a:pPr algn="l" indent="0" marL="0">
-              <a:lnSpc>
-                <a:spcPct val="128000"/>
-              </a:lnSpc>
-              <a:buNone/>
-            </a:pPr>
-            <a:r>
-              <a:rPr lang="en-US" sz="950" dirty="0">
-                <a:solidFill>
-                  <a:srgbClr val="2C3E50"/>
-                </a:solidFill>
-                <a:latin typeface="Work Sans" pitchFamily="34" charset="0"/>
-                <a:ea typeface="Work Sans" pitchFamily="34" charset="-122"/>
-                <a:cs typeface="Work Sans" pitchFamily="34" charset="-120"/>
-              </a:rPr>
-              <a:t>Integration of Adaptive Retrieval Logic</a:t>
-            </a:r>
-            <a:endParaRPr lang="en-US" sz="950" dirty="0"/>
-          </a:p>
-        </p:txBody>
-      </p:sp>
-      <p:sp>
-        <p:nvSpPr>
-          <p:cNvPr id="13" name="Text 9"/>
-          <p:cNvSpPr/>
-          <p:nvPr/>
-        </p:nvSpPr>
-        <p:spPr>
-          <a:xfrm>
-            <a:off x="428625" y="3589176"/>
-            <a:ext cx="1285875" cy="146447"/>
-          </a:xfrm>
-          <a:prstGeom prst="rect">
-            <a:avLst/>
-          </a:prstGeom>
-          <a:noFill/>
-          <a:ln/>
-        </p:spPr>
-        <p:txBody>
-          <a:bodyPr wrap="none" lIns="0" tIns="0" rIns="0" bIns="0" rtlCol="0" anchor="t">
-            <a:spAutoFit/>
-          </a:bodyPr>
-          <a:lstStyle/>
-          <a:p>
-            <a:pPr algn="l" indent="0" marL="0">
-              <a:buNone/>
-            </a:pPr>
-            <a:r>
-              <a:rPr lang="en-US" sz="900" b="1" spc="1" kern="0" dirty="0">
-                <a:solidFill>
-                  <a:srgbClr val="D96C06"/>
-                </a:solidFill>
-                <a:latin typeface="Work Sans Bold" pitchFamily="34" charset="0"/>
-                <a:ea typeface="Work Sans Bold" pitchFamily="34" charset="-122"/>
-                <a:cs typeface="Work Sans Bold" pitchFamily="34" charset="-120"/>
-              </a:rPr>
-              <a:t>Q4 2026+</a:t>
-            </a:r>
-            <a:endParaRPr lang="en-US" sz="900" dirty="0"/>
-          </a:p>
-        </p:txBody>
-      </p:sp>
-      <p:sp>
-        <p:nvSpPr>
-          <p:cNvPr id="14" name="Text 10"/>
-          <p:cNvSpPr/>
-          <p:nvPr/>
-        </p:nvSpPr>
-        <p:spPr>
-          <a:xfrm>
-            <a:off x="1714500" y="3589176"/>
-            <a:ext cx="5857875" cy="182166"/>
-          </a:xfrm>
-          <a:prstGeom prst="rect">
-            <a:avLst/>
-          </a:prstGeom>
-          <a:noFill/>
-          <a:ln/>
-        </p:spPr>
-        <p:txBody>
-          <a:bodyPr wrap="square" lIns="0" tIns="0" rIns="0" bIns="0" rtlCol="0" anchor="t">
-            <a:spAutoFit/>
-          </a:bodyPr>
-          <a:lstStyle/>
-          <a:p>
-            <a:pPr algn="l" indent="0" marL="0">
-              <a:buNone/>
-            </a:pPr>
-            <a:r>
-              <a:rPr lang="en-US" sz="1100" dirty="0">
-                <a:solidFill>
-                  <a:srgbClr val="0F2537"/>
-                </a:solidFill>
-                <a:latin typeface="Work Sans SemiBold" pitchFamily="34" charset="0"/>
-                <a:ea typeface="Work Sans SemiBold" pitchFamily="34" charset="-122"/>
-                <a:cs typeface="Work Sans SemiBold" pitchFamily="34" charset="-120"/>
-              </a:rPr>
-              <a:t>Validation &amp; Delivery</a:t>
-            </a:r>
-            <a:endParaRPr lang="en-US" sz="1100" dirty="0"/>
-          </a:p>
-        </p:txBody>
-      </p:sp>
-      <p:sp>
-        <p:nvSpPr>
-          <p:cNvPr id="15" name="Text 11"/>
-          <p:cNvSpPr/>
-          <p:nvPr/>
-        </p:nvSpPr>
-        <p:spPr>
-          <a:xfrm>
-            <a:off x="1914525" y="3828492"/>
-            <a:ext cx="2635179" cy="205718"/>
-          </a:xfrm>
-          <a:prstGeom prst="rect">
-            <a:avLst/>
-          </a:prstGeom>
-          <a:noFill/>
-          <a:ln/>
-        </p:spPr>
-        <p:txBody>
-          <a:bodyPr wrap="none" lIns="0" tIns="0" rIns="0" bIns="0" rtlCol="0" anchor="t">
-            <a:spAutoFit/>
-          </a:bodyPr>
-          <a:lstStyle/>
-          <a:p>
-            <a:pPr algn="l" indent="0" marL="0">
-              <a:lnSpc>
-                <a:spcPct val="128000"/>
-              </a:lnSpc>
-              <a:buNone/>
-            </a:pPr>
-            <a:r>
-              <a:rPr lang="en-US" sz="950" dirty="0">
-                <a:solidFill>
-                  <a:srgbClr val="2C3E50"/>
-                </a:solidFill>
-                <a:latin typeface="Work Sans" pitchFamily="34" charset="0"/>
-                <a:ea typeface="Work Sans" pitchFamily="34" charset="-122"/>
-                <a:cs typeface="Work Sans" pitchFamily="34" charset="-120"/>
-              </a:rPr>
-              <a:t>Evaluation, Testing, and Comparative Analysis</a:t>
-            </a:r>
-            <a:endParaRPr lang="en-US" sz="950" dirty="0"/>
-          </a:p>
-        </p:txBody>
-      </p:sp>
-      <p:sp>
-        <p:nvSpPr>
-          <p:cNvPr id="16" name="Text 12"/>
-          <p:cNvSpPr/>
-          <p:nvPr/>
-        </p:nvSpPr>
-        <p:spPr>
-          <a:xfrm>
-            <a:off x="1914525" y="4034210"/>
-            <a:ext cx="2012947" cy="205718"/>
-          </a:xfrm>
-          <a:prstGeom prst="rect">
-            <a:avLst/>
-          </a:prstGeom>
-          <a:noFill/>
-          <a:ln/>
-        </p:spPr>
-        <p:txBody>
-          <a:bodyPr wrap="none" lIns="0" tIns="0" rIns="0" bIns="0" rtlCol="0" anchor="t">
-            <a:spAutoFit/>
-          </a:bodyPr>
-          <a:lstStyle/>
-          <a:p>
-            <a:pPr algn="l" indent="0" marL="0">
-              <a:lnSpc>
-                <a:spcPct val="128000"/>
-              </a:lnSpc>
-              <a:buNone/>
-            </a:pPr>
-            <a:r>
-              <a:rPr lang="en-US" sz="950" dirty="0">
-                <a:solidFill>
-                  <a:srgbClr val="2C3E50"/>
-                </a:solidFill>
-                <a:latin typeface="Work Sans" pitchFamily="34" charset="0"/>
-                <a:ea typeface="Work Sans" pitchFamily="34" charset="-122"/>
-                <a:cs typeface="Work Sans" pitchFamily="34" charset="-120"/>
-              </a:rPr>
-              <a:t>Thesis Writing &amp; Paper Submission</a:t>
-            </a:r>
-            <a:endParaRPr lang="en-US" sz="950" dirty="0"/>
-          </a:p>
-        </p:txBody>
-      </p:sp>
-    </p:spTree>
-  </p:cSld>
-  <p:clrMapOvr>
-    <a:masterClrMapping/>
-  </p:clrMapOvr>
-</p:sld>
-</file>
-
-<file path=ppt/slides/slide9.xml><?xml version="1.0" encoding="utf-8"?>
-<p:sld xmlns:a="http://schemas.openxmlformats.org/drawingml/2006/main" xmlns:r="http://schemas.openxmlformats.org/officeDocument/2006/relationships" xmlns:p="http://schemas.openxmlformats.org/presentationml/2006/main">
-  <p:cSld name="Slide 9">
-    <p:spTree>
-      <p:nvGrpSpPr>
-        <p:cNvPr id="1" name=""/>
-        <p:cNvGrpSpPr/>
-        <p:nvPr/>
-      </p:nvGrpSpPr>
-      <p:grpSpPr>
-        <a:xfrm>
-          <a:off x="0" y="0"/>
-          <a:ext cx="0" cy="0"/>
-          <a:chOff x="0" y="0"/>
-          <a:chExt cx="0" cy="0"/>
-        </a:xfrm>
-      </p:grpSpPr>
-      <p:pic>
-        <p:nvPicPr>
-          <p:cNvPr id="3" name="Image 0" descr="preencoded.png">    </p:cNvPr>
-          <p:cNvPicPr>
-            <a:picLocks noChangeAspect="1"/>
-          </p:cNvPicPr>
-          <p:nvPr/>
-        </p:nvPicPr>
-        <p:blipFill>
-          <a:blip r:embed="rId1"/>
-          <a:stretch>
-            <a:fillRect/>
-          </a:stretch>
-        </p:blipFill>
-        <p:spPr>
-          <a:xfrm>
-            <a:off x="0" y="0"/>
-            <a:ext cx="9144000" cy="5143500"/>
-          </a:xfrm>
-          <a:prstGeom prst="rect">
-            <a:avLst/>
-          </a:prstGeom>
-        </p:spPr>
-      </p:pic>
-      <p:sp>
-        <p:nvSpPr>
-          <p:cNvPr id="4" name="Text 0"/>
-          <p:cNvSpPr/>
-          <p:nvPr/>
-        </p:nvSpPr>
-        <p:spPr>
-          <a:xfrm>
-            <a:off x="428625" y="785506"/>
-            <a:ext cx="8286750" cy="262533"/>
-          </a:xfrm>
-          <a:prstGeom prst="rect">
-            <a:avLst/>
-          </a:prstGeom>
-          <a:noFill/>
-          <a:ln/>
-        </p:spPr>
-        <p:txBody>
-          <a:bodyPr wrap="square" lIns="0" tIns="0" rIns="0" bIns="0" rtlCol="0" anchor="t">
-            <a:spAutoFit/>
-          </a:bodyPr>
-          <a:lstStyle/>
-          <a:p>
-            <a:pPr algn="l" indent="0" marL="0">
-              <a:buNone/>
-            </a:pPr>
-            <a:r>
-              <a:rPr lang="en-US" sz="1600" b="1" dirty="0">
-                <a:solidFill>
-                  <a:srgbClr val="0F2537"/>
-                </a:solidFill>
-                <a:latin typeface="Playfair Display Bold" pitchFamily="34" charset="0"/>
-                <a:ea typeface="Playfair Display Bold" pitchFamily="34" charset="-122"/>
-                <a:cs typeface="Playfair Display Bold" pitchFamily="34" charset="-120"/>
-              </a:rPr>
-              <a:t>Conclusion &amp; Next Steps</a:t>
-            </a:r>
-            <a:endParaRPr lang="en-US" sz="1600" dirty="0"/>
-          </a:p>
-        </p:txBody>
-      </p:sp>
-      <p:sp>
-        <p:nvSpPr>
-          <p:cNvPr id="5" name="Text 1"/>
-          <p:cNvSpPr/>
-          <p:nvPr/>
-        </p:nvSpPr>
-        <p:spPr>
-          <a:xfrm>
-            <a:off x="428625" y="1333788"/>
-            <a:ext cx="6429375" cy="754363"/>
-          </a:xfrm>
-          <a:prstGeom prst="rect">
-            <a:avLst/>
-          </a:prstGeom>
-          <a:noFill/>
-          <a:ln/>
-        </p:spPr>
-        <p:txBody>
-          <a:bodyPr wrap="square" lIns="0" tIns="0" rIns="0" bIns="0" rtlCol="0" anchor="t">
-            <a:spAutoFit/>
-          </a:bodyPr>
-          <a:lstStyle/>
-          <a:p>
-            <a:pPr algn="l" indent="0" marL="0">
-              <a:lnSpc>
-                <a:spcPct val="128000"/>
-              </a:lnSpc>
-              <a:buNone/>
-            </a:pPr>
-            <a:r>
-              <a:rPr lang="en-US" sz="1150" i="1" dirty="0">
-                <a:solidFill>
-                  <a:srgbClr val="2C3E50"/>
-                </a:solidFill>
-                <a:latin typeface="Work Sans" pitchFamily="34" charset="0"/>
-                <a:ea typeface="Work Sans" pitchFamily="34" charset="-122"/>
-                <a:cs typeface="Work Sans" pitchFamily="34" charset="-120"/>
-              </a:rPr>
-              <a:t>The framework is currently on track to deliver a scalable solution for accurate, real-time dialogue intelligence, significantly mitigating the risk of AI hallucinations in multi-turn conversations.</a:t>
-            </a:r>
-            <a:endParaRPr lang="en-US" sz="1150" dirty="0"/>
-          </a:p>
-        </p:txBody>
-      </p:sp>
-      <p:sp>
-        <p:nvSpPr>
-          <p:cNvPr id="6" name="Text 2"/>
-          <p:cNvSpPr/>
-          <p:nvPr/>
-        </p:nvSpPr>
-        <p:spPr>
-          <a:xfrm>
-            <a:off x="428625" y="2666795"/>
-            <a:ext cx="3643313" cy="198239"/>
-          </a:xfrm>
-          <a:prstGeom prst="rect">
-            <a:avLst/>
-          </a:prstGeom>
-          <a:noFill/>
-          <a:ln/>
-        </p:spPr>
-        <p:txBody>
-          <a:bodyPr wrap="square" lIns="0" tIns="0" rIns="0" bIns="0" rtlCol="0" anchor="t">
-            <a:spAutoFit/>
-          </a:bodyPr>
-          <a:lstStyle/>
-          <a:p>
-            <a:pPr algn="l" indent="0" marL="0">
-              <a:buNone/>
-            </a:pPr>
-            <a:r>
-              <a:rPr lang="en-US" sz="1200" b="1" dirty="0">
-                <a:solidFill>
-                  <a:srgbClr val="0F2537"/>
-                </a:solidFill>
-                <a:latin typeface="Playfair Display Bold" pitchFamily="34" charset="0"/>
-                <a:ea typeface="Playfair Display Bold" pitchFamily="34" charset="-122"/>
-                <a:cs typeface="Playfair Display Bold" pitchFamily="34" charset="-120"/>
-              </a:rPr>
-              <a:t>Immediate Next Steps</a:t>
-            </a:r>
-            <a:endParaRPr lang="en-US" sz="1200" dirty="0"/>
-          </a:p>
-        </p:txBody>
-      </p:sp>
-      <p:sp>
-        <p:nvSpPr>
-          <p:cNvPr id="7" name="Text 3"/>
-          <p:cNvSpPr/>
-          <p:nvPr/>
-        </p:nvSpPr>
-        <p:spPr>
-          <a:xfrm>
-            <a:off x="642938" y="3007909"/>
-            <a:ext cx="3429000" cy="411435"/>
-          </a:xfrm>
-          <a:prstGeom prst="rect">
-            <a:avLst/>
-          </a:prstGeom>
-          <a:noFill/>
-          <a:ln/>
-        </p:spPr>
-        <p:txBody>
-          <a:bodyPr wrap="square" lIns="0" tIns="0" rIns="0" bIns="0" rtlCol="0" anchor="t">
-            <a:spAutoFit/>
-          </a:bodyPr>
-          <a:lstStyle/>
-          <a:p>
-            <a:pPr algn="l" indent="0" marL="0">
-              <a:lnSpc>
-                <a:spcPct val="128000"/>
-              </a:lnSpc>
-              <a:buNone/>
-            </a:pPr>
-            <a:r>
-              <a:rPr lang="en-US" sz="950" dirty="0">
-                <a:solidFill>
-                  <a:srgbClr val="2C3E50"/>
-                </a:solidFill>
-                <a:latin typeface="Work Sans" pitchFamily="34" charset="0"/>
-                <a:ea typeface="Work Sans" pitchFamily="34" charset="-122"/>
-                <a:cs typeface="Work Sans" pitchFamily="34" charset="-120"/>
-              </a:rPr>
-              <a:t>Initiate domain-specific fine-tuning using Low-Rank Adaptation (LoRA).</a:t>
-            </a:r>
-            <a:endParaRPr lang="en-US" sz="950" dirty="0"/>
-          </a:p>
-        </p:txBody>
-      </p:sp>
-      <p:sp>
-        <p:nvSpPr>
-          <p:cNvPr id="8" name="Text 4"/>
-          <p:cNvSpPr/>
-          <p:nvPr/>
-        </p:nvSpPr>
-        <p:spPr>
-          <a:xfrm>
-            <a:off x="642938" y="3526501"/>
-            <a:ext cx="3429000" cy="411435"/>
-          </a:xfrm>
-          <a:prstGeom prst="rect">
-            <a:avLst/>
-          </a:prstGeom>
-          <a:noFill/>
-          <a:ln/>
-        </p:spPr>
-        <p:txBody>
-          <a:bodyPr wrap="square" lIns="0" tIns="0" rIns="0" bIns="0" rtlCol="0" anchor="t">
-            <a:spAutoFit/>
-          </a:bodyPr>
-          <a:lstStyle/>
-          <a:p>
-            <a:pPr algn="l" indent="0" marL="0">
-              <a:lnSpc>
-                <a:spcPct val="128000"/>
-              </a:lnSpc>
-              <a:buNone/>
-            </a:pPr>
-            <a:r>
-              <a:rPr lang="en-US" sz="950" dirty="0">
-                <a:solidFill>
-                  <a:srgbClr val="2C3E50"/>
-                </a:solidFill>
-                <a:latin typeface="Work Sans" pitchFamily="34" charset="0"/>
-                <a:ea typeface="Work Sans" pitchFamily="34" charset="-122"/>
-                <a:cs typeface="Work Sans" pitchFamily="34" charset="-120"/>
-              </a:rPr>
-              <a:t>Begin preliminary performance testing on the DialogSum dataset.</a:t>
-            </a:r>
-            <a:endParaRPr lang="en-US" sz="950" dirty="0"/>
-          </a:p>
-        </p:txBody>
-      </p:sp>
-      <p:sp>
-        <p:nvSpPr>
-          <p:cNvPr id="9" name="Text 5"/>
-          <p:cNvSpPr/>
-          <p:nvPr/>
-        </p:nvSpPr>
-        <p:spPr>
-          <a:xfrm>
-            <a:off x="642938" y="4045093"/>
-            <a:ext cx="3257885" cy="205718"/>
-          </a:xfrm>
-          <a:prstGeom prst="rect">
-            <a:avLst/>
-          </a:prstGeom>
-          <a:noFill/>
-          <a:ln/>
-        </p:spPr>
-        <p:txBody>
-          <a:bodyPr wrap="none" lIns="0" tIns="0" rIns="0" bIns="0" rtlCol="0" anchor="t">
-            <a:spAutoFit/>
-          </a:bodyPr>
-          <a:lstStyle/>
-          <a:p>
-            <a:pPr algn="l" indent="0" marL="0">
-              <a:lnSpc>
-                <a:spcPct val="128000"/>
-              </a:lnSpc>
-              <a:buNone/>
-            </a:pPr>
-            <a:r>
-              <a:rPr lang="en-US" sz="950" dirty="0">
-                <a:solidFill>
-                  <a:srgbClr val="2C3E50"/>
-                </a:solidFill>
-                <a:latin typeface="Work Sans" pitchFamily="34" charset="0"/>
-                <a:ea typeface="Work Sans" pitchFamily="34" charset="-122"/>
-                <a:cs typeface="Work Sans" pitchFamily="34" charset="-120"/>
-              </a:rPr>
-              <a:t>Refine the "Filtering Layer" for enhanced noise reduction.</a:t>
-            </a:r>
-            <a:endParaRPr lang="en-US" sz="950" dirty="0"/>
-          </a:p>
-        </p:txBody>
-      </p:sp>
-      <p:sp>
-        <p:nvSpPr>
-          <p:cNvPr id="10" name="Text 6"/>
-          <p:cNvSpPr/>
-          <p:nvPr/>
-        </p:nvSpPr>
-        <p:spPr>
-          <a:xfrm>
-            <a:off x="4643438" y="2666795"/>
-            <a:ext cx="3643313" cy="198239"/>
-          </a:xfrm>
-          <a:prstGeom prst="rect">
-            <a:avLst/>
-          </a:prstGeom>
-          <a:noFill/>
-          <a:ln/>
-        </p:spPr>
-        <p:txBody>
-          <a:bodyPr wrap="square" lIns="0" tIns="0" rIns="0" bIns="0" rtlCol="0" anchor="t">
-            <a:spAutoFit/>
-          </a:bodyPr>
-          <a:lstStyle/>
-          <a:p>
-            <a:pPr algn="l" indent="0" marL="0">
-              <a:buNone/>
-            </a:pPr>
-            <a:r>
-              <a:rPr lang="en-US" sz="1200" b="1" dirty="0">
-                <a:solidFill>
-                  <a:srgbClr val="0F2537"/>
-                </a:solidFill>
-                <a:latin typeface="Playfair Display Bold" pitchFamily="34" charset="0"/>
-                <a:ea typeface="Playfair Display Bold" pitchFamily="34" charset="-122"/>
-                <a:cs typeface="Playfair Display Bold" pitchFamily="34" charset="-120"/>
-              </a:rPr>
-              <a:t>Future Scope</a:t>
-            </a:r>
-            <a:endParaRPr lang="en-US" sz="1200" dirty="0"/>
-          </a:p>
-        </p:txBody>
-      </p:sp>
-      <p:sp>
-        <p:nvSpPr>
-          <p:cNvPr id="11" name="Text 7"/>
-          <p:cNvSpPr/>
-          <p:nvPr/>
-        </p:nvSpPr>
-        <p:spPr>
-          <a:xfrm>
-            <a:off x="4857750" y="3007909"/>
-            <a:ext cx="3429000" cy="411435"/>
-          </a:xfrm>
-          <a:prstGeom prst="rect">
-            <a:avLst/>
-          </a:prstGeom>
-          <a:noFill/>
-          <a:ln/>
-        </p:spPr>
-        <p:txBody>
-          <a:bodyPr wrap="square" lIns="0" tIns="0" rIns="0" bIns="0" rtlCol="0" anchor="t">
-            <a:spAutoFit/>
-          </a:bodyPr>
-          <a:lstStyle/>
-          <a:p>
-            <a:pPr algn="l" indent="0" marL="0">
-              <a:lnSpc>
-                <a:spcPct val="128000"/>
-              </a:lnSpc>
-              <a:buNone/>
-            </a:pPr>
-            <a:r>
-              <a:rPr lang="en-US" sz="950" dirty="0">
-                <a:solidFill>
-                  <a:srgbClr val="2C3E50"/>
-                </a:solidFill>
-                <a:latin typeface="Work Sans" pitchFamily="34" charset="0"/>
-                <a:ea typeface="Work Sans" pitchFamily="34" charset="-122"/>
-                <a:cs typeface="Work Sans" pitchFamily="34" charset="-120"/>
-              </a:rPr>
-              <a:t>Extending the framework to Multimodal Retrieval for video call summarization.</a:t>
-            </a:r>
-            <a:endParaRPr lang="en-US" sz="950" dirty="0"/>
-          </a:p>
-        </p:txBody>
-      </p:sp>
-      <p:sp>
-        <p:nvSpPr>
-          <p:cNvPr id="12" name="Text 8"/>
-          <p:cNvSpPr/>
-          <p:nvPr/>
-        </p:nvSpPr>
-        <p:spPr>
-          <a:xfrm>
-            <a:off x="4857750" y="3526501"/>
-            <a:ext cx="3429000" cy="411435"/>
-          </a:xfrm>
-          <a:prstGeom prst="rect">
-            <a:avLst/>
-          </a:prstGeom>
-          <a:noFill/>
-          <a:ln/>
-        </p:spPr>
-        <p:txBody>
-          <a:bodyPr wrap="square" lIns="0" tIns="0" rIns="0" bIns="0" rtlCol="0" anchor="t">
-            <a:spAutoFit/>
-          </a:bodyPr>
-          <a:lstStyle/>
-          <a:p>
-            <a:pPr algn="l" indent="0" marL="0">
-              <a:lnSpc>
-                <a:spcPct val="128000"/>
-              </a:lnSpc>
-              <a:buNone/>
-            </a:pPr>
-            <a:r>
-              <a:rPr lang="en-US" sz="950" dirty="0">
-                <a:solidFill>
-                  <a:srgbClr val="2C3E50"/>
-                </a:solidFill>
-                <a:latin typeface="Work Sans" pitchFamily="34" charset="0"/>
-                <a:ea typeface="Work Sans" pitchFamily="34" charset="-122"/>
-                <a:cs typeface="Work Sans" pitchFamily="34" charset="-120"/>
-              </a:rPr>
-              <a:t>Optimizing model performance for Edge Devices using Quantization (GGUF/AWQ).</a:t>
-            </a:r>
-            <a:endParaRPr lang="en-US" sz="950" dirty="0"/>
-          </a:p>
-        </p:txBody>
-      </p:sp>
-      <p:sp>
-        <p:nvSpPr>
-          <p:cNvPr id="13" name="Text 9"/>
-          <p:cNvSpPr/>
-          <p:nvPr/>
-        </p:nvSpPr>
-        <p:spPr>
-          <a:xfrm>
-            <a:off x="4857750" y="4045093"/>
-            <a:ext cx="2830181" cy="205718"/>
-          </a:xfrm>
-          <a:prstGeom prst="rect">
-            <a:avLst/>
-          </a:prstGeom>
-          <a:noFill/>
-          <a:ln/>
-        </p:spPr>
-        <p:txBody>
-          <a:bodyPr wrap="none" lIns="0" tIns="0" rIns="0" bIns="0" rtlCol="0" anchor="t">
-            <a:spAutoFit/>
-          </a:bodyPr>
-          <a:lstStyle/>
-          <a:p>
-            <a:pPr algn="l" indent="0" marL="0">
-              <a:lnSpc>
-                <a:spcPct val="128000"/>
-              </a:lnSpc>
-              <a:buNone/>
-            </a:pPr>
-            <a:r>
-              <a:rPr lang="en-US" sz="950" dirty="0">
-                <a:solidFill>
-                  <a:srgbClr val="2C3E50"/>
-                </a:solidFill>
-                <a:latin typeface="Work Sans" pitchFamily="34" charset="0"/>
-                <a:ea typeface="Work Sans" pitchFamily="34" charset="-122"/>
-                <a:cs typeface="Work Sans" pitchFamily="34" charset="-120"/>
-              </a:rPr>
-              <a:t>Integration with real-time enterprise data streams.</a:t>
             </a:r>
             <a:endParaRPr lang="en-US" sz="950" dirty="0"/>
           </a:p>
@@ -6631,4 +7928,319 @@
     </a:ext>
   </a:extLst>
 </a:theme>
+</file>
+
+<file path=ppt/theme/theme2.xml><?xml version="1.0" encoding="utf-8"?>
+<a:theme xmlns:a="http://schemas.openxmlformats.org/drawingml/2006/main" name="Office Theme">
+  <a:themeElements>
+    <a:clrScheme name="Office">
+      <a:dk1>
+        <a:sysClr val="windowText" lastClr="000000"/>
+      </a:dk1>
+      <a:lt1>
+        <a:sysClr val="window" lastClr="FFFFFF"/>
+      </a:lt1>
+      <a:dk2>
+        <a:srgbClr val="0E2841"/>
+      </a:dk2>
+      <a:lt2>
+        <a:srgbClr val="E8E8E8"/>
+      </a:lt2>
+      <a:accent1>
+        <a:srgbClr val="156082"/>
+      </a:accent1>
+      <a:accent2>
+        <a:srgbClr val="E97132"/>
+      </a:accent2>
+      <a:accent3>
+        <a:srgbClr val="196B24"/>
+      </a:accent3>
+      <a:accent4>
+        <a:srgbClr val="0F9ED5"/>
+      </a:accent4>
+      <a:accent5>
+        <a:srgbClr val="A02B93"/>
+      </a:accent5>
+      <a:accent6>
+        <a:srgbClr val="4EA72E"/>
+      </a:accent6>
+      <a:hlink>
+        <a:srgbClr val="467886"/>
+      </a:hlink>
+      <a:folHlink>
+        <a:srgbClr val="96607D"/>
+      </a:folHlink>
+    </a:clrScheme>
+    <a:fontScheme name="Office">
+      <a:majorFont>
+        <a:latin typeface="Aptos Display" panose="02110004020202020204"/>
+        <a:ea typeface=""/>
+        <a:cs typeface=""/>
+        <a:font script="Jpan" typeface="游ゴシック Light"/>
+        <a:font script="Hang" typeface="맑은 고딕"/>
+        <a:font script="Hans" typeface="等线 Light"/>
+        <a:font script="Hant" typeface="新細明體"/>
+        <a:font script="Arab" typeface="Times New Roman"/>
+        <a:font script="Hebr" typeface="Times New Roman"/>
+        <a:font script="Thai" typeface="Angsana New"/>
+        <a:font script="Ethi" typeface="Nyala"/>
+        <a:font script="Beng" typeface="Vrinda"/>
+        <a:font script="Gujr" typeface="Shruti"/>
+        <a:font script="Khmr" typeface="MoolBoran"/>
+        <a:font script="Knda" typeface="Tunga"/>
+        <a:font script="Guru" typeface="Raavi"/>
+        <a:font script="Cans" typeface="Euphemia"/>
+        <a:font script="Cher" typeface="Plantagenet Cherokee"/>
+        <a:font script="Yiii" typeface="Microsoft Yi Baiti"/>
+        <a:font script="Tibt" typeface="Microsoft Himalaya"/>
+        <a:font script="Thaa" typeface="MV Boli"/>
+        <a:font script="Deva" typeface="Mangal"/>
+        <a:font script="Telu" typeface="Gautami"/>
+        <a:font script="Taml" typeface="Latha"/>
+        <a:font script="Syrc" typeface="Estrangelo Edessa"/>
+        <a:font script="Orya" typeface="Kalinga"/>
+        <a:font script="Mlym" typeface="Kartika"/>
+        <a:font script="Laoo" typeface="DokChampa"/>
+        <a:font script="Sinh" typeface="Iskoola Pota"/>
+        <a:font script="Mong" typeface="Mongolian Baiti"/>
+        <a:font script="Viet" typeface="Times New Roman"/>
+        <a:font script="Uigh" typeface="Microsoft Uighur"/>
+        <a:font script="Geor" typeface="Sylfaen"/>
+        <a:font script="Armn" typeface="Arial"/>
+        <a:font script="Bugi" typeface="Leelawadee UI"/>
+        <a:font script="Bopo" typeface="Microsoft JhengHei"/>
+        <a:font script="Java" typeface="Javanese Text"/>
+        <a:font script="Lisu" typeface="Segoe UI"/>
+        <a:font script="Mymr" typeface="Myanmar Text"/>
+        <a:font script="Nkoo" typeface="Ebrima"/>
+        <a:font script="Olck" typeface="Nirmala UI"/>
+        <a:font script="Osma" typeface="Ebrima"/>
+        <a:font script="Phag" typeface="Phagspa"/>
+        <a:font script="Syrn" typeface="Estrangelo Edessa"/>
+        <a:font script="Syrj" typeface="Estrangelo Edessa"/>
+        <a:font script="Syre" typeface="Estrangelo Edessa"/>
+        <a:font script="Sora" typeface="Nirmala UI"/>
+        <a:font script="Tale" typeface="Microsoft Tai Le"/>
+        <a:font script="Talu" typeface="Microsoft New Tai Lue"/>
+        <a:font script="Tfng" typeface="Ebrima"/>
+      </a:majorFont>
+      <a:minorFont>
+        <a:latin typeface="Aptos" panose="02110004020202020204"/>
+        <a:ea typeface=""/>
+        <a:cs typeface=""/>
+        <a:font script="Jpan" typeface="游ゴシック"/>
+        <a:font script="Hang" typeface="맑은 고딕"/>
+        <a:font script="Hans" typeface="等线"/>
+        <a:font script="Hant" typeface="新細明體"/>
+        <a:font script="Arab" typeface="Arial"/>
+        <a:font script="Hebr" typeface="Arial"/>
+        <a:font script="Thai" typeface="Cordia New"/>
+        <a:font script="Ethi" typeface="Nyala"/>
+        <a:font script="Beng" typeface="Vrinda"/>
+        <a:font script="Gujr" typeface="Shruti"/>
+        <a:font script="Khmr" typeface="DaunPenh"/>
+        <a:font script="Knda" typeface="Tunga"/>
+        <a:font script="Guru" typeface="Raavi"/>
+        <a:font script="Cans" typeface="Euphemia"/>
+        <a:font script="Cher" typeface="Plantagenet Cherokee"/>
+        <a:font script="Yiii" typeface="Microsoft Yi Baiti"/>
+        <a:font script="Tibt" typeface="Microsoft Himalaya"/>
+        <a:font script="Thaa" typeface="MV Boli"/>
+        <a:font script="Deva" typeface="Mangal"/>
+        <a:font script="Telu" typeface="Gautami"/>
+        <a:font script="Taml" typeface="Latha"/>
+        <a:font script="Syrc" typeface="Estrangelo Edessa"/>
+        <a:font script="Orya" typeface="Kalinga"/>
+        <a:font script="Mlym" typeface="Kartika"/>
+        <a:font script="Laoo" typeface="DokChampa"/>
+        <a:font script="Sinh" typeface="Iskoola Pota"/>
+        <a:font script="Mong" typeface="Mongolian Baiti"/>
+        <a:font script="Viet" typeface="Arial"/>
+        <a:font script="Uigh" typeface="Microsoft Uighur"/>
+        <a:font script="Geor" typeface="Sylfaen"/>
+        <a:font script="Armn" typeface="Arial"/>
+        <a:font script="Bugi" typeface="Leelawadee UI"/>
+        <a:font script="Bopo" typeface="Microsoft JhengHei"/>
+        <a:font script="Java" typeface="Javanese Text"/>
+        <a:font script="Lisu" typeface="Segoe UI"/>
+        <a:font script="Mymr" typeface="Myanmar Text"/>
+        <a:font script="Nkoo" typeface="Ebrima"/>
+        <a:font script="Olck" typeface="Nirmala UI"/>
+        <a:font script="Osma" typeface="Ebrima"/>
+        <a:font script="Phag" typeface="Phagspa"/>
+        <a:font script="Syrn" typeface="Estrangelo Edessa"/>
+        <a:font script="Syrj" typeface="Estrangelo Edessa"/>
+        <a:font script="Syre" typeface="Estrangelo Edessa"/>
+        <a:font script="Sora" typeface="Nirmala UI"/>
+        <a:font script="Tale" typeface="Microsoft Tai Le"/>
+        <a:font script="Talu" typeface="Microsoft New Tai Lue"/>
+        <a:font script="Tfng" typeface="Ebrima"/>
+      </a:minorFont>
+    </a:fontScheme>
+    <a:fmtScheme name="Office">
+      <a:fillStyleLst>
+        <a:solidFill>
+          <a:schemeClr val="phClr"/>
+        </a:solidFill>
+        <a:gradFill rotWithShape="1">
+          <a:gsLst>
+            <a:gs pos="0">
+              <a:schemeClr val="phClr">
+                <a:lumMod val="110000"/>
+                <a:satMod val="105000"/>
+                <a:tint val="67000"/>
+              </a:schemeClr>
+            </a:gs>
+            <a:gs pos="50000">
+              <a:schemeClr val="phClr">
+                <a:lumMod val="105000"/>
+                <a:satMod val="103000"/>
+                <a:tint val="73000"/>
+              </a:schemeClr>
+            </a:gs>
+            <a:gs pos="100000">
+              <a:schemeClr val="phClr">
+                <a:lumMod val="105000"/>
+                <a:satMod val="109000"/>
+                <a:tint val="81000"/>
+              </a:schemeClr>
+            </a:gs>
+          </a:gsLst>
+          <a:lin ang="5400000" scaled="0"/>
+        </a:gradFill>
+        <a:gradFill rotWithShape="1">
+          <a:gsLst>
+            <a:gs pos="0">
+              <a:schemeClr val="phClr">
+                <a:satMod val="103000"/>
+                <a:lumMod val="102000"/>
+                <a:tint val="94000"/>
+              </a:schemeClr>
+            </a:gs>
+            <a:gs pos="50000">
+              <a:schemeClr val="phClr">
+                <a:satMod val="110000"/>
+                <a:lumMod val="100000"/>
+                <a:shade val="100000"/>
+              </a:schemeClr>
+            </a:gs>
+            <a:gs pos="100000">
+              <a:schemeClr val="phClr">
+                <a:lumMod val="99000"/>
+                <a:satMod val="120000"/>
+                <a:shade val="78000"/>
+              </a:schemeClr>
+            </a:gs>
+          </a:gsLst>
+          <a:lin ang="5400000" scaled="0"/>
+        </a:gradFill>
+      </a:fillStyleLst>
+      <a:lnStyleLst>
+        <a:ln w="12700" cap="flat" cmpd="sng" algn="ctr">
+          <a:solidFill>
+            <a:schemeClr val="phClr"/>
+          </a:solidFill>
+          <a:prstDash val="solid"/>
+          <a:miter lim="800000"/>
+        </a:ln>
+        <a:ln w="19050" cap="flat" cmpd="sng" algn="ctr">
+          <a:solidFill>
+            <a:schemeClr val="phClr"/>
+          </a:solidFill>
+          <a:prstDash val="solid"/>
+          <a:miter lim="800000"/>
+        </a:ln>
+        <a:ln w="25400" cap="flat" cmpd="sng" algn="ctr">
+          <a:solidFill>
+            <a:schemeClr val="phClr"/>
+          </a:solidFill>
+          <a:prstDash val="solid"/>
+          <a:miter lim="800000"/>
+        </a:ln>
+      </a:lnStyleLst>
+      <a:effectStyleLst>
+        <a:effectStyle>
+          <a:effectLst/>
+        </a:effectStyle>
+        <a:effectStyle>
+          <a:effectLst/>
+        </a:effectStyle>
+        <a:effectStyle>
+          <a:effectLst>
+            <a:outerShdw blurRad="57150" dist="19050" dir="5400000" algn="ctr" rotWithShape="0">
+              <a:srgbClr val="000000">
+                <a:alpha val="63000"/>
+              </a:srgbClr>
+            </a:outerShdw>
+          </a:effectLst>
+        </a:effectStyle>
+      </a:effectStyleLst>
+      <a:bgFillStyleLst>
+        <a:solidFill>
+          <a:schemeClr val="phClr"/>
+        </a:solidFill>
+        <a:solidFill>
+          <a:schemeClr val="phClr">
+            <a:tint val="95000"/>
+            <a:satMod val="170000"/>
+          </a:schemeClr>
+        </a:solidFill>
+        <a:gradFill rotWithShape="1">
+          <a:gsLst>
+            <a:gs pos="0">
+              <a:schemeClr val="phClr">
+                <a:tint val="93000"/>
+                <a:satMod val="150000"/>
+                <a:shade val="98000"/>
+                <a:lumMod val="102000"/>
+              </a:schemeClr>
+            </a:gs>
+            <a:gs pos="50000">
+              <a:schemeClr val="phClr">
+                <a:tint val="98000"/>
+                <a:satMod val="130000"/>
+                <a:shade val="90000"/>
+                <a:lumMod val="103000"/>
+              </a:schemeClr>
+            </a:gs>
+            <a:gs pos="100000">
+              <a:schemeClr val="phClr">
+                <a:shade val="63000"/>
+                <a:satMod val="120000"/>
+              </a:schemeClr>
+            </a:gs>
+          </a:gsLst>
+          <a:lin ang="5400000" scaled="0"/>
+        </a:gradFill>
+      </a:bgFillStyleLst>
+    </a:fmtScheme>
+  </a:themeElements>
+  <a:objectDefaults>
+    <a:lnDef>
+      <a:spPr/>
+      <a:bodyPr/>
+      <a:lstStyle/>
+      <a:style>
+        <a:lnRef idx="2">
+          <a:schemeClr val="accent1"/>
+        </a:lnRef>
+        <a:fillRef idx="0">
+          <a:schemeClr val="accent1"/>
+        </a:fillRef>
+        <a:effectRef idx="1">
+          <a:schemeClr val="accent1"/>
+        </a:effectRef>
+        <a:fontRef idx="minor">
+          <a:schemeClr val="tx1"/>
+        </a:fontRef>
+      </a:style>
+    </a:lnDef>
+  </a:objectDefaults>
+  <a:extraClrSchemeLst/>
+  <a:extLst>
+    <a:ext uri="{05A4C25C-085E-4340-85A3-A5531E510DB2}">
+      <thm15:themeFamily xmlns:thm15="http://schemas.microsoft.com/office/thememl/2012/main" name="Office Theme" id="{2E142A2C-CD16-42D6-873A-C26D2A0506FA}" vid="{1BDDFF52-6CD6-40A5-AB3C-68EB2F1E4D0A}"/>
+    </a:ext>
+  </a:extLst>
+</a:theme>
 </file>